--- a/lessons/lesson-08/slides.pptx
+++ b/lessons/lesson-08/slides.pptx
@@ -2,26 +2,26 @@
 <file path=ppt/presentation.xml><?xml version="1.0" encoding="utf-8"?>
 <p:presentation xmlns:p="http://schemas.openxmlformats.org/presentationml/2006/main">
   <p:sldMasterIdLst>
-    <p:sldMasterId xmlns:r="http://schemas.openxmlformats.org/officeDocument/2006/relationships" id="2147483648" r:id="R8578b7f134ae4508"/>
+    <p:sldMasterId xmlns:r="http://schemas.openxmlformats.org/officeDocument/2006/relationships" id="2147483648" r:id="R5d3679314fb34a5a"/>
   </p:sldMasterIdLst>
   <p:notesMasterIdLst>
-    <p:notesMasterId xmlns:r="http://schemas.openxmlformats.org/officeDocument/2006/relationships" r:id="R05ab8307368a48f8"/>
+    <p:notesMasterId xmlns:r="http://schemas.openxmlformats.org/officeDocument/2006/relationships" r:id="Rcaa2fafb29774d7b"/>
   </p:notesMasterIdLst>
   <p:sldIdLst>
-    <p:sldId xmlns:r="http://schemas.openxmlformats.org/officeDocument/2006/relationships" id="256" r:id="R24c84240fc404a66"/>
-    <p:sldId xmlns:r="http://schemas.openxmlformats.org/officeDocument/2006/relationships" id="257" r:id="Ree1c908a4491440d"/>
-    <p:sldId xmlns:r="http://schemas.openxmlformats.org/officeDocument/2006/relationships" id="258" r:id="Rddf7f46fc03741a4"/>
-    <p:sldId xmlns:r="http://schemas.openxmlformats.org/officeDocument/2006/relationships" id="259" r:id="Rd2723e11e0874e8d"/>
-    <p:sldId xmlns:r="http://schemas.openxmlformats.org/officeDocument/2006/relationships" id="260" r:id="R33a7b6cf31c14c07"/>
-    <p:sldId xmlns:r="http://schemas.openxmlformats.org/officeDocument/2006/relationships" id="261" r:id="R35ea0e2e2663425a"/>
-    <p:sldId xmlns:r="http://schemas.openxmlformats.org/officeDocument/2006/relationships" id="262" r:id="Rf719780477b342c1"/>
-    <p:sldId xmlns:r="http://schemas.openxmlformats.org/officeDocument/2006/relationships" id="263" r:id="Rad2b75beee834256"/>
-    <p:sldId xmlns:r="http://schemas.openxmlformats.org/officeDocument/2006/relationships" id="264" r:id="Rdaac28179a524c1c"/>
-    <p:sldId xmlns:r="http://schemas.openxmlformats.org/officeDocument/2006/relationships" id="265" r:id="Rc8ce05faf3684b5a"/>
-    <p:sldId xmlns:r="http://schemas.openxmlformats.org/officeDocument/2006/relationships" id="266" r:id="R674fd7a81a5e42dd"/>
-    <p:sldId xmlns:r="http://schemas.openxmlformats.org/officeDocument/2006/relationships" id="267" r:id="Rfc37a4f4d89d46c1"/>
-    <p:sldId xmlns:r="http://schemas.openxmlformats.org/officeDocument/2006/relationships" id="268" r:id="R8c9449f478954e09"/>
-    <p:sldId xmlns:r="http://schemas.openxmlformats.org/officeDocument/2006/relationships" id="269" r:id="Ra041a8bbe5894f79"/>
+    <p:sldId xmlns:r="http://schemas.openxmlformats.org/officeDocument/2006/relationships" id="256" r:id="R1d650e49b70b4b07"/>
+    <p:sldId xmlns:r="http://schemas.openxmlformats.org/officeDocument/2006/relationships" id="257" r:id="Rd3ef2e8469a94242"/>
+    <p:sldId xmlns:r="http://schemas.openxmlformats.org/officeDocument/2006/relationships" id="258" r:id="R03c0be2b2f02471c"/>
+    <p:sldId xmlns:r="http://schemas.openxmlformats.org/officeDocument/2006/relationships" id="259" r:id="R7f226b48c49a45ad"/>
+    <p:sldId xmlns:r="http://schemas.openxmlformats.org/officeDocument/2006/relationships" id="260" r:id="R7a2bb1f646734f06"/>
+    <p:sldId xmlns:r="http://schemas.openxmlformats.org/officeDocument/2006/relationships" id="261" r:id="R8f78dbf6af434a9d"/>
+    <p:sldId xmlns:r="http://schemas.openxmlformats.org/officeDocument/2006/relationships" id="262" r:id="R037d76cd2e3242b4"/>
+    <p:sldId xmlns:r="http://schemas.openxmlformats.org/officeDocument/2006/relationships" id="263" r:id="R92cee00affd64262"/>
+    <p:sldId xmlns:r="http://schemas.openxmlformats.org/officeDocument/2006/relationships" id="264" r:id="R99964785fa27460e"/>
+    <p:sldId xmlns:r="http://schemas.openxmlformats.org/officeDocument/2006/relationships" id="265" r:id="R880386096d7841b4"/>
+    <p:sldId xmlns:r="http://schemas.openxmlformats.org/officeDocument/2006/relationships" id="266" r:id="R55e10143111447f2"/>
+    <p:sldId xmlns:r="http://schemas.openxmlformats.org/officeDocument/2006/relationships" id="267" r:id="R6f64d385008a4c68"/>
+    <p:sldId xmlns:r="http://schemas.openxmlformats.org/officeDocument/2006/relationships" id="268" r:id="Rfc58d907cc0c4ea7"/>
+    <p:sldId xmlns:r="http://schemas.openxmlformats.org/officeDocument/2006/relationships" id="269" r:id="R9c80481aa9c04bd3"/>
   </p:sldIdLst>
   <p:sldSz cx="12192000" cy="6858000"/>
   <p:notesSz cx="6858000" cy="9144000"/>
@@ -501,7 +501,7 @@
           <a:lstStyle xmlns:a="http://schemas.openxmlformats.org/drawingml/2006/main"/>
           <a:p xmlns:a="http://schemas.openxmlformats.org/drawingml/2006/main">
             <a:r>
-              <a:t>本案例为课程教学案例，不是已发表实证结果。演示时口头完成完整三分钟陈述，并请学生指出自己还缺哪一段上游工件。</a:t>
+              <a:t>本页只用公开论文可核验内容重构五段，不自造实验数字，也不表示课程已复现论文结果。</a:t>
             </a:r>
           </a:p>
           <a:p xmlns:a="http://schemas.openxmlformats.org/drawingml/2006/main">
@@ -516,17 +516,12 @@
           </a:p>
           <a:p xmlns:a="http://schemas.openxmlformats.org/drawingml/2006/main">
             <a:r>
-              <a:t>- /Users/bright/Projects/courses/graduate/lessons/lesson-08/handout.md</a:t>
+              <a:t>- Bouthillier, X. et al. Accounting for Variance in Machine Learning Benchmarks. MLSys 2021. https://proceedings.mlsys.org/paper_files/paper/2021/hash/0184b0cd3cfb185989f858a1d9f5c1eb-Abstract.html</a:t>
             </a:r>
           </a:p>
           <a:p xmlns:a="http://schemas.openxmlformats.org/drawingml/2006/main">
             <a:r>
               <a:t>- /Users/bright/Projects/courses/graduate/lessons/lesson-08/slides.md</a:t>
-            </a:r>
-          </a:p>
-          <a:p xmlns:a="http://schemas.openxmlformats.org/drawingml/2006/main">
-            <a:r>
-              <a:t>- Teaching case; not empirical evidence.</a:t>
             </a:r>
           </a:p>
           <a:p xmlns:a="http://schemas.openxmlformats.org/drawingml/2006/main">
@@ -601,7 +596,7 @@
           <a:lstStyle xmlns:a="http://schemas.openxmlformats.org/drawingml/2006/main"/>
           <a:p xmlns:a="http://schemas.openxmlformats.org/drawingml/2006/main">
             <a:r>
-              <a:t>请学生指出三条反馈分别为何可采纳、可拒绝或需暂缓。三条反馈和决策均为课程教学案例。</a:t>
+              <a:t>三条反馈和决策均为虚构教学内容，不是 Bouthillier et al. 的真实评审意见。</a:t>
             </a:r>
           </a:p>
           <a:p xmlns:a="http://schemas.openxmlformats.org/drawingml/2006/main">
@@ -1742,7 +1737,7 @@
           <p:nvPr/>
         </p:nvPicPr>
         <p:blipFill>
-          <a:blip xmlns:r="http://schemas.openxmlformats.org/officeDocument/2006/relationships" xmlns:a="http://schemas.openxmlformats.org/drawingml/2006/main" r:embed="R041eaa2fc3024331">
+          <a:blip xmlns:r="http://schemas.openxmlformats.org/officeDocument/2006/relationships" xmlns:a="http://schemas.openxmlformats.org/drawingml/2006/main" r:embed="Re82d2a6ec7574eb5">
             <a:duotone>
               <a:prstClr val="black"/>
               <a:schemeClr val="accent1">
@@ -1920,7 +1915,7 @@
           <p:nvPr/>
         </p:nvPicPr>
         <p:blipFill rotWithShape="1">
-          <a:blip xmlns:r="http://schemas.openxmlformats.org/officeDocument/2006/relationships" xmlns:a="http://schemas.openxmlformats.org/drawingml/2006/main" r:embed="Rcfccfa3734274f0c"/>
+          <a:blip xmlns:r="http://schemas.openxmlformats.org/officeDocument/2006/relationships" xmlns:a="http://schemas.openxmlformats.org/drawingml/2006/main" r:embed="R13b3fdcf60504505"/>
           <a:srcRect xmlns:a="http://schemas.openxmlformats.org/drawingml/2006/main" l="74359" t="0" r="1346" b="0"/>
           <a:stretch xmlns:a="http://schemas.openxmlformats.org/drawingml/2006/main"/>
         </p:blipFill>
@@ -1943,7 +1938,7 @@
           <p:nvPr/>
         </p:nvPicPr>
         <p:blipFill rotWithShape="1">
-          <a:blip xmlns:r="http://schemas.openxmlformats.org/officeDocument/2006/relationships" xmlns:a="http://schemas.openxmlformats.org/drawingml/2006/main" r:embed="R64686ebfee2f42d6">
+          <a:blip xmlns:r="http://schemas.openxmlformats.org/officeDocument/2006/relationships" xmlns:a="http://schemas.openxmlformats.org/drawingml/2006/main" r:embed="R5000e6182bf34af4">
             <a:alphaModFix amt="35000"/>
           </a:blip>
           <a:srcRect xmlns:a="http://schemas.openxmlformats.org/drawingml/2006/main" l="0" t="9831" r="0" b="36385"/>
@@ -2205,7 +2200,7 @@
           <p:nvPr/>
         </p:nvPicPr>
         <p:blipFill>
-          <a:blip xmlns:r="http://schemas.openxmlformats.org/officeDocument/2006/relationships" xmlns:a="http://schemas.openxmlformats.org/drawingml/2006/main" r:embed="R161803e6f9544dba"/>
+          <a:blip xmlns:r="http://schemas.openxmlformats.org/officeDocument/2006/relationships" xmlns:a="http://schemas.openxmlformats.org/drawingml/2006/main" r:embed="R2f5ed67b288347d7"/>
           <a:srcRect xmlns:a="http://schemas.openxmlformats.org/drawingml/2006/main" l="0" t="0" r="54251" b="0"/>
           <a:stretch xmlns:a="http://schemas.openxmlformats.org/drawingml/2006/main"/>
         </p:blipFill>
@@ -2462,7 +2457,7 @@
           <p:nvPr/>
         </p:nvPicPr>
         <p:blipFill rotWithShape="1">
-          <a:blip xmlns:r="http://schemas.openxmlformats.org/officeDocument/2006/relationships" xmlns:a="http://schemas.openxmlformats.org/drawingml/2006/main" r:embed="R6081718ddaa844e5"/>
+          <a:blip xmlns:r="http://schemas.openxmlformats.org/officeDocument/2006/relationships" xmlns:a="http://schemas.openxmlformats.org/drawingml/2006/main" r:embed="R30f1ea24202641c8"/>
           <a:srcRect xmlns:a="http://schemas.openxmlformats.org/drawingml/2006/main" l="0" t="0" r="1346" b="0"/>
           <a:stretch xmlns:a="http://schemas.openxmlformats.org/drawingml/2006/main"/>
         </p:blipFill>
@@ -2645,7 +2640,7 @@
           <p:nvPr/>
         </p:nvPicPr>
         <p:blipFill>
-          <a:blip xmlns:r="http://schemas.openxmlformats.org/officeDocument/2006/relationships" xmlns:a="http://schemas.openxmlformats.org/drawingml/2006/main" r:embed="Rdf9c616efeb945bb"/>
+          <a:blip xmlns:r="http://schemas.openxmlformats.org/officeDocument/2006/relationships" xmlns:a="http://schemas.openxmlformats.org/drawingml/2006/main" r:embed="R6df72e01799542f6"/>
           <a:stretch xmlns:a="http://schemas.openxmlformats.org/drawingml/2006/main">
             <a:fillRect l="0" t="0" r="0" b="0"/>
           </a:stretch>
@@ -2741,7 +2736,7 @@
           <p:nvPr/>
         </p:nvPicPr>
         <p:blipFill>
-          <a:blip xmlns:r="http://schemas.openxmlformats.org/officeDocument/2006/relationships" xmlns:a="http://schemas.openxmlformats.org/drawingml/2006/main" r:embed="R79df5b0749dc4359">
+          <a:blip xmlns:r="http://schemas.openxmlformats.org/officeDocument/2006/relationships" xmlns:a="http://schemas.openxmlformats.org/drawingml/2006/main" r:embed="R08366a2887ba4dfa">
             <a:duotone>
               <a:prstClr val="black"/>
               <a:schemeClr val="accent1">
@@ -2908,7 +2903,7 @@
           <p:nvPr/>
         </p:nvPicPr>
         <p:blipFill rotWithShape="1">
-          <a:blip xmlns:r="http://schemas.openxmlformats.org/officeDocument/2006/relationships" xmlns:a="http://schemas.openxmlformats.org/drawingml/2006/main" r:embed="Rfdc143b1c3324c4c">
+          <a:blip xmlns:r="http://schemas.openxmlformats.org/officeDocument/2006/relationships" xmlns:a="http://schemas.openxmlformats.org/drawingml/2006/main" r:embed="Ra5b99b6110184f1c">
             <a:alphaModFix amt="20000"/>
             <a:duotone>
               <a:schemeClr val="accent4">
@@ -3006,10 +3001,10 @@
   </p:cSld>
   <p:clrMap bg1="lt1" tx1="dk1" bg2="lt2" tx2="dk2" accent1="accent1" accent2="accent2" accent3="accent3" accent4="accent4" accent5="accent5" accent6="accent6" hlink="hlink" folHlink="folHlink"/>
   <p:sldLayoutIdLst>
-    <p:sldLayoutId xmlns:r="http://schemas.openxmlformats.org/officeDocument/2006/relationships" id="2147483649" r:id="Ra23b6a790eb24476"/>
-    <p:sldLayoutId xmlns:r="http://schemas.openxmlformats.org/officeDocument/2006/relationships" id="2147483650" r:id="Rf3c9044d4b9e42ec"/>
-    <p:sldLayoutId xmlns:r="http://schemas.openxmlformats.org/officeDocument/2006/relationships" id="2147483651" r:id="Rbb473e1bf442401b"/>
-    <p:sldLayoutId xmlns:r="http://schemas.openxmlformats.org/officeDocument/2006/relationships" id="2147483652" r:id="R25a67d77b73649dc"/>
+    <p:sldLayoutId xmlns:r="http://schemas.openxmlformats.org/officeDocument/2006/relationships" id="2147483649" r:id="R0fa7f2e08e7e47ba"/>
+    <p:sldLayoutId xmlns:r="http://schemas.openxmlformats.org/officeDocument/2006/relationships" id="2147483650" r:id="R80c28b717efa47fc"/>
+    <p:sldLayoutId xmlns:r="http://schemas.openxmlformats.org/officeDocument/2006/relationships" id="2147483651" r:id="R68b1272001124e5d"/>
+    <p:sldLayoutId xmlns:r="http://schemas.openxmlformats.org/officeDocument/2006/relationships" id="2147483652" r:id="R65a99b39e8e94eaf"/>
   </p:sldLayoutIdLst>
   <p:hf hdr="0" ftr="0" dt="0"/>
   <p:txStyles>
@@ -3810,7 +3805,7 @@
           <p:cNvPr id="6" name="p10-case">
             <a:extLst xmlns:a="http://schemas.openxmlformats.org/drawingml/2006/main">
               <a:ext uri="{FF2B5EF4-FFF2-40B4-BE49-F238E27FC236}">
-                <a16:creationId xmlns:a16="http://schemas.microsoft.com/office/drawing/2014/main" id="{3B0DEFAF-C88D-4249-8C1B-05CE1F39B6AD}"/>
+                <a16:creationId xmlns:a16="http://schemas.microsoft.com/office/drawing/2014/main" id="{270FDE85-784C-478B-86EF-C90B4AEAF681}"/>
               </a:ext>
             </a:extLst>
           </p:cNvPr>
@@ -3855,7 +3850,7 @@
                 <a:ea typeface="Microsoft YaHei"/>
                 <a:cs typeface="Microsoft YaHei"/>
               </a:rPr>
-              <a:t>课程教学案例｜结构化阅读卡与 AI 摘要限定条件遗漏率</a:t>
+              <a:t>真实公开方案对象｜Bouthillier et al. 2021 benchmark 方差</a:t>
             </a:r>
           </a:p>
         </p:txBody>
@@ -3865,7 +3860,7 @@
           <p:cNvPr id="7" name="p10-left-title">
             <a:extLst xmlns:a="http://schemas.openxmlformats.org/drawingml/2006/main">
               <a:ext uri="{FF2B5EF4-FFF2-40B4-BE49-F238E27FC236}">
-                <a16:creationId xmlns:a16="http://schemas.microsoft.com/office/drawing/2014/main" id="{A7DFC869-11C7-4B02-8FEA-FA03D04F7E8B}"/>
+                <a16:creationId xmlns:a16="http://schemas.microsoft.com/office/drawing/2014/main" id="{4F30FA66-A580-4E88-AE73-655B544B6B1D}"/>
               </a:ext>
             </a:extLst>
           </p:cNvPr>
@@ -3908,7 +3903,7 @@
                 <a:ea typeface="Microsoft YaHei"/>
                 <a:cs typeface="Microsoft YaHei"/>
               </a:rPr>
-              <a:t>第 7 课四项输入</a:t>
+              <a:t>公开论文可核验内容</a:t>
             </a:r>
           </a:p>
         </p:txBody>
@@ -3918,7 +3913,7 @@
           <p:cNvPr id="8" name="p10-il-0">
             <a:extLst xmlns:a="http://schemas.openxmlformats.org/drawingml/2006/main">
               <a:ext uri="{FF2B5EF4-FFF2-40B4-BE49-F238E27FC236}">
-                <a16:creationId xmlns:a16="http://schemas.microsoft.com/office/drawing/2014/main" id="{ABFB8218-04E4-475C-91DC-EF50546017B7}"/>
+                <a16:creationId xmlns:a16="http://schemas.microsoft.com/office/drawing/2014/main" id="{4740E2EC-3673-4BB7-8DF9-89E27FEBF57C}"/>
               </a:ext>
             </a:extLst>
           </p:cNvPr>
@@ -3950,14 +3945,14 @@
           <a:lstStyle xmlns:a="http://schemas.openxmlformats.org/drawingml/2006/main"/>
           <a:p xmlns:a="http://schemas.openxmlformats.org/drawingml/2006/main">
             <a:pPr algn="ctr">
-              <a:defRPr sz="1275" b="1">
+              <a:defRPr sz="1350" b="1">
                 <a:solidFill>
                   <a:srgbClr val="FFFFFF"/>
                 </a:solidFill>
               </a:defRPr>
             </a:pPr>
             <a:r>
-              <a:rPr sz="1275" b="1">
+              <a:rPr sz="1350" b="1">
                 <a:solidFill>
                   <a:srgbClr val="FFFFFF"/>
                 </a:solidFill>
@@ -3965,7 +3960,7 @@
                 <a:ea typeface="Microsoft YaHei"/>
                 <a:cs typeface="Microsoft YaHei"/>
               </a:rPr>
-              <a:t>主机制</a:t>
+              <a:t>问题</a:t>
             </a:r>
           </a:p>
         </p:txBody>
@@ -3975,7 +3970,7 @@
           <p:cNvPr id="9" name="p10-id-0">
             <a:extLst xmlns:a="http://schemas.openxmlformats.org/drawingml/2006/main">
               <a:ext uri="{FF2B5EF4-FFF2-40B4-BE49-F238E27FC236}">
-                <a16:creationId xmlns:a16="http://schemas.microsoft.com/office/drawing/2014/main" id="{379A7C8D-39CE-4855-9CE8-6EEAE6D22477}"/>
+                <a16:creationId xmlns:a16="http://schemas.microsoft.com/office/drawing/2014/main" id="{6DCCFFDB-1C1E-4965-9330-C4076C61C8C2}"/>
               </a:ext>
             </a:extLst>
           </p:cNvPr>
@@ -4005,14 +4000,14 @@
           <a:lstStyle xmlns:a="http://schemas.openxmlformats.org/drawingml/2006/main"/>
           <a:p xmlns:a="http://schemas.openxmlformats.org/drawingml/2006/main">
             <a:pPr algn="l">
-              <a:defRPr sz="1275" b="1">
+              <a:defRPr sz="1350" b="1">
                 <a:solidFill>
                   <a:srgbClr val="263746"/>
                 </a:solidFill>
               </a:defRPr>
             </a:pPr>
             <a:r>
-              <a:rPr sz="1275" b="1">
+              <a:rPr sz="1350" b="1">
                 <a:solidFill>
                   <a:srgbClr val="263746"/>
                 </a:solidFill>
@@ -4020,7 +4015,7 @@
                 <a:ea typeface="Microsoft YaHei"/>
                 <a:cs typeface="Microsoft YaHei"/>
               </a:rPr>
-              <a:t>字段约束 → 强制标注 → 错读更易暴露</a:t>
+              <a:t>benchmark 比较忽略多个方差来源</a:t>
             </a:r>
           </a:p>
         </p:txBody>
@@ -4030,7 +4025,7 @@
           <p:cNvPr id="10" name="p10-il-1">
             <a:extLst xmlns:a="http://schemas.openxmlformats.org/drawingml/2006/main">
               <a:ext uri="{FF2B5EF4-FFF2-40B4-BE49-F238E27FC236}">
-                <a16:creationId xmlns:a16="http://schemas.microsoft.com/office/drawing/2014/main" id="{1B97C646-F972-4F7D-A81D-024C87476F9B}"/>
+                <a16:creationId xmlns:a16="http://schemas.microsoft.com/office/drawing/2014/main" id="{EB598A61-4FB7-4BBD-9F35-195D97DB64D7}"/>
               </a:ext>
             </a:extLst>
           </p:cNvPr>
@@ -4062,14 +4057,14 @@
           <a:lstStyle xmlns:a="http://schemas.openxmlformats.org/drawingml/2006/main"/>
           <a:p xmlns:a="http://schemas.openxmlformats.org/drawingml/2006/main">
             <a:pPr algn="ctr">
-              <a:defRPr sz="1275" b="1">
+              <a:defRPr sz="1350" b="1">
                 <a:solidFill>
                   <a:srgbClr val="FFFFFF"/>
                 </a:solidFill>
               </a:defRPr>
             </a:pPr>
             <a:r>
-              <a:rPr sz="1275" b="1">
+              <a:rPr sz="1350" b="1">
                 <a:solidFill>
                   <a:srgbClr val="FFFFFF"/>
                 </a:solidFill>
@@ -4077,7 +4072,7 @@
                 <a:ea typeface="Microsoft YaHei"/>
                 <a:cs typeface="Microsoft YaHei"/>
               </a:rPr>
-              <a:t>替代假设</a:t>
+              <a:t>证据动作</a:t>
             </a:r>
           </a:p>
         </p:txBody>
@@ -4087,7 +4082,7 @@
           <p:cNvPr id="11" name="p10-id-1">
             <a:extLst xmlns:a="http://schemas.openxmlformats.org/drawingml/2006/main">
               <a:ext uri="{FF2B5EF4-FFF2-40B4-BE49-F238E27FC236}">
-                <a16:creationId xmlns:a16="http://schemas.microsoft.com/office/drawing/2014/main" id="{D1A55143-936E-427B-831C-4BC52218FF7E}"/>
+                <a16:creationId xmlns:a16="http://schemas.microsoft.com/office/drawing/2014/main" id="{48322CD2-D87F-459C-B8CA-625A37348E4B}"/>
               </a:ext>
             </a:extLst>
           </p:cNvPr>
@@ -4117,14 +4112,14 @@
           <a:lstStyle xmlns:a="http://schemas.openxmlformats.org/drawingml/2006/main"/>
           <a:p xmlns:a="http://schemas.openxmlformats.org/drawingml/2006/main">
             <a:pPr algn="l">
-              <a:defRPr sz="1275" b="1">
+              <a:defRPr sz="1350" b="1">
                 <a:solidFill>
                   <a:srgbClr val="263746"/>
                 </a:solidFill>
               </a:defRPr>
             </a:pPr>
             <a:r>
-              <a:rPr sz="1275" b="1">
+              <a:rPr sz="1350" b="1">
                 <a:solidFill>
                   <a:srgbClr val="263746"/>
                 </a:solidFill>
@@ -4132,7 +4127,7 @@
                 <a:ea typeface="Microsoft YaHei"/>
                 <a:cs typeface="Microsoft YaHei"/>
               </a:rPr>
-              <a:t>A1 任务转移 / A2 标注假象 / A3 选择效应</a:t>
+              <a:t>建模 benchmarking 过程，评估误判改进率</a:t>
             </a:r>
           </a:p>
         </p:txBody>
@@ -4142,7 +4137,7 @@
           <p:cNvPr id="12" name="p10-il-2">
             <a:extLst xmlns:a="http://schemas.openxmlformats.org/drawingml/2006/main">
               <a:ext uri="{FF2B5EF4-FFF2-40B4-BE49-F238E27FC236}">
-                <a16:creationId xmlns:a16="http://schemas.microsoft.com/office/drawing/2014/main" id="{B17DD8E2-771F-40F1-B32A-1A957286395E}"/>
+                <a16:creationId xmlns:a16="http://schemas.microsoft.com/office/drawing/2014/main" id="{23E94D95-0793-407F-8401-C52C29C90D3A}"/>
               </a:ext>
             </a:extLst>
           </p:cNvPr>
@@ -4174,14 +4169,14 @@
           <a:lstStyle xmlns:a="http://schemas.openxmlformats.org/drawingml/2006/main"/>
           <a:p xmlns:a="http://schemas.openxmlformats.org/drawingml/2006/main">
             <a:pPr algn="ctr">
-              <a:defRPr sz="1275" b="1">
+              <a:defRPr sz="1350" b="1">
                 <a:solidFill>
                   <a:srgbClr val="FFFFFF"/>
                 </a:solidFill>
               </a:defRPr>
             </a:pPr>
             <a:r>
-              <a:rPr sz="1275" b="1">
+              <a:rPr sz="1350" b="1">
                 <a:solidFill>
                   <a:srgbClr val="FFFFFF"/>
                 </a:solidFill>
@@ -4189,7 +4184,7 @@
                 <a:ea typeface="Microsoft YaHei"/>
                 <a:cs typeface="Microsoft YaHei"/>
               </a:rPr>
-              <a:t>实验草图</a:t>
+              <a:t>机制</a:t>
             </a:r>
           </a:p>
         </p:txBody>
@@ -4199,7 +4194,7 @@
           <p:cNvPr id="13" name="p10-id-2">
             <a:extLst xmlns:a="http://schemas.openxmlformats.org/drawingml/2006/main">
               <a:ext uri="{FF2B5EF4-FFF2-40B4-BE49-F238E27FC236}">
-                <a16:creationId xmlns:a16="http://schemas.microsoft.com/office/drawing/2014/main" id="{95DF9AA8-40B5-44F6-BE21-F8A24D67C001}"/>
+                <a16:creationId xmlns:a16="http://schemas.microsoft.com/office/drawing/2014/main" id="{5B4CDA87-5C7C-46F7-84D7-E4CC5F31149E}"/>
               </a:ext>
             </a:extLst>
           </p:cNvPr>
@@ -4229,14 +4224,14 @@
           <a:lstStyle xmlns:a="http://schemas.openxmlformats.org/drawingml/2006/main"/>
           <a:p xmlns:a="http://schemas.openxmlformats.org/drawingml/2006/main">
             <a:pPr algn="l">
-              <a:defRPr sz="1275" b="1">
+              <a:defRPr sz="1350" b="1">
                 <a:solidFill>
                   <a:srgbClr val="263746"/>
                 </a:solidFill>
               </a:defRPr>
             </a:pPr>
             <a:r>
-              <a:rPr sz="1275" b="1">
+              <a:rPr sz="1350" b="1">
                 <a:solidFill>
                   <a:srgbClr val="263746"/>
                 </a:solidFill>
@@ -4244,7 +4239,7 @@
                 <a:ea typeface="Microsoft YaHei"/>
                 <a:cs typeface="Microsoft YaHei"/>
               </a:rPr>
-              <a:t>变量、baseline、停止条件、失败预案</a:t>
+              <a:t>抽样 / 初始化 / 超参数方差改变比较</a:t>
             </a:r>
           </a:p>
         </p:txBody>
@@ -4254,7 +4249,7 @@
           <p:cNvPr id="14" name="p10-il-3">
             <a:extLst xmlns:a="http://schemas.openxmlformats.org/drawingml/2006/main">
               <a:ext uri="{FF2B5EF4-FFF2-40B4-BE49-F238E27FC236}">
-                <a16:creationId xmlns:a16="http://schemas.microsoft.com/office/drawing/2014/main" id="{CD2EF745-5A62-4FC3-AF8D-A68DC46097F3}"/>
+                <a16:creationId xmlns:a16="http://schemas.microsoft.com/office/drawing/2014/main" id="{B894A944-631D-46F5-8C0F-3BB7AE4992C7}"/>
               </a:ext>
             </a:extLst>
           </p:cNvPr>
@@ -4286,14 +4281,14 @@
           <a:lstStyle xmlns:a="http://schemas.openxmlformats.org/drawingml/2006/main"/>
           <a:p xmlns:a="http://schemas.openxmlformats.org/drawingml/2006/main">
             <a:pPr algn="ctr">
-              <a:defRPr sz="1275" b="1">
+              <a:defRPr sz="1350" b="1">
                 <a:solidFill>
                   <a:srgbClr val="FFFFFF"/>
                 </a:solidFill>
               </a:defRPr>
             </a:pPr>
             <a:r>
-              <a:rPr sz="1275" b="1">
+              <a:rPr sz="1350" b="1">
                 <a:solidFill>
                   <a:srgbClr val="FFFFFF"/>
                 </a:solidFill>
@@ -4301,7 +4296,7 @@
                 <a:ea typeface="Microsoft YaHei"/>
                 <a:cs typeface="Microsoft YaHei"/>
               </a:rPr>
-              <a:t>研究判断</a:t>
+              <a:t>边界</a:t>
             </a:r>
           </a:p>
         </p:txBody>
@@ -4311,7 +4306,7 @@
           <p:cNvPr id="15" name="p10-id-3">
             <a:extLst xmlns:a="http://schemas.openxmlformats.org/drawingml/2006/main">
               <a:ext uri="{FF2B5EF4-FFF2-40B4-BE49-F238E27FC236}">
-                <a16:creationId xmlns:a16="http://schemas.microsoft.com/office/drawing/2014/main" id="{1FB811C0-2E30-43E9-A351-B88F91971FDC}"/>
+                <a16:creationId xmlns:a16="http://schemas.microsoft.com/office/drawing/2014/main" id="{2FFF118F-64AA-4546-B235-E374C0DF61A3}"/>
               </a:ext>
             </a:extLst>
           </p:cNvPr>
@@ -4341,14 +4336,14 @@
           <a:lstStyle xmlns:a="http://schemas.openxmlformats.org/drawingml/2006/main"/>
           <a:p xmlns:a="http://schemas.openxmlformats.org/drawingml/2006/main">
             <a:pPr algn="l">
-              <a:defRPr sz="1275" b="1">
+              <a:defRPr sz="1350" b="1">
                 <a:solidFill>
                   <a:srgbClr val="263746"/>
                 </a:solidFill>
               </a:defRPr>
             </a:pPr>
             <a:r>
-              <a:rPr sz="1275" b="1">
+              <a:rPr sz="1350" b="1">
                 <a:solidFill>
                   <a:srgbClr val="263746"/>
                 </a:solidFill>
@@ -4356,7 +4351,7 @@
                 <a:ea typeface="Microsoft YaHei"/>
                 <a:cs typeface="Microsoft YaHei"/>
               </a:rPr>
-              <a:t>用遗漏率，不用通用语言质量</a:t>
+              <a:t>计算代价阻止全量覆盖所有来源</a:t>
             </a:r>
           </a:p>
         </p:txBody>
@@ -4366,7 +4361,7 @@
           <p:cNvPr id="16" name="p10-arrow">
             <a:extLst xmlns:a="http://schemas.openxmlformats.org/drawingml/2006/main">
               <a:ext uri="{FF2B5EF4-FFF2-40B4-BE49-F238E27FC236}">
-                <a16:creationId xmlns:a16="http://schemas.microsoft.com/office/drawing/2014/main" id="{9FFF4235-CD53-4731-A226-F738AA6866A4}"/>
+                <a16:creationId xmlns:a16="http://schemas.microsoft.com/office/drawing/2014/main" id="{17F1A326-70F3-4BC3-85F8-81FD9F5E2EB4}"/>
               </a:ext>
             </a:extLst>
           </p:cNvPr>
@@ -4419,7 +4414,7 @@
           <p:cNvPr id="17" name="p10-right-title">
             <a:extLst xmlns:a="http://schemas.openxmlformats.org/drawingml/2006/main">
               <a:ext uri="{FF2B5EF4-FFF2-40B4-BE49-F238E27FC236}">
-                <a16:creationId xmlns:a16="http://schemas.microsoft.com/office/drawing/2014/main" id="{5CEF2A88-7D77-4D73-8AF5-0133126D14FB}"/>
+                <a16:creationId xmlns:a16="http://schemas.microsoft.com/office/drawing/2014/main" id="{C9A43327-FDDD-4ECE-82A9-695F29589E41}"/>
               </a:ext>
             </a:extLst>
           </p:cNvPr>
@@ -4472,7 +4467,7 @@
           <p:cNvPr id="18" name="p10-pn-0">
             <a:extLst xmlns:a="http://schemas.openxmlformats.org/drawingml/2006/main">
               <a:ext uri="{FF2B5EF4-FFF2-40B4-BE49-F238E27FC236}">
-                <a16:creationId xmlns:a16="http://schemas.microsoft.com/office/drawing/2014/main" id="{EC12F104-5865-4887-849D-DE23E0B2122D}"/>
+                <a16:creationId xmlns:a16="http://schemas.microsoft.com/office/drawing/2014/main" id="{D4B2C9BC-A648-4CE9-B9AB-767963914924}"/>
               </a:ext>
             </a:extLst>
           </p:cNvPr>
@@ -4504,14 +4499,14 @@
           <a:lstStyle xmlns:a="http://schemas.openxmlformats.org/drawingml/2006/main"/>
           <a:p xmlns:a="http://schemas.openxmlformats.org/drawingml/2006/main">
             <a:pPr algn="ctr">
-              <a:defRPr sz="1275" b="1">
+              <a:defRPr sz="1350" b="1">
                 <a:solidFill>
                   <a:srgbClr val="FFFFFF"/>
                 </a:solidFill>
               </a:defRPr>
             </a:pPr>
             <a:r>
-              <a:rPr sz="1275" b="1">
+              <a:rPr sz="1350" b="1">
                 <a:solidFill>
                   <a:srgbClr val="FFFFFF"/>
                 </a:solidFill>
@@ -4529,7 +4524,7 @@
           <p:cNvPr id="19" name="p10-p-0">
             <a:extLst xmlns:a="http://schemas.openxmlformats.org/drawingml/2006/main">
               <a:ext uri="{FF2B5EF4-FFF2-40B4-BE49-F238E27FC236}">
-                <a16:creationId xmlns:a16="http://schemas.microsoft.com/office/drawing/2014/main" id="{FD04D90A-9E25-4FD4-9C93-76CD20276147}"/>
+                <a16:creationId xmlns:a16="http://schemas.microsoft.com/office/drawing/2014/main" id="{4A40C69C-0B9B-4971-8A60-D1141D96ECF4}"/>
               </a:ext>
             </a:extLst>
           </p:cNvPr>
@@ -4559,14 +4554,14 @@
           <a:lstStyle xmlns:a="http://schemas.openxmlformats.org/drawingml/2006/main"/>
           <a:p xmlns:a="http://schemas.openxmlformats.org/drawingml/2006/main">
             <a:pPr algn="l">
-              <a:defRPr sz="1275" b="1">
+              <a:defRPr sz="1350" b="1">
                 <a:solidFill>
                   <a:srgbClr val="263746"/>
                 </a:solidFill>
               </a:defRPr>
             </a:pPr>
             <a:r>
-              <a:rPr sz="1275" b="1">
+              <a:rPr sz="1350" b="1">
                 <a:solidFill>
                   <a:srgbClr val="263746"/>
                 </a:solidFill>
@@ -4574,7 +4569,7 @@
                 <a:ea typeface="Microsoft YaHei"/>
                 <a:cs typeface="Microsoft YaHei"/>
               </a:rPr>
-              <a:t>问题｜20 篇 CS 论文；不外推到长篇综述</a:t>
+              <a:t>问题｜比较可能被方差来源改写</a:t>
             </a:r>
           </a:p>
         </p:txBody>
@@ -4584,7 +4579,7 @@
           <p:cNvPr id="20" name="p10-pn-1">
             <a:extLst xmlns:a="http://schemas.openxmlformats.org/drawingml/2006/main">
               <a:ext uri="{FF2B5EF4-FFF2-40B4-BE49-F238E27FC236}">
-                <a16:creationId xmlns:a16="http://schemas.microsoft.com/office/drawing/2014/main" id="{2394E5CF-75C4-4303-8F1C-FED8718C8833}"/>
+                <a16:creationId xmlns:a16="http://schemas.microsoft.com/office/drawing/2014/main" id="{7C6EE3E1-1DC6-4179-AF74-C675836B44F9}"/>
               </a:ext>
             </a:extLst>
           </p:cNvPr>
@@ -4616,14 +4611,14 @@
           <a:lstStyle xmlns:a="http://schemas.openxmlformats.org/drawingml/2006/main"/>
           <a:p xmlns:a="http://schemas.openxmlformats.org/drawingml/2006/main">
             <a:pPr algn="ctr">
-              <a:defRPr sz="1275" b="1">
+              <a:defRPr sz="1350" b="1">
                 <a:solidFill>
                   <a:srgbClr val="FFFFFF"/>
                 </a:solidFill>
               </a:defRPr>
             </a:pPr>
             <a:r>
-              <a:rPr sz="1275" b="1">
+              <a:rPr sz="1350" b="1">
                 <a:solidFill>
                   <a:srgbClr val="FFFFFF"/>
                 </a:solidFill>
@@ -4641,7 +4636,7 @@
           <p:cNvPr id="21" name="p10-p-1">
             <a:extLst xmlns:a="http://schemas.openxmlformats.org/drawingml/2006/main">
               <a:ext uri="{FF2B5EF4-FFF2-40B4-BE49-F238E27FC236}">
-                <a16:creationId xmlns:a16="http://schemas.microsoft.com/office/drawing/2014/main" id="{FBF55A2F-8DCA-4CAF-8D14-3FEECD7CC5E7}"/>
+                <a16:creationId xmlns:a16="http://schemas.microsoft.com/office/drawing/2014/main" id="{4A498C7F-E8AB-4E89-9DE0-D15490145749}"/>
               </a:ext>
             </a:extLst>
           </p:cNvPr>
@@ -4671,14 +4666,14 @@
           <a:lstStyle xmlns:a="http://schemas.openxmlformats.org/drawingml/2006/main"/>
           <a:p xmlns:a="http://schemas.openxmlformats.org/drawingml/2006/main">
             <a:pPr algn="l">
-              <a:defRPr sz="1275" b="1">
+              <a:defRPr sz="1350" b="1">
                 <a:solidFill>
                   <a:srgbClr val="263746"/>
                 </a:solidFill>
               </a:defRPr>
             </a:pPr>
             <a:r>
-              <a:rPr sz="1275" b="1">
+              <a:rPr sz="1350" b="1">
                 <a:solidFill>
                   <a:srgbClr val="263746"/>
                 </a:solidFill>
@@ -4686,7 +4681,7 @@
                 <a:ea typeface="Microsoft YaHei"/>
                 <a:cs typeface="Microsoft YaHei"/>
               </a:rPr>
-              <a:t>证据｜E1 verified；E3 review 且样本小</a:t>
+              <a:t>证据｜建模全过程 + 检测改进误差</a:t>
             </a:r>
           </a:p>
         </p:txBody>
@@ -4696,7 +4691,7 @@
           <p:cNvPr id="22" name="p10-pn-2">
             <a:extLst xmlns:a="http://schemas.openxmlformats.org/drawingml/2006/main">
               <a:ext uri="{FF2B5EF4-FFF2-40B4-BE49-F238E27FC236}">
-                <a16:creationId xmlns:a16="http://schemas.microsoft.com/office/drawing/2014/main" id="{4D75DFF7-21D9-44EB-9596-1BC91248B9B9}"/>
+                <a16:creationId xmlns:a16="http://schemas.microsoft.com/office/drawing/2014/main" id="{0181356B-F202-404B-91C1-29DF73269C2F}"/>
               </a:ext>
             </a:extLst>
           </p:cNvPr>
@@ -4728,14 +4723,14 @@
           <a:lstStyle xmlns:a="http://schemas.openxmlformats.org/drawingml/2006/main"/>
           <a:p xmlns:a="http://schemas.openxmlformats.org/drawingml/2006/main">
             <a:pPr algn="ctr">
-              <a:defRPr sz="1275" b="1">
+              <a:defRPr sz="1350" b="1">
                 <a:solidFill>
                   <a:srgbClr val="FFFFFF"/>
                 </a:solidFill>
               </a:defRPr>
             </a:pPr>
             <a:r>
-              <a:rPr sz="1275" b="1">
+              <a:rPr sz="1350" b="1">
                 <a:solidFill>
                   <a:srgbClr val="FFFFFF"/>
                 </a:solidFill>
@@ -4753,7 +4748,7 @@
           <p:cNvPr id="23" name="p10-p-2">
             <a:extLst xmlns:a="http://schemas.openxmlformats.org/drawingml/2006/main">
               <a:ext uri="{FF2B5EF4-FFF2-40B4-BE49-F238E27FC236}">
-                <a16:creationId xmlns:a16="http://schemas.microsoft.com/office/drawing/2014/main" id="{72B703A7-878B-4CE8-A1EE-53823E8EC1A3}"/>
+                <a16:creationId xmlns:a16="http://schemas.microsoft.com/office/drawing/2014/main" id="{67AE1BED-E462-454D-ACD3-C32545B3B1F6}"/>
               </a:ext>
             </a:extLst>
           </p:cNvPr>
@@ -4783,14 +4778,14 @@
           <a:lstStyle xmlns:a="http://schemas.openxmlformats.org/drawingml/2006/main"/>
           <a:p xmlns:a="http://schemas.openxmlformats.org/drawingml/2006/main">
             <a:pPr algn="l">
-              <a:defRPr sz="1275" b="1">
+              <a:defRPr sz="1350" b="1">
                 <a:solidFill>
                   <a:srgbClr val="263746"/>
                 </a:solidFill>
               </a:defRPr>
             </a:pPr>
             <a:r>
-              <a:rPr sz="1275" b="1">
+              <a:rPr sz="1350" b="1">
                 <a:solidFill>
                   <a:srgbClr val="263746"/>
                 </a:solidFill>
@@ -4798,7 +4793,7 @@
                 <a:ea typeface="Microsoft YaHei"/>
                 <a:cs typeface="Microsoft YaHei"/>
               </a:rPr>
-              <a:t>机制｜主机制 + A1 任务转移</a:t>
+              <a:t>机制｜抽样 / 初始化 / 超参数方差</a:t>
             </a:r>
           </a:p>
         </p:txBody>
@@ -4808,7 +4803,7 @@
           <p:cNvPr id="24" name="p10-pn-3">
             <a:extLst xmlns:a="http://schemas.openxmlformats.org/drawingml/2006/main">
               <a:ext uri="{FF2B5EF4-FFF2-40B4-BE49-F238E27FC236}">
-                <a16:creationId xmlns:a16="http://schemas.microsoft.com/office/drawing/2014/main" id="{1EB17033-F402-4460-9D9F-4696BAB9263C}"/>
+                <a16:creationId xmlns:a16="http://schemas.microsoft.com/office/drawing/2014/main" id="{C07B2FBF-A7D2-4C64-9225-0011C3315245}"/>
               </a:ext>
             </a:extLst>
           </p:cNvPr>
@@ -4840,14 +4835,14 @@
           <a:lstStyle xmlns:a="http://schemas.openxmlformats.org/drawingml/2006/main"/>
           <a:p xmlns:a="http://schemas.openxmlformats.org/drawingml/2006/main">
             <a:pPr algn="ctr">
-              <a:defRPr sz="1275" b="1">
+              <a:defRPr sz="1350" b="1">
                 <a:solidFill>
                   <a:srgbClr val="FFFFFF"/>
                 </a:solidFill>
               </a:defRPr>
             </a:pPr>
             <a:r>
-              <a:rPr sz="1275" b="1">
+              <a:rPr sz="1350" b="1">
                 <a:solidFill>
                   <a:srgbClr val="FFFFFF"/>
                 </a:solidFill>
@@ -4865,7 +4860,7 @@
           <p:cNvPr id="25" name="p10-p-3">
             <a:extLst xmlns:a="http://schemas.openxmlformats.org/drawingml/2006/main">
               <a:ext uri="{FF2B5EF4-FFF2-40B4-BE49-F238E27FC236}">
-                <a16:creationId xmlns:a16="http://schemas.microsoft.com/office/drawing/2014/main" id="{C779B284-A877-4376-9228-3123144B09EB}"/>
+                <a16:creationId xmlns:a16="http://schemas.microsoft.com/office/drawing/2014/main" id="{9AC6CCAE-6DFF-4F3B-AE95-40185D0AD84D}"/>
               </a:ext>
             </a:extLst>
           </p:cNvPr>
@@ -4895,14 +4890,14 @@
           <a:lstStyle xmlns:a="http://schemas.openxmlformats.org/drawingml/2006/main"/>
           <a:p xmlns:a="http://schemas.openxmlformats.org/drawingml/2006/main">
             <a:pPr algn="l">
-              <a:defRPr sz="1275" b="1">
+              <a:defRPr sz="1350" b="1">
                 <a:solidFill>
                   <a:srgbClr val="263746"/>
                 </a:solidFill>
               </a:defRPr>
             </a:pPr>
             <a:r>
-              <a:rPr sz="1275" b="1">
+              <a:rPr sz="1350" b="1">
                 <a:solidFill>
                   <a:srgbClr val="263746"/>
                 </a:solidFill>
@@ -4910,7 +4905,7 @@
                 <a:ea typeface="Microsoft YaHei"/>
                 <a:cs typeface="Microsoft YaHei"/>
               </a:rPr>
-              <a:t>验证｜同模型/论文/温度/长度；20×2×3</a:t>
+              <a:t>验证｜五个深度学习任务/架构</a:t>
             </a:r>
           </a:p>
         </p:txBody>
@@ -4920,7 +4915,7 @@
           <p:cNvPr id="26" name="p10-pn-4">
             <a:extLst xmlns:a="http://schemas.openxmlformats.org/drawingml/2006/main">
               <a:ext uri="{FF2B5EF4-FFF2-40B4-BE49-F238E27FC236}">
-                <a16:creationId xmlns:a16="http://schemas.microsoft.com/office/drawing/2014/main" id="{8252DDF8-0980-4A77-9E54-463590AF78AA}"/>
+                <a16:creationId xmlns:a16="http://schemas.microsoft.com/office/drawing/2014/main" id="{33EE2654-D7BA-41B4-90F2-E7CB232EB893}"/>
               </a:ext>
             </a:extLst>
           </p:cNvPr>
@@ -4952,14 +4947,14 @@
           <a:lstStyle xmlns:a="http://schemas.openxmlformats.org/drawingml/2006/main"/>
           <a:p xmlns:a="http://schemas.openxmlformats.org/drawingml/2006/main">
             <a:pPr algn="ctr">
-              <a:defRPr sz="1275" b="1">
+              <a:defRPr sz="1350" b="1">
                 <a:solidFill>
                   <a:srgbClr val="FFFFFF"/>
                 </a:solidFill>
               </a:defRPr>
             </a:pPr>
             <a:r>
-              <a:rPr sz="1275" b="1">
+              <a:rPr sz="1350" b="1">
                 <a:solidFill>
                   <a:srgbClr val="FFFFFF"/>
                 </a:solidFill>
@@ -4977,7 +4972,7 @@
           <p:cNvPr id="27" name="p10-p-4">
             <a:extLst xmlns:a="http://schemas.openxmlformats.org/drawingml/2006/main">
               <a:ext uri="{FF2B5EF4-FFF2-40B4-BE49-F238E27FC236}">
-                <a16:creationId xmlns:a16="http://schemas.microsoft.com/office/drawing/2014/main" id="{09FDFCBF-F1CC-4244-8CCF-20D7F798A2A6}"/>
+                <a16:creationId xmlns:a16="http://schemas.microsoft.com/office/drawing/2014/main" id="{A38E5753-46A9-4445-8BDE-6FA98B64A273}"/>
               </a:ext>
             </a:extLst>
           </p:cNvPr>
@@ -5007,14 +5002,14 @@
           <a:lstStyle xmlns:a="http://schemas.openxmlformats.org/drawingml/2006/main"/>
           <a:p xmlns:a="http://schemas.openxmlformats.org/drawingml/2006/main">
             <a:pPr algn="l">
-              <a:defRPr sz="1275" b="1">
+              <a:defRPr sz="1350" b="1">
                 <a:solidFill>
                   <a:srgbClr val="263746"/>
                 </a:solidFill>
               </a:defRPr>
             </a:pPr>
             <a:r>
-              <a:rPr sz="1275" b="1">
+              <a:rPr sz="1350" b="1">
                 <a:solidFill>
                   <a:srgbClr val="263746"/>
                 </a:solidFill>
@@ -5022,7 +5017,7 @@
                 <a:ea typeface="Microsoft YaHei"/>
                 <a:cs typeface="Microsoft YaHei"/>
               </a:rPr>
-              <a:t>风险｜A2 标注假象</a:t>
+              <a:t>风险｜计算代价限制方差覆盖</a:t>
             </a:r>
           </a:p>
         </p:txBody>
@@ -5032,7 +5027,7 @@
           <p:cNvPr id="28" name="p10-bottom">
             <a:extLst xmlns:a="http://schemas.openxmlformats.org/drawingml/2006/main">
               <a:ext uri="{FF2B5EF4-FFF2-40B4-BE49-F238E27FC236}">
-                <a16:creationId xmlns:a16="http://schemas.microsoft.com/office/drawing/2014/main" id="{293B021A-3A4F-492A-84E0-30F318E2DAEA}"/>
+                <a16:creationId xmlns:a16="http://schemas.microsoft.com/office/drawing/2014/main" id="{E4E72B68-0265-4C85-B20F-462ED714118F}"/>
               </a:ext>
             </a:extLst>
           </p:cNvPr>
@@ -5176,10 +5171,65 @@
       </p:sp>
       <p:sp>
         <p:nvSpPr>
-          <p:cNvPr id="6" name="p11-feedback-title">
-            <a:extLst xmlns:a="http://schemas.openxmlformats.org/drawingml/2006/main">
-              <a:ext uri="{FF2B5EF4-FFF2-40B4-BE49-F238E27FC236}">
-                <a16:creationId xmlns:a16="http://schemas.microsoft.com/office/drawing/2014/main" id="{256438CC-A33E-45D4-92BE-F56C92C6E9F2}"/>
+          <p:cNvPr id="6" name="p11-boundary">
+            <a:extLst xmlns:a="http://schemas.openxmlformats.org/drawingml/2006/main">
+              <a:ext uri="{FF2B5EF4-FFF2-40B4-BE49-F238E27FC236}">
+                <a16:creationId xmlns:a16="http://schemas.microsoft.com/office/drawing/2014/main" id="{07982AB7-4DB8-41E9-8A2F-71E6DD0D0CA3}"/>
+              </a:ext>
+            </a:extLst>
+          </p:cNvPr>
+          <p:cNvSpPr>
+            <a:spLocks xmlns:a="http://schemas.openxmlformats.org/drawingml/2006/main" noGrp="1"/>
+          </p:cNvSpPr>
+          <p:nvPr/>
+        </p:nvSpPr>
+        <p:spPr>
+          <a:xfrm xmlns:a="http://schemas.openxmlformats.org/drawingml/2006/main">
+            <a:off x="1524000" y="838200"/>
+            <a:ext cx="9144000" cy="323850"/>
+          </a:xfrm>
+          <a:prstGeom xmlns:a="http://schemas.openxmlformats.org/drawingml/2006/main" prst="rect">
+            <a:avLst/>
+          </a:prstGeom>
+          <a:solidFill xmlns:a="http://schemas.openxmlformats.org/drawingml/2006/main">
+            <a:srgbClr val="F8E9EA"/>
+          </a:solidFill>
+          <a:ln xmlns:a="http://schemas.openxmlformats.org/drawingml/2006/main" w="0">
+            <a:noFill/>
+            <a:prstDash val="solid"/>
+          </a:ln>
+        </p:spPr>
+        <p:txBody>
+          <a:bodyPr xmlns:a="http://schemas.openxmlformats.org/drawingml/2006/main" lIns="76200" tIns="38100" rIns="76200" bIns="38100" anchor="ctr"/>
+          <a:lstStyle xmlns:a="http://schemas.openxmlformats.org/drawingml/2006/main"/>
+          <a:p xmlns:a="http://schemas.openxmlformats.org/drawingml/2006/main">
+            <a:pPr algn="ctr">
+              <a:defRPr sz="1350" b="1">
+                <a:solidFill>
+                  <a:srgbClr val="C8161E"/>
+                </a:solidFill>
+              </a:defRPr>
+            </a:pPr>
+            <a:r>
+              <a:rPr sz="1350" b="1">
+                <a:solidFill>
+                  <a:srgbClr val="C8161E"/>
+                </a:solidFill>
+                <a:latin typeface="Microsoft YaHei"/>
+                <a:ea typeface="Microsoft YaHei"/>
+                <a:cs typeface="Microsoft YaHei"/>
+              </a:rPr>
+              <a:t>虚构教学反馈｜基于 P10 公开对象，仅演示决策记录</a:t>
+            </a:r>
+          </a:p>
+        </p:txBody>
+      </p:sp>
+      <p:sp>
+        <p:nvSpPr>
+          <p:cNvPr id="7" name="p11-feedback-title">
+            <a:extLst xmlns:a="http://schemas.openxmlformats.org/drawingml/2006/main">
+              <a:ext uri="{FF2B5EF4-FFF2-40B4-BE49-F238E27FC236}">
+                <a16:creationId xmlns:a16="http://schemas.microsoft.com/office/drawing/2014/main" id="{56548032-305E-491A-B0B7-BD36C852B6C5}"/>
               </a:ext>
             </a:extLst>
           </p:cNvPr>
@@ -5229,10 +5279,10 @@
       </p:sp>
       <p:sp>
         <p:nvSpPr>
-          <p:cNvPr id="7" name="p11-decision-title">
-            <a:extLst xmlns:a="http://schemas.openxmlformats.org/drawingml/2006/main">
-              <a:ext uri="{FF2B5EF4-FFF2-40B4-BE49-F238E27FC236}">
-                <a16:creationId xmlns:a16="http://schemas.microsoft.com/office/drawing/2014/main" id="{0B953EF7-6FF8-46AA-A763-E2601103C13D}"/>
+          <p:cNvPr id="8" name="p11-decision-title">
+            <a:extLst xmlns:a="http://schemas.openxmlformats.org/drawingml/2006/main">
+              <a:ext uri="{FF2B5EF4-FFF2-40B4-BE49-F238E27FC236}">
+                <a16:creationId xmlns:a16="http://schemas.microsoft.com/office/drawing/2014/main" id="{6DD4F8F6-00EE-4022-9C11-8D323C1D0ACE}"/>
               </a:ext>
             </a:extLst>
           </p:cNvPr>
@@ -5282,10 +5332,10 @@
       </p:sp>
       <p:sp>
         <p:nvSpPr>
-          <p:cNvPr id="8" name="p11-dim-0">
-            <a:extLst xmlns:a="http://schemas.openxmlformats.org/drawingml/2006/main">
-              <a:ext uri="{FF2B5EF4-FFF2-40B4-BE49-F238E27FC236}">
-                <a16:creationId xmlns:a16="http://schemas.microsoft.com/office/drawing/2014/main" id="{CA5F188A-97FE-46B3-8B9D-93DC737A042D}"/>
+          <p:cNvPr id="9" name="p11-dim-0">
+            <a:extLst xmlns:a="http://schemas.openxmlformats.org/drawingml/2006/main">
+              <a:ext uri="{FF2B5EF4-FFF2-40B4-BE49-F238E27FC236}">
+                <a16:creationId xmlns:a16="http://schemas.microsoft.com/office/drawing/2014/main" id="{45365ED2-6A3D-4D07-A5D3-B1953989A756}"/>
               </a:ext>
             </a:extLst>
           </p:cNvPr>
@@ -5317,14 +5367,14 @@
           <a:lstStyle xmlns:a="http://schemas.openxmlformats.org/drawingml/2006/main"/>
           <a:p xmlns:a="http://schemas.openxmlformats.org/drawingml/2006/main">
             <a:pPr algn="ctr">
-              <a:defRPr sz="1275" b="1">
+              <a:defRPr sz="1350" b="1">
                 <a:solidFill>
                   <a:srgbClr val="FFFFFF"/>
                 </a:solidFill>
               </a:defRPr>
             </a:pPr>
             <a:r>
-              <a:rPr sz="1275" b="1">
+              <a:rPr sz="1350" b="1">
                 <a:solidFill>
                   <a:srgbClr val="FFFFFF"/>
                 </a:solidFill>
@@ -5339,10 +5389,10 @@
       </p:sp>
       <p:sp>
         <p:nvSpPr>
-          <p:cNvPr id="9" name="p11-fb-0">
-            <a:extLst xmlns:a="http://schemas.openxmlformats.org/drawingml/2006/main">
-              <a:ext uri="{FF2B5EF4-FFF2-40B4-BE49-F238E27FC236}">
-                <a16:creationId xmlns:a16="http://schemas.microsoft.com/office/drawing/2014/main" id="{94F8B158-6DF1-4D4B-98AF-D48D3F3F6561}"/>
+          <p:cNvPr id="10" name="p11-fb-0">
+            <a:extLst xmlns:a="http://schemas.openxmlformats.org/drawingml/2006/main">
+              <a:ext uri="{FF2B5EF4-FFF2-40B4-BE49-F238E27FC236}">
+                <a16:creationId xmlns:a16="http://schemas.microsoft.com/office/drawing/2014/main" id="{1836FED6-5D0A-4704-AAEC-65F20864D1E6}"/>
               </a:ext>
             </a:extLst>
           </p:cNvPr>
@@ -5387,17 +5437,17 @@
                 <a:ea typeface="Microsoft YaHei"/>
                 <a:cs typeface="Microsoft YaHei"/>
               </a:rPr>
-              <a:t>A2 与主假设的区分实验未写清</a:t>
-            </a:r>
-          </a:p>
-        </p:txBody>
-      </p:sp>
-      <p:sp>
-        <p:nvSpPr>
-          <p:cNvPr id="10" name="p11-arrow-0">
-            <a:extLst xmlns:a="http://schemas.openxmlformats.org/drawingml/2006/main">
-              <a:ext uri="{FF2B5EF4-FFF2-40B4-BE49-F238E27FC236}">
-                <a16:creationId xmlns:a16="http://schemas.microsoft.com/office/drawing/2014/main" id="{503958AC-C06D-4BB1-AAD9-52127A1E7898}"/>
+              <a:t>抽样与初始化方差的区分设计未写清</a:t>
+            </a:r>
+          </a:p>
+        </p:txBody>
+      </p:sp>
+      <p:sp>
+        <p:nvSpPr>
+          <p:cNvPr id="11" name="p11-arrow-0">
+            <a:extLst xmlns:a="http://schemas.openxmlformats.org/drawingml/2006/main">
+              <a:ext uri="{FF2B5EF4-FFF2-40B4-BE49-F238E27FC236}">
+                <a16:creationId xmlns:a16="http://schemas.microsoft.com/office/drawing/2014/main" id="{5A380DF1-63A4-492C-9D3F-B1134EC4F209}"/>
               </a:ext>
             </a:extLst>
           </p:cNvPr>
@@ -5447,10 +5497,10 @@
       </p:sp>
       <p:sp>
         <p:nvSpPr>
-          <p:cNvPr id="11" name="p11-decision-0">
-            <a:extLst xmlns:a="http://schemas.openxmlformats.org/drawingml/2006/main">
-              <a:ext uri="{FF2B5EF4-FFF2-40B4-BE49-F238E27FC236}">
-                <a16:creationId xmlns:a16="http://schemas.microsoft.com/office/drawing/2014/main" id="{61997539-B800-45C1-8990-127B9EE1F9A2}"/>
+          <p:cNvPr id="12" name="p11-decision-0">
+            <a:extLst xmlns:a="http://schemas.openxmlformats.org/drawingml/2006/main">
+              <a:ext uri="{FF2B5EF4-FFF2-40B4-BE49-F238E27FC236}">
+                <a16:creationId xmlns:a16="http://schemas.microsoft.com/office/drawing/2014/main" id="{31161CD9-42FD-4214-9BF3-01B34551B71B}"/>
               </a:ext>
             </a:extLst>
           </p:cNvPr>
@@ -5504,10 +5554,10 @@
       </p:sp>
       <p:sp>
         <p:nvSpPr>
-          <p:cNvPr id="12" name="p11-reason-0">
-            <a:extLst xmlns:a="http://schemas.openxmlformats.org/drawingml/2006/main">
-              <a:ext uri="{FF2B5EF4-FFF2-40B4-BE49-F238E27FC236}">
-                <a16:creationId xmlns:a16="http://schemas.microsoft.com/office/drawing/2014/main" id="{E0849412-1F0F-4E39-9A90-46894CE41555}"/>
+          <p:cNvPr id="13" name="p11-reason-0">
+            <a:extLst xmlns:a="http://schemas.openxmlformats.org/drawingml/2006/main">
+              <a:ext uri="{FF2B5EF4-FFF2-40B4-BE49-F238E27FC236}">
+                <a16:creationId xmlns:a16="http://schemas.microsoft.com/office/drawing/2014/main" id="{E4680B05-A3CC-4865-B9BE-4409874CCE6F}"/>
               </a:ext>
             </a:extLst>
           </p:cNvPr>
@@ -5552,17 +5602,17 @@
                 <a:ea typeface="Microsoft YaHei"/>
                 <a:cs typeface="Microsoft YaHei"/>
               </a:rPr>
-              <a:t>补实验规格 §假设对应</a:t>
-            </a:r>
-          </a:p>
-        </p:txBody>
-      </p:sp>
-      <p:sp>
-        <p:nvSpPr>
-          <p:cNvPr id="13" name="p11-dim-1">
-            <a:extLst xmlns:a="http://schemas.openxmlformats.org/drawingml/2006/main">
-              <a:ext uri="{FF2B5EF4-FFF2-40B4-BE49-F238E27FC236}">
-                <a16:creationId xmlns:a16="http://schemas.microsoft.com/office/drawing/2014/main" id="{A447E68A-B28B-4AAB-B5C0-EFE5E4DDDAEC}"/>
+              <a:t>补规格 §假设对应/变量</a:t>
+            </a:r>
+          </a:p>
+        </p:txBody>
+      </p:sp>
+      <p:sp>
+        <p:nvSpPr>
+          <p:cNvPr id="14" name="p11-dim-1">
+            <a:extLst xmlns:a="http://schemas.openxmlformats.org/drawingml/2006/main">
+              <a:ext uri="{FF2B5EF4-FFF2-40B4-BE49-F238E27FC236}">
+                <a16:creationId xmlns:a16="http://schemas.microsoft.com/office/drawing/2014/main" id="{F448CFE6-480B-47C1-9AA9-8CF23DDC6B75}"/>
               </a:ext>
             </a:extLst>
           </p:cNvPr>
@@ -5594,14 +5644,14 @@
           <a:lstStyle xmlns:a="http://schemas.openxmlformats.org/drawingml/2006/main"/>
           <a:p xmlns:a="http://schemas.openxmlformats.org/drawingml/2006/main">
             <a:pPr algn="ctr">
-              <a:defRPr sz="1275" b="1">
+              <a:defRPr sz="1350" b="1">
                 <a:solidFill>
                   <a:srgbClr val="FFFFFF"/>
                 </a:solidFill>
               </a:defRPr>
             </a:pPr>
             <a:r>
-              <a:rPr sz="1275" b="1">
+              <a:rPr sz="1350" b="1">
                 <a:solidFill>
                   <a:srgbClr val="FFFFFF"/>
                 </a:solidFill>
@@ -5616,10 +5666,10 @@
       </p:sp>
       <p:sp>
         <p:nvSpPr>
-          <p:cNvPr id="14" name="p11-fb-1">
-            <a:extLst xmlns:a="http://schemas.openxmlformats.org/drawingml/2006/main">
-              <a:ext uri="{FF2B5EF4-FFF2-40B4-BE49-F238E27FC236}">
-                <a16:creationId xmlns:a16="http://schemas.microsoft.com/office/drawing/2014/main" id="{57D1F397-D158-4427-A0A4-D118C977397B}"/>
+          <p:cNvPr id="15" name="p11-fb-1">
+            <a:extLst xmlns:a="http://schemas.openxmlformats.org/drawingml/2006/main">
+              <a:ext uri="{FF2B5EF4-FFF2-40B4-BE49-F238E27FC236}">
+                <a16:creationId xmlns:a16="http://schemas.microsoft.com/office/drawing/2014/main" id="{14340D57-4055-4B8F-8BDF-F45DF25CEDA3}"/>
               </a:ext>
             </a:extLst>
           </p:cNvPr>
@@ -5664,17 +5714,17 @@
                 <a:ea typeface="Microsoft YaHei"/>
                 <a:cs typeface="Microsoft YaHei"/>
               </a:rPr>
-              <a:t>baseline 不公平（未指明哪一项）</a:t>
-            </a:r>
-          </a:p>
-        </p:txBody>
-      </p:sp>
-      <p:sp>
-        <p:nvSpPr>
-          <p:cNvPr id="15" name="p11-arrow-1">
-            <a:extLst xmlns:a="http://schemas.openxmlformats.org/drawingml/2006/main">
-              <a:ext uri="{FF2B5EF4-FFF2-40B4-BE49-F238E27FC236}">
-                <a16:creationId xmlns:a16="http://schemas.microsoft.com/office/drawing/2014/main" id="{49656CA5-FDD1-4BD4-8A72-4ACADEF66568}"/>
+              <a:t>比较不公平（未指明何种差异）</a:t>
+            </a:r>
+          </a:p>
+        </p:txBody>
+      </p:sp>
+      <p:sp>
+        <p:nvSpPr>
+          <p:cNvPr id="16" name="p11-arrow-1">
+            <a:extLst xmlns:a="http://schemas.openxmlformats.org/drawingml/2006/main">
+              <a:ext uri="{FF2B5EF4-FFF2-40B4-BE49-F238E27FC236}">
+                <a16:creationId xmlns:a16="http://schemas.microsoft.com/office/drawing/2014/main" id="{F3EB34B4-F37E-4E4C-9257-3FAC61D83ED3}"/>
               </a:ext>
             </a:extLst>
           </p:cNvPr>
@@ -5724,10 +5774,10 @@
       </p:sp>
       <p:sp>
         <p:nvSpPr>
-          <p:cNvPr id="16" name="p11-decision-1">
-            <a:extLst xmlns:a="http://schemas.openxmlformats.org/drawingml/2006/main">
-              <a:ext uri="{FF2B5EF4-FFF2-40B4-BE49-F238E27FC236}">
-                <a16:creationId xmlns:a16="http://schemas.microsoft.com/office/drawing/2014/main" id="{C2B9D0AD-81F6-4267-8BEC-3BED2E5B0513}"/>
+          <p:cNvPr id="17" name="p11-decision-1">
+            <a:extLst xmlns:a="http://schemas.openxmlformats.org/drawingml/2006/main">
+              <a:ext uri="{FF2B5EF4-FFF2-40B4-BE49-F238E27FC236}">
+                <a16:creationId xmlns:a16="http://schemas.microsoft.com/office/drawing/2014/main" id="{A3D7A378-DB3E-44BE-901E-5B3AE26B3F30}"/>
               </a:ext>
             </a:extLst>
           </p:cNvPr>
@@ -5781,10 +5831,10 @@
       </p:sp>
       <p:sp>
         <p:nvSpPr>
-          <p:cNvPr id="17" name="p11-reason-1">
-            <a:extLst xmlns:a="http://schemas.openxmlformats.org/drawingml/2006/main">
-              <a:ext uri="{FF2B5EF4-FFF2-40B4-BE49-F238E27FC236}">
-                <a16:creationId xmlns:a16="http://schemas.microsoft.com/office/drawing/2014/main" id="{5170B198-808C-4C70-82A6-5903226868CF}"/>
+          <p:cNvPr id="18" name="p11-reason-1">
+            <a:extLst xmlns:a="http://schemas.openxmlformats.org/drawingml/2006/main">
+              <a:ext uri="{FF2B5EF4-FFF2-40B4-BE49-F238E27FC236}">
+                <a16:creationId xmlns:a16="http://schemas.microsoft.com/office/drawing/2014/main" id="{0F61DB42-48FC-47B8-AB6F-8D5AFC1D60D6}"/>
               </a:ext>
             </a:extLst>
           </p:cNvPr>
@@ -5829,17 +5879,17 @@
                 <a:ea typeface="Microsoft YaHei"/>
                 <a:cs typeface="Microsoft YaHei"/>
               </a:rPr>
-              <a:t>未指向模型/温度/材料/长度</a:t>
-            </a:r>
-          </a:p>
-        </p:txBody>
-      </p:sp>
-      <p:sp>
-        <p:nvSpPr>
-          <p:cNvPr id="18" name="p11-dim-2">
-            <a:extLst xmlns:a="http://schemas.openxmlformats.org/drawingml/2006/main">
-              <a:ext uri="{FF2B5EF4-FFF2-40B4-BE49-F238E27FC236}">
-                <a16:creationId xmlns:a16="http://schemas.microsoft.com/office/drawing/2014/main" id="{43D4207C-467A-41E3-839B-532B9461B2A2}"/>
+              <a:t>未指向具体变量或环节</a:t>
+            </a:r>
+          </a:p>
+        </p:txBody>
+      </p:sp>
+      <p:sp>
+        <p:nvSpPr>
+          <p:cNvPr id="19" name="p11-dim-2">
+            <a:extLst xmlns:a="http://schemas.openxmlformats.org/drawingml/2006/main">
+              <a:ext uri="{FF2B5EF4-FFF2-40B4-BE49-F238E27FC236}">
+                <a16:creationId xmlns:a16="http://schemas.microsoft.com/office/drawing/2014/main" id="{FD6A9B92-661E-41EF-9D0A-8BBCF43D3FB5}"/>
               </a:ext>
             </a:extLst>
           </p:cNvPr>
@@ -5871,14 +5921,14 @@
           <a:lstStyle xmlns:a="http://schemas.openxmlformats.org/drawingml/2006/main"/>
           <a:p xmlns:a="http://schemas.openxmlformats.org/drawingml/2006/main">
             <a:pPr algn="ctr">
-              <a:defRPr sz="1275" b="1">
+              <a:defRPr sz="1350" b="1">
                 <a:solidFill>
                   <a:srgbClr val="FFFFFF"/>
                 </a:solidFill>
               </a:defRPr>
             </a:pPr>
             <a:r>
-              <a:rPr sz="1275" b="1">
+              <a:rPr sz="1350" b="1">
                 <a:solidFill>
                   <a:srgbClr val="FFFFFF"/>
                 </a:solidFill>
@@ -5893,10 +5943,10 @@
       </p:sp>
       <p:sp>
         <p:nvSpPr>
-          <p:cNvPr id="19" name="p11-fb-2">
-            <a:extLst xmlns:a="http://schemas.openxmlformats.org/drawingml/2006/main">
-              <a:ext uri="{FF2B5EF4-FFF2-40B4-BE49-F238E27FC236}">
-                <a16:creationId xmlns:a16="http://schemas.microsoft.com/office/drawing/2014/main" id="{5668C631-DC52-45F4-8324-0A6ACED4B440}"/>
+          <p:cNvPr id="20" name="p11-fb-2">
+            <a:extLst xmlns:a="http://schemas.openxmlformats.org/drawingml/2006/main">
+              <a:ext uri="{FF2B5EF4-FFF2-40B4-BE49-F238E27FC236}">
+                <a16:creationId xmlns:a16="http://schemas.microsoft.com/office/drawing/2014/main" id="{8869F47B-9E51-4516-9D56-93CA4877E7CB}"/>
               </a:ext>
             </a:extLst>
           </p:cNvPr>
@@ -5941,17 +5991,17 @@
                 <a:ea typeface="Microsoft YaHei"/>
                 <a:cs typeface="Microsoft YaHei"/>
               </a:rPr>
-              <a:t>没说降低遗漏率会改变哪项阅读决策</a:t>
-            </a:r>
-          </a:p>
-        </p:txBody>
-      </p:sp>
-      <p:sp>
-        <p:nvSpPr>
-          <p:cNvPr id="20" name="p11-arrow-2">
-            <a:extLst xmlns:a="http://schemas.openxmlformats.org/drawingml/2006/main">
-              <a:ext uri="{FF2B5EF4-FFF2-40B4-BE49-F238E27FC236}">
-                <a16:creationId xmlns:a16="http://schemas.microsoft.com/office/drawing/2014/main" id="{971CC939-1419-445B-8B77-DE914F02C4F4}"/>
+              <a:t>没说误判改进会改变哪项 benchmark 决策</a:t>
+            </a:r>
+          </a:p>
+        </p:txBody>
+      </p:sp>
+      <p:sp>
+        <p:nvSpPr>
+          <p:cNvPr id="21" name="p11-arrow-2">
+            <a:extLst xmlns:a="http://schemas.openxmlformats.org/drawingml/2006/main">
+              <a:ext uri="{FF2B5EF4-FFF2-40B4-BE49-F238E27FC236}">
+                <a16:creationId xmlns:a16="http://schemas.microsoft.com/office/drawing/2014/main" id="{45366632-3216-437C-BF36-7012A90B9FAD}"/>
               </a:ext>
             </a:extLst>
           </p:cNvPr>
@@ -6001,10 +6051,10 @@
       </p:sp>
       <p:sp>
         <p:nvSpPr>
-          <p:cNvPr id="21" name="p11-decision-2">
-            <a:extLst xmlns:a="http://schemas.openxmlformats.org/drawingml/2006/main">
-              <a:ext uri="{FF2B5EF4-FFF2-40B4-BE49-F238E27FC236}">
-                <a16:creationId xmlns:a16="http://schemas.microsoft.com/office/drawing/2014/main" id="{FB76C948-E5E9-4292-BE38-94CE3E1D3347}"/>
+          <p:cNvPr id="22" name="p11-decision-2">
+            <a:extLst xmlns:a="http://schemas.openxmlformats.org/drawingml/2006/main">
+              <a:ext uri="{FF2B5EF4-FFF2-40B4-BE49-F238E27FC236}">
+                <a16:creationId xmlns:a16="http://schemas.microsoft.com/office/drawing/2014/main" id="{0370978E-80C0-4362-9755-A2D2998D61A3}"/>
               </a:ext>
             </a:extLst>
           </p:cNvPr>
@@ -6058,10 +6108,10 @@
       </p:sp>
       <p:sp>
         <p:nvSpPr>
-          <p:cNvPr id="22" name="p11-reason-2">
-            <a:extLst xmlns:a="http://schemas.openxmlformats.org/drawingml/2006/main">
-              <a:ext uri="{FF2B5EF4-FFF2-40B4-BE49-F238E27FC236}">
-                <a16:creationId xmlns:a16="http://schemas.microsoft.com/office/drawing/2014/main" id="{A0F4DEC9-4019-4FA8-BCF9-2BE627DF8961}"/>
+          <p:cNvPr id="23" name="p11-reason-2">
+            <a:extLst xmlns:a="http://schemas.openxmlformats.org/drawingml/2006/main">
+              <a:ext uri="{FF2B5EF4-FFF2-40B4-BE49-F238E27FC236}">
+                <a16:creationId xmlns:a16="http://schemas.microsoft.com/office/drawing/2014/main" id="{D2649C8F-6500-4C21-A446-3E600F1D4129}"/>
               </a:ext>
             </a:extLst>
           </p:cNvPr>
@@ -6106,17 +6156,17 @@
                 <a:ea typeface="Microsoft YaHei"/>
                 <a:cs typeface="Microsoft YaHei"/>
               </a:rPr>
-              <a:t>先补结果将触发的行动</a:t>
-            </a:r>
-          </a:p>
-        </p:txBody>
-      </p:sp>
-      <p:sp>
-        <p:nvSpPr>
-          <p:cNvPr id="23" name="p11-bottom">
-            <a:extLst xmlns:a="http://schemas.openxmlformats.org/drawingml/2006/main">
-              <a:ext uri="{FF2B5EF4-FFF2-40B4-BE49-F238E27FC236}">
-                <a16:creationId xmlns:a16="http://schemas.microsoft.com/office/drawing/2014/main" id="{78BD0069-27CD-4D7E-8B07-50CD488D805C}"/>
+              <a:t>先补哪种误判率触发行动</a:t>
+            </a:r>
+          </a:p>
+        </p:txBody>
+      </p:sp>
+      <p:sp>
+        <p:nvSpPr>
+          <p:cNvPr id="24" name="p11-bottom">
+            <a:extLst xmlns:a="http://schemas.openxmlformats.org/drawingml/2006/main">
+              <a:ext uri="{FF2B5EF4-FFF2-40B4-BE49-F238E27FC236}">
+                <a16:creationId xmlns:a16="http://schemas.microsoft.com/office/drawing/2014/main" id="{AB38F793-09D6-44C6-AD53-6BD4858C4D8E}"/>
               </a:ext>
             </a:extLst>
           </p:cNvPr>
@@ -6263,7 +6313,7 @@
           <p:cNvPr id="6" name="p12-table-h-0">
             <a:extLst xmlns:a="http://schemas.openxmlformats.org/drawingml/2006/main">
               <a:ext uri="{FF2B5EF4-FFF2-40B4-BE49-F238E27FC236}">
-                <a16:creationId xmlns:a16="http://schemas.microsoft.com/office/drawing/2014/main" id="{E6B8FEF5-5133-4054-BB72-50F9377F7938}"/>
+                <a16:creationId xmlns:a16="http://schemas.microsoft.com/office/drawing/2014/main" id="{AB972BF0-B263-4107-9B4D-5210A3402DB7}"/>
               </a:ext>
             </a:extLst>
           </p:cNvPr>
@@ -6318,7 +6368,7 @@
           <p:cNvPr id="7" name="p12-table-h-1">
             <a:extLst xmlns:a="http://schemas.openxmlformats.org/drawingml/2006/main">
               <a:ext uri="{FF2B5EF4-FFF2-40B4-BE49-F238E27FC236}">
-                <a16:creationId xmlns:a16="http://schemas.microsoft.com/office/drawing/2014/main" id="{F33868FA-E118-4618-A144-A738C5DDA652}"/>
+                <a16:creationId xmlns:a16="http://schemas.microsoft.com/office/drawing/2014/main" id="{C4590CEF-441A-4162-AB99-89761533CA59}"/>
               </a:ext>
             </a:extLst>
           </p:cNvPr>
@@ -6373,7 +6423,7 @@
           <p:cNvPr id="8" name="p12-table-h-2">
             <a:extLst xmlns:a="http://schemas.openxmlformats.org/drawingml/2006/main">
               <a:ext uri="{FF2B5EF4-FFF2-40B4-BE49-F238E27FC236}">
-                <a16:creationId xmlns:a16="http://schemas.microsoft.com/office/drawing/2014/main" id="{9DEF3E94-2164-4523-A42B-8098C12139F8}"/>
+                <a16:creationId xmlns:a16="http://schemas.microsoft.com/office/drawing/2014/main" id="{DB35D281-4C1A-4BA1-8944-6AAE58D67CCD}"/>
               </a:ext>
             </a:extLst>
           </p:cNvPr>
@@ -6428,7 +6478,7 @@
           <p:cNvPr id="9" name="p12-table-r0-0">
             <a:extLst xmlns:a="http://schemas.openxmlformats.org/drawingml/2006/main">
               <a:ext uri="{FF2B5EF4-FFF2-40B4-BE49-F238E27FC236}">
-                <a16:creationId xmlns:a16="http://schemas.microsoft.com/office/drawing/2014/main" id="{D1F6B55F-2B58-42E4-B472-CEABB7B0F527}"/>
+                <a16:creationId xmlns:a16="http://schemas.microsoft.com/office/drawing/2014/main" id="{29B85B1B-E939-478D-86C6-FF700197566A}"/>
               </a:ext>
             </a:extLst>
           </p:cNvPr>
@@ -6464,14 +6514,14 @@
                 <a:spcPct val="108000"/>
               </a:lnSpc>
               <a:buNone/>
-              <a:defRPr sz="1275" b="1">
+              <a:defRPr sz="1350" b="1">
                 <a:solidFill>
                   <a:srgbClr val="263746"/>
                 </a:solidFill>
               </a:defRPr>
             </a:pPr>
             <a:r>
-              <a:rPr sz="1275" b="1">
+              <a:rPr sz="1350" b="1">
                 <a:solidFill>
                   <a:srgbClr val="263746"/>
                 </a:solidFill>
@@ -6489,7 +6539,7 @@
           <p:cNvPr id="10" name="p12-table-r0-1">
             <a:extLst xmlns:a="http://schemas.openxmlformats.org/drawingml/2006/main">
               <a:ext uri="{FF2B5EF4-FFF2-40B4-BE49-F238E27FC236}">
-                <a16:creationId xmlns:a16="http://schemas.microsoft.com/office/drawing/2014/main" id="{7EF6F931-9D17-47DC-82C7-287D84E702D8}"/>
+                <a16:creationId xmlns:a16="http://schemas.microsoft.com/office/drawing/2014/main" id="{63FA49B5-D8F9-4C12-8D39-769AC6D91EE5}"/>
               </a:ext>
             </a:extLst>
           </p:cNvPr>
@@ -6525,14 +6575,14 @@
                 <a:spcPct val="108000"/>
               </a:lnSpc>
               <a:buNone/>
-              <a:defRPr sz="1275" b="1">
+              <a:defRPr sz="1350" b="1">
                 <a:solidFill>
                   <a:srgbClr val="C8161E"/>
                 </a:solidFill>
               </a:defRPr>
             </a:pPr>
             <a:r>
-              <a:rPr sz="1275" b="1">
+              <a:rPr sz="1350" b="1">
                 <a:solidFill>
                   <a:srgbClr val="C8161E"/>
                 </a:solidFill>
@@ -6550,7 +6600,7 @@
           <p:cNvPr id="11" name="p12-table-r0-2">
             <a:extLst xmlns:a="http://schemas.openxmlformats.org/drawingml/2006/main">
               <a:ext uri="{FF2B5EF4-FFF2-40B4-BE49-F238E27FC236}">
-                <a16:creationId xmlns:a16="http://schemas.microsoft.com/office/drawing/2014/main" id="{B1B653BA-9F0F-4DA1-8865-5D719F9EFFC2}"/>
+                <a16:creationId xmlns:a16="http://schemas.microsoft.com/office/drawing/2014/main" id="{E58A2E2A-4CEC-4F27-A2D9-08DF8F0F57F5}"/>
               </a:ext>
             </a:extLst>
           </p:cNvPr>
@@ -6586,14 +6636,14 @@
                 <a:spcPct val="108000"/>
               </a:lnSpc>
               <a:buNone/>
-              <a:defRPr sz="1275" b="0">
+              <a:defRPr sz="1350" b="0">
                 <a:solidFill>
                   <a:srgbClr val="263746"/>
                 </a:solidFill>
               </a:defRPr>
             </a:pPr>
             <a:r>
-              <a:rPr sz="1275" b="0">
+              <a:rPr sz="1350" b="0">
                 <a:solidFill>
                   <a:srgbClr val="263746"/>
                 </a:solidFill>
@@ -6611,7 +6661,7 @@
           <p:cNvPr id="12" name="p12-table-r1-0">
             <a:extLst xmlns:a="http://schemas.openxmlformats.org/drawingml/2006/main">
               <a:ext uri="{FF2B5EF4-FFF2-40B4-BE49-F238E27FC236}">
-                <a16:creationId xmlns:a16="http://schemas.microsoft.com/office/drawing/2014/main" id="{9D286DB5-2773-4CB7-9AB5-92A0D91AE059}"/>
+                <a16:creationId xmlns:a16="http://schemas.microsoft.com/office/drawing/2014/main" id="{C51A5921-B836-4A17-A424-37DC9DEE95AE}"/>
               </a:ext>
             </a:extLst>
           </p:cNvPr>
@@ -6647,14 +6697,14 @@
                 <a:spcPct val="108000"/>
               </a:lnSpc>
               <a:buNone/>
-              <a:defRPr sz="1275" b="1">
+              <a:defRPr sz="1350" b="1">
                 <a:solidFill>
                   <a:srgbClr val="263746"/>
                 </a:solidFill>
               </a:defRPr>
             </a:pPr>
             <a:r>
-              <a:rPr sz="1275" b="1">
+              <a:rPr sz="1350" b="1">
                 <a:solidFill>
                   <a:srgbClr val="263746"/>
                 </a:solidFill>
@@ -6672,7 +6722,7 @@
           <p:cNvPr id="13" name="p12-table-r1-1">
             <a:extLst xmlns:a="http://schemas.openxmlformats.org/drawingml/2006/main">
               <a:ext uri="{FF2B5EF4-FFF2-40B4-BE49-F238E27FC236}">
-                <a16:creationId xmlns:a16="http://schemas.microsoft.com/office/drawing/2014/main" id="{772BB523-39B3-4136-BCA0-A5EE8A475D33}"/>
+                <a16:creationId xmlns:a16="http://schemas.microsoft.com/office/drawing/2014/main" id="{3E4E3935-260F-4038-A11F-34D50449FA7B}"/>
               </a:ext>
             </a:extLst>
           </p:cNvPr>
@@ -6708,14 +6758,14 @@
                 <a:spcPct val="108000"/>
               </a:lnSpc>
               <a:buNone/>
-              <a:defRPr sz="1275" b="1">
+              <a:defRPr sz="1350" b="1">
                 <a:solidFill>
                   <a:srgbClr val="C8161E"/>
                 </a:solidFill>
               </a:defRPr>
             </a:pPr>
             <a:r>
-              <a:rPr sz="1275" b="1">
+              <a:rPr sz="1350" b="1">
                 <a:solidFill>
                   <a:srgbClr val="C8161E"/>
                 </a:solidFill>
@@ -6733,7 +6783,7 @@
           <p:cNvPr id="14" name="p12-table-r1-2">
             <a:extLst xmlns:a="http://schemas.openxmlformats.org/drawingml/2006/main">
               <a:ext uri="{FF2B5EF4-FFF2-40B4-BE49-F238E27FC236}">
-                <a16:creationId xmlns:a16="http://schemas.microsoft.com/office/drawing/2014/main" id="{FB5692A4-5079-45D8-8471-84CA0F36BC59}"/>
+                <a16:creationId xmlns:a16="http://schemas.microsoft.com/office/drawing/2014/main" id="{242AB112-B461-48A7-A13B-4BB6B44A1564}"/>
               </a:ext>
             </a:extLst>
           </p:cNvPr>
@@ -6769,14 +6819,14 @@
                 <a:spcPct val="108000"/>
               </a:lnSpc>
               <a:buNone/>
-              <a:defRPr sz="1275" b="0">
+              <a:defRPr sz="1350" b="0">
                 <a:solidFill>
                   <a:srgbClr val="263746"/>
                 </a:solidFill>
               </a:defRPr>
             </a:pPr>
             <a:r>
-              <a:rPr sz="1275" b="0">
+              <a:rPr sz="1350" b="0">
                 <a:solidFill>
                   <a:srgbClr val="263746"/>
                 </a:solidFill>
@@ -6794,7 +6844,7 @@
           <p:cNvPr id="15" name="p12-table-r2-0">
             <a:extLst xmlns:a="http://schemas.openxmlformats.org/drawingml/2006/main">
               <a:ext uri="{FF2B5EF4-FFF2-40B4-BE49-F238E27FC236}">
-                <a16:creationId xmlns:a16="http://schemas.microsoft.com/office/drawing/2014/main" id="{63887940-5E3E-48C6-B0F7-E844CCEEDE8E}"/>
+                <a16:creationId xmlns:a16="http://schemas.microsoft.com/office/drawing/2014/main" id="{973D9C0F-D13A-4C5C-9420-F3BC08B61260}"/>
               </a:ext>
             </a:extLst>
           </p:cNvPr>
@@ -6830,14 +6880,14 @@
                 <a:spcPct val="108000"/>
               </a:lnSpc>
               <a:buNone/>
-              <a:defRPr sz="1275" b="1">
+              <a:defRPr sz="1350" b="1">
                 <a:solidFill>
                   <a:srgbClr val="263746"/>
                 </a:solidFill>
               </a:defRPr>
             </a:pPr>
             <a:r>
-              <a:rPr sz="1275" b="1">
+              <a:rPr sz="1350" b="1">
                 <a:solidFill>
                   <a:srgbClr val="263746"/>
                 </a:solidFill>
@@ -6855,7 +6905,7 @@
           <p:cNvPr id="16" name="p12-table-r2-1">
             <a:extLst xmlns:a="http://schemas.openxmlformats.org/drawingml/2006/main">
               <a:ext uri="{FF2B5EF4-FFF2-40B4-BE49-F238E27FC236}">
-                <a16:creationId xmlns:a16="http://schemas.microsoft.com/office/drawing/2014/main" id="{9CAB6DD9-82B7-4F3A-936C-AAD08D2DDD48}"/>
+                <a16:creationId xmlns:a16="http://schemas.microsoft.com/office/drawing/2014/main" id="{B64D90C8-BA5E-4595-B7ED-A5F9A05B75A3}"/>
               </a:ext>
             </a:extLst>
           </p:cNvPr>
@@ -6891,14 +6941,14 @@
                 <a:spcPct val="108000"/>
               </a:lnSpc>
               <a:buNone/>
-              <a:defRPr sz="1275" b="1">
+              <a:defRPr sz="1350" b="1">
                 <a:solidFill>
                   <a:srgbClr val="C8161E"/>
                 </a:solidFill>
               </a:defRPr>
             </a:pPr>
             <a:r>
-              <a:rPr sz="1275" b="1">
+              <a:rPr sz="1350" b="1">
                 <a:solidFill>
                   <a:srgbClr val="C8161E"/>
                 </a:solidFill>
@@ -6916,7 +6966,7 @@
           <p:cNvPr id="17" name="p12-table-r2-2">
             <a:extLst xmlns:a="http://schemas.openxmlformats.org/drawingml/2006/main">
               <a:ext uri="{FF2B5EF4-FFF2-40B4-BE49-F238E27FC236}">
-                <a16:creationId xmlns:a16="http://schemas.microsoft.com/office/drawing/2014/main" id="{F6724537-6597-410B-A267-425C03BDB9D3}"/>
+                <a16:creationId xmlns:a16="http://schemas.microsoft.com/office/drawing/2014/main" id="{DC83C1DA-5F6A-4CA9-9AA1-6885C24CC0EB}"/>
               </a:ext>
             </a:extLst>
           </p:cNvPr>
@@ -6952,14 +7002,14 @@
                 <a:spcPct val="108000"/>
               </a:lnSpc>
               <a:buNone/>
-              <a:defRPr sz="1275" b="0">
+              <a:defRPr sz="1350" b="0">
                 <a:solidFill>
                   <a:srgbClr val="263746"/>
                 </a:solidFill>
               </a:defRPr>
             </a:pPr>
             <a:r>
-              <a:rPr sz="1275" b="0">
+              <a:rPr sz="1350" b="0">
                 <a:solidFill>
                   <a:srgbClr val="263746"/>
                 </a:solidFill>
@@ -6977,7 +7027,7 @@
           <p:cNvPr id="18" name="p12-table-r3-0">
             <a:extLst xmlns:a="http://schemas.openxmlformats.org/drawingml/2006/main">
               <a:ext uri="{FF2B5EF4-FFF2-40B4-BE49-F238E27FC236}">
-                <a16:creationId xmlns:a16="http://schemas.microsoft.com/office/drawing/2014/main" id="{D81C4543-8EA9-41F3-B515-E88458E948BA}"/>
+                <a16:creationId xmlns:a16="http://schemas.microsoft.com/office/drawing/2014/main" id="{14D80618-DD2B-4C61-BFB2-61C2EFE6C00C}"/>
               </a:ext>
             </a:extLst>
           </p:cNvPr>
@@ -7013,14 +7063,14 @@
                 <a:spcPct val="108000"/>
               </a:lnSpc>
               <a:buNone/>
-              <a:defRPr sz="1275" b="1">
+              <a:defRPr sz="1350" b="1">
                 <a:solidFill>
                   <a:srgbClr val="263746"/>
                 </a:solidFill>
               </a:defRPr>
             </a:pPr>
             <a:r>
-              <a:rPr sz="1275" b="1">
+              <a:rPr sz="1350" b="1">
                 <a:solidFill>
                   <a:srgbClr val="263746"/>
                 </a:solidFill>
@@ -7038,7 +7088,7 @@
           <p:cNvPr id="19" name="p12-table-r3-1">
             <a:extLst xmlns:a="http://schemas.openxmlformats.org/drawingml/2006/main">
               <a:ext uri="{FF2B5EF4-FFF2-40B4-BE49-F238E27FC236}">
-                <a16:creationId xmlns:a16="http://schemas.microsoft.com/office/drawing/2014/main" id="{1336ED1B-8250-4B36-9792-4E792F72F95A}"/>
+                <a16:creationId xmlns:a16="http://schemas.microsoft.com/office/drawing/2014/main" id="{96407ADF-3C49-4535-9EFC-56553823AE99}"/>
               </a:ext>
             </a:extLst>
           </p:cNvPr>
@@ -7074,14 +7124,14 @@
                 <a:spcPct val="108000"/>
               </a:lnSpc>
               <a:buNone/>
-              <a:defRPr sz="1275" b="1">
+              <a:defRPr sz="1350" b="1">
                 <a:solidFill>
                   <a:srgbClr val="C8161E"/>
                 </a:solidFill>
               </a:defRPr>
             </a:pPr>
             <a:r>
-              <a:rPr sz="1275" b="1">
+              <a:rPr sz="1350" b="1">
                 <a:solidFill>
                   <a:srgbClr val="C8161E"/>
                 </a:solidFill>
@@ -7099,7 +7149,7 @@
           <p:cNvPr id="20" name="p12-table-r3-2">
             <a:extLst xmlns:a="http://schemas.openxmlformats.org/drawingml/2006/main">
               <a:ext uri="{FF2B5EF4-FFF2-40B4-BE49-F238E27FC236}">
-                <a16:creationId xmlns:a16="http://schemas.microsoft.com/office/drawing/2014/main" id="{81A3BD01-411F-425D-A283-BB32F8FFAAEF}"/>
+                <a16:creationId xmlns:a16="http://schemas.microsoft.com/office/drawing/2014/main" id="{E1B9BC00-65E0-4C50-B92F-EDCE31DEAC6E}"/>
               </a:ext>
             </a:extLst>
           </p:cNvPr>
@@ -7135,14 +7185,14 @@
                 <a:spcPct val="108000"/>
               </a:lnSpc>
               <a:buNone/>
-              <a:defRPr sz="1275" b="0">
+              <a:defRPr sz="1350" b="0">
                 <a:solidFill>
                   <a:srgbClr val="263746"/>
                 </a:solidFill>
               </a:defRPr>
             </a:pPr>
             <a:r>
-              <a:rPr sz="1275" b="0">
+              <a:rPr sz="1350" b="0">
                 <a:solidFill>
                   <a:srgbClr val="263746"/>
                 </a:solidFill>
@@ -7160,7 +7210,7 @@
           <p:cNvPr id="21" name="p12-table-r4-0">
             <a:extLst xmlns:a="http://schemas.openxmlformats.org/drawingml/2006/main">
               <a:ext uri="{FF2B5EF4-FFF2-40B4-BE49-F238E27FC236}">
-                <a16:creationId xmlns:a16="http://schemas.microsoft.com/office/drawing/2014/main" id="{1F964A16-EFBE-47CF-9ACC-CA3178993557}"/>
+                <a16:creationId xmlns:a16="http://schemas.microsoft.com/office/drawing/2014/main" id="{2FE45A46-4909-4613-8767-E966BC15283E}"/>
               </a:ext>
             </a:extLst>
           </p:cNvPr>
@@ -7196,14 +7246,14 @@
                 <a:spcPct val="108000"/>
               </a:lnSpc>
               <a:buNone/>
-              <a:defRPr sz="1275" b="1">
+              <a:defRPr sz="1350" b="1">
                 <a:solidFill>
                   <a:srgbClr val="263746"/>
                 </a:solidFill>
               </a:defRPr>
             </a:pPr>
             <a:r>
-              <a:rPr sz="1275" b="1">
+              <a:rPr sz="1350" b="1">
                 <a:solidFill>
                   <a:srgbClr val="263746"/>
                 </a:solidFill>
@@ -7221,7 +7271,7 @@
           <p:cNvPr id="22" name="p12-table-r4-1">
             <a:extLst xmlns:a="http://schemas.openxmlformats.org/drawingml/2006/main">
               <a:ext uri="{FF2B5EF4-FFF2-40B4-BE49-F238E27FC236}">
-                <a16:creationId xmlns:a16="http://schemas.microsoft.com/office/drawing/2014/main" id="{1276F2EC-F696-4423-911E-02FCFB0DC905}"/>
+                <a16:creationId xmlns:a16="http://schemas.microsoft.com/office/drawing/2014/main" id="{A56C8AEA-8CED-4195-965C-3421ADC9CF30}"/>
               </a:ext>
             </a:extLst>
           </p:cNvPr>
@@ -7257,14 +7307,14 @@
                 <a:spcPct val="108000"/>
               </a:lnSpc>
               <a:buNone/>
-              <a:defRPr sz="1275" b="1">
+              <a:defRPr sz="1350" b="1">
                 <a:solidFill>
                   <a:srgbClr val="C8161E"/>
                 </a:solidFill>
               </a:defRPr>
             </a:pPr>
             <a:r>
-              <a:rPr sz="1275" b="1">
+              <a:rPr sz="1350" b="1">
                 <a:solidFill>
                   <a:srgbClr val="C8161E"/>
                 </a:solidFill>
@@ -7282,7 +7332,7 @@
           <p:cNvPr id="23" name="p12-table-r4-2">
             <a:extLst xmlns:a="http://schemas.openxmlformats.org/drawingml/2006/main">
               <a:ext uri="{FF2B5EF4-FFF2-40B4-BE49-F238E27FC236}">
-                <a16:creationId xmlns:a16="http://schemas.microsoft.com/office/drawing/2014/main" id="{FEE6C866-1A61-4E8A-AA3D-CF5D99B0D481}"/>
+                <a16:creationId xmlns:a16="http://schemas.microsoft.com/office/drawing/2014/main" id="{2698BB89-E2E9-48A4-81D5-34844D4780DF}"/>
               </a:ext>
             </a:extLst>
           </p:cNvPr>
@@ -7318,14 +7368,14 @@
                 <a:spcPct val="108000"/>
               </a:lnSpc>
               <a:buNone/>
-              <a:defRPr sz="1275" b="0">
+              <a:defRPr sz="1350" b="0">
                 <a:solidFill>
                   <a:srgbClr val="263746"/>
                 </a:solidFill>
               </a:defRPr>
             </a:pPr>
             <a:r>
-              <a:rPr sz="1275" b="0">
+              <a:rPr sz="1350" b="0">
                 <a:solidFill>
                   <a:srgbClr val="263746"/>
                 </a:solidFill>
@@ -7343,7 +7393,7 @@
           <p:cNvPr id="24" name="p12-table-r5-0">
             <a:extLst xmlns:a="http://schemas.openxmlformats.org/drawingml/2006/main">
               <a:ext uri="{FF2B5EF4-FFF2-40B4-BE49-F238E27FC236}">
-                <a16:creationId xmlns:a16="http://schemas.microsoft.com/office/drawing/2014/main" id="{A4863F5B-7092-477C-8E27-D033D7D48971}"/>
+                <a16:creationId xmlns:a16="http://schemas.microsoft.com/office/drawing/2014/main" id="{E871B3FE-2D1D-4867-9EC6-C9511BF42FD3}"/>
               </a:ext>
             </a:extLst>
           </p:cNvPr>
@@ -7379,14 +7429,14 @@
                 <a:spcPct val="108000"/>
               </a:lnSpc>
               <a:buNone/>
-              <a:defRPr sz="1275" b="1">
+              <a:defRPr sz="1350" b="1">
                 <a:solidFill>
                   <a:srgbClr val="263746"/>
                 </a:solidFill>
               </a:defRPr>
             </a:pPr>
             <a:r>
-              <a:rPr sz="1275" b="1">
+              <a:rPr sz="1350" b="1">
                 <a:solidFill>
                   <a:srgbClr val="263746"/>
                 </a:solidFill>
@@ -7404,7 +7454,7 @@
           <p:cNvPr id="25" name="p12-table-r5-1">
             <a:extLst xmlns:a="http://schemas.openxmlformats.org/drawingml/2006/main">
               <a:ext uri="{FF2B5EF4-FFF2-40B4-BE49-F238E27FC236}">
-                <a16:creationId xmlns:a16="http://schemas.microsoft.com/office/drawing/2014/main" id="{AD3DCBBF-6A9A-4066-9376-03AEEC72667F}"/>
+                <a16:creationId xmlns:a16="http://schemas.microsoft.com/office/drawing/2014/main" id="{414BD02C-F589-47A4-8452-3533242C9E56}"/>
               </a:ext>
             </a:extLst>
           </p:cNvPr>
@@ -7440,14 +7490,14 @@
                 <a:spcPct val="108000"/>
               </a:lnSpc>
               <a:buNone/>
-              <a:defRPr sz="1275" b="1">
+              <a:defRPr sz="1350" b="1">
                 <a:solidFill>
                   <a:srgbClr val="C8161E"/>
                 </a:solidFill>
               </a:defRPr>
             </a:pPr>
             <a:r>
-              <a:rPr sz="1275" b="1">
+              <a:rPr sz="1350" b="1">
                 <a:solidFill>
                   <a:srgbClr val="C8161E"/>
                 </a:solidFill>
@@ -7465,7 +7515,7 @@
           <p:cNvPr id="26" name="p12-table-r5-2">
             <a:extLst xmlns:a="http://schemas.openxmlformats.org/drawingml/2006/main">
               <a:ext uri="{FF2B5EF4-FFF2-40B4-BE49-F238E27FC236}">
-                <a16:creationId xmlns:a16="http://schemas.microsoft.com/office/drawing/2014/main" id="{20DAD266-348B-402D-BECA-CE7D5E691EEA}"/>
+                <a16:creationId xmlns:a16="http://schemas.microsoft.com/office/drawing/2014/main" id="{558E2C4D-4EFD-4760-B1AA-C8B12C1C26DD}"/>
               </a:ext>
             </a:extLst>
           </p:cNvPr>
@@ -7501,14 +7551,14 @@
                 <a:spcPct val="108000"/>
               </a:lnSpc>
               <a:buNone/>
-              <a:defRPr sz="1275" b="0">
+              <a:defRPr sz="1350" b="0">
                 <a:solidFill>
                   <a:srgbClr val="263746"/>
                 </a:solidFill>
               </a:defRPr>
             </a:pPr>
             <a:r>
-              <a:rPr sz="1275" b="0">
+              <a:rPr sz="1350" b="0">
                 <a:solidFill>
                   <a:srgbClr val="263746"/>
                 </a:solidFill>
@@ -7526,7 +7576,7 @@
           <p:cNvPr id="27" name="p12-table-r6-0">
             <a:extLst xmlns:a="http://schemas.openxmlformats.org/drawingml/2006/main">
               <a:ext uri="{FF2B5EF4-FFF2-40B4-BE49-F238E27FC236}">
-                <a16:creationId xmlns:a16="http://schemas.microsoft.com/office/drawing/2014/main" id="{B45BBEA8-8600-46D2-908C-8C92E677106F}"/>
+                <a16:creationId xmlns:a16="http://schemas.microsoft.com/office/drawing/2014/main" id="{BC401C56-C735-49A1-85CF-F873B86266AD}"/>
               </a:ext>
             </a:extLst>
           </p:cNvPr>
@@ -7562,14 +7612,14 @@
                 <a:spcPct val="108000"/>
               </a:lnSpc>
               <a:buNone/>
-              <a:defRPr sz="1275" b="1">
+              <a:defRPr sz="1350" b="1">
                 <a:solidFill>
                   <a:srgbClr val="263746"/>
                 </a:solidFill>
               </a:defRPr>
             </a:pPr>
             <a:r>
-              <a:rPr sz="1275" b="1">
+              <a:rPr sz="1350" b="1">
                 <a:solidFill>
                   <a:srgbClr val="263746"/>
                 </a:solidFill>
@@ -7587,7 +7637,7 @@
           <p:cNvPr id="28" name="p12-table-r6-1">
             <a:extLst xmlns:a="http://schemas.openxmlformats.org/drawingml/2006/main">
               <a:ext uri="{FF2B5EF4-FFF2-40B4-BE49-F238E27FC236}">
-                <a16:creationId xmlns:a16="http://schemas.microsoft.com/office/drawing/2014/main" id="{76BA42FB-F05A-46B8-923E-C1B98F630904}"/>
+                <a16:creationId xmlns:a16="http://schemas.microsoft.com/office/drawing/2014/main" id="{7D0EDE98-AF22-4224-B57F-BB81A6F5137B}"/>
               </a:ext>
             </a:extLst>
           </p:cNvPr>
@@ -7623,14 +7673,14 @@
                 <a:spcPct val="108000"/>
               </a:lnSpc>
               <a:buNone/>
-              <a:defRPr sz="1275" b="1">
+              <a:defRPr sz="1350" b="1">
                 <a:solidFill>
                   <a:srgbClr val="C8161E"/>
                 </a:solidFill>
               </a:defRPr>
             </a:pPr>
             <a:r>
-              <a:rPr sz="1275" b="1">
+              <a:rPr sz="1350" b="1">
                 <a:solidFill>
                   <a:srgbClr val="C8161E"/>
                 </a:solidFill>
@@ -7648,7 +7698,7 @@
           <p:cNvPr id="29" name="p12-table-r6-2">
             <a:extLst xmlns:a="http://schemas.openxmlformats.org/drawingml/2006/main">
               <a:ext uri="{FF2B5EF4-FFF2-40B4-BE49-F238E27FC236}">
-                <a16:creationId xmlns:a16="http://schemas.microsoft.com/office/drawing/2014/main" id="{4263C81F-F2C1-4657-9A84-7CB19826AE35}"/>
+                <a16:creationId xmlns:a16="http://schemas.microsoft.com/office/drawing/2014/main" id="{8A876004-4F82-4752-97B3-846BA0665772}"/>
               </a:ext>
             </a:extLst>
           </p:cNvPr>
@@ -7684,14 +7734,14 @@
                 <a:spcPct val="108000"/>
               </a:lnSpc>
               <a:buNone/>
-              <a:defRPr sz="1275" b="0">
+              <a:defRPr sz="1350" b="0">
                 <a:solidFill>
                   <a:srgbClr val="263746"/>
                 </a:solidFill>
               </a:defRPr>
             </a:pPr>
             <a:r>
-              <a:rPr sz="1275" b="0">
+              <a:rPr sz="1350" b="0">
                 <a:solidFill>
                   <a:srgbClr val="263746"/>
                 </a:solidFill>
@@ -7709,7 +7759,7 @@
           <p:cNvPr id="30" name="p12-table-r7-0">
             <a:extLst xmlns:a="http://schemas.openxmlformats.org/drawingml/2006/main">
               <a:ext uri="{FF2B5EF4-FFF2-40B4-BE49-F238E27FC236}">
-                <a16:creationId xmlns:a16="http://schemas.microsoft.com/office/drawing/2014/main" id="{344DC2EA-4906-4654-8653-97D88F0E3A2B}"/>
+                <a16:creationId xmlns:a16="http://schemas.microsoft.com/office/drawing/2014/main" id="{72EA3DBF-8983-4234-9515-579E798E7B1E}"/>
               </a:ext>
             </a:extLst>
           </p:cNvPr>
@@ -7745,14 +7795,14 @@
                 <a:spcPct val="108000"/>
               </a:lnSpc>
               <a:buNone/>
-              <a:defRPr sz="1275" b="1">
+              <a:defRPr sz="1350" b="1">
                 <a:solidFill>
                   <a:srgbClr val="263746"/>
                 </a:solidFill>
               </a:defRPr>
             </a:pPr>
             <a:r>
-              <a:rPr sz="1275" b="1">
+              <a:rPr sz="1350" b="1">
                 <a:solidFill>
                   <a:srgbClr val="263746"/>
                 </a:solidFill>
@@ -7770,7 +7820,7 @@
           <p:cNvPr id="31" name="p12-table-r7-1">
             <a:extLst xmlns:a="http://schemas.openxmlformats.org/drawingml/2006/main">
               <a:ext uri="{FF2B5EF4-FFF2-40B4-BE49-F238E27FC236}">
-                <a16:creationId xmlns:a16="http://schemas.microsoft.com/office/drawing/2014/main" id="{37E30345-23A0-4CE3-AB5E-CBB9878D801B}"/>
+                <a16:creationId xmlns:a16="http://schemas.microsoft.com/office/drawing/2014/main" id="{501CEEB8-CC88-430D-9553-A46FF01A877F}"/>
               </a:ext>
             </a:extLst>
           </p:cNvPr>
@@ -7806,14 +7856,14 @@
                 <a:spcPct val="108000"/>
               </a:lnSpc>
               <a:buNone/>
-              <a:defRPr sz="1275" b="1">
+              <a:defRPr sz="1350" b="1">
                 <a:solidFill>
                   <a:srgbClr val="C8161E"/>
                 </a:solidFill>
               </a:defRPr>
             </a:pPr>
             <a:r>
-              <a:rPr sz="1275" b="1">
+              <a:rPr sz="1350" b="1">
                 <a:solidFill>
                   <a:srgbClr val="C8161E"/>
                 </a:solidFill>
@@ -7831,7 +7881,7 @@
           <p:cNvPr id="32" name="p12-table-r7-2">
             <a:extLst xmlns:a="http://schemas.openxmlformats.org/drawingml/2006/main">
               <a:ext uri="{FF2B5EF4-FFF2-40B4-BE49-F238E27FC236}">
-                <a16:creationId xmlns:a16="http://schemas.microsoft.com/office/drawing/2014/main" id="{B9908454-87AF-4644-8D20-2E7328481F9F}"/>
+                <a16:creationId xmlns:a16="http://schemas.microsoft.com/office/drawing/2014/main" id="{08E6D6BC-ECD1-4D17-BFD4-5187E592BDD4}"/>
               </a:ext>
             </a:extLst>
           </p:cNvPr>
@@ -7867,14 +7917,14 @@
                 <a:spcPct val="108000"/>
               </a:lnSpc>
               <a:buNone/>
-              <a:defRPr sz="1275" b="0">
+              <a:defRPr sz="1350" b="0">
                 <a:solidFill>
                   <a:srgbClr val="263746"/>
                 </a:solidFill>
               </a:defRPr>
             </a:pPr>
             <a:r>
-              <a:rPr sz="1275" b="0">
+              <a:rPr sz="1350" b="0">
                 <a:solidFill>
                   <a:srgbClr val="263746"/>
                 </a:solidFill>
@@ -7892,7 +7942,7 @@
           <p:cNvPr id="33" name="p12-bottom">
             <a:extLst xmlns:a="http://schemas.openxmlformats.org/drawingml/2006/main">
               <a:ext uri="{FF2B5EF4-FFF2-40B4-BE49-F238E27FC236}">
-                <a16:creationId xmlns:a16="http://schemas.microsoft.com/office/drawing/2014/main" id="{1150208F-DA81-45FE-9964-4A2000E88D9B}"/>
+                <a16:creationId xmlns:a16="http://schemas.microsoft.com/office/drawing/2014/main" id="{2328DFB7-2C74-4C5C-9FC5-CD6C5A7F07ED}"/>
               </a:ext>
             </a:extLst>
           </p:cNvPr>
@@ -8039,7 +8089,7 @@
           <p:cNvPr id="6" name="p13-time">
             <a:extLst xmlns:a="http://schemas.openxmlformats.org/drawingml/2006/main">
               <a:ext uri="{FF2B5EF4-FFF2-40B4-BE49-F238E27FC236}">
-                <a16:creationId xmlns:a16="http://schemas.microsoft.com/office/drawing/2014/main" id="{D863F1FF-305B-4184-AEFA-484396F458B9}"/>
+                <a16:creationId xmlns:a16="http://schemas.microsoft.com/office/drawing/2014/main" id="{A3CB2F06-4ACD-4167-A75C-A02686F14E93}"/>
               </a:ext>
             </a:extLst>
           </p:cNvPr>
@@ -8067,14 +8117,14 @@
           <a:lstStyle xmlns:a="http://schemas.openxmlformats.org/drawingml/2006/main"/>
           <a:p xmlns:a="http://schemas.openxmlformats.org/drawingml/2006/main">
             <a:pPr algn="r">
-              <a:defRPr sz="1275" b="1">
+              <a:defRPr sz="1350" b="1">
                 <a:solidFill>
                   <a:srgbClr val="C8161E"/>
                 </a:solidFill>
               </a:defRPr>
             </a:pPr>
             <a:r>
-              <a:rPr sz="1275" b="1">
+              <a:rPr sz="1350" b="1">
                 <a:solidFill>
                   <a:srgbClr val="C8161E"/>
                 </a:solidFill>
@@ -8092,7 +8142,7 @@
           <p:cNvPr id="7" name="p13-left-title">
             <a:extLst xmlns:a="http://schemas.openxmlformats.org/drawingml/2006/main">
               <a:ext uri="{FF2B5EF4-FFF2-40B4-BE49-F238E27FC236}">
-                <a16:creationId xmlns:a16="http://schemas.microsoft.com/office/drawing/2014/main" id="{39723C7C-A528-4AC2-9EE5-545ABF656D32}"/>
+                <a16:creationId xmlns:a16="http://schemas.microsoft.com/office/drawing/2014/main" id="{0155AF0C-0C07-4044-A8DC-0E5E3DA06FA5}"/>
               </a:ext>
             </a:extLst>
           </p:cNvPr>
@@ -8145,7 +8195,7 @@
           <p:cNvPr id="8" name="p13-line-0">
             <a:extLst xmlns:a="http://schemas.openxmlformats.org/drawingml/2006/main">
               <a:ext uri="{FF2B5EF4-FFF2-40B4-BE49-F238E27FC236}">
-                <a16:creationId xmlns:a16="http://schemas.microsoft.com/office/drawing/2014/main" id="{9CAC97D2-1F41-4D87-B7B4-00A8442B0164}"/>
+                <a16:creationId xmlns:a16="http://schemas.microsoft.com/office/drawing/2014/main" id="{75757573-E8A6-435A-BE7E-89B56BBF03D1}"/>
               </a:ext>
             </a:extLst>
           </p:cNvPr>
@@ -8176,7 +8226,7 @@
           <p:cNvPr id="9" name="p13-n-0">
             <a:extLst xmlns:a="http://schemas.openxmlformats.org/drawingml/2006/main">
               <a:ext uri="{FF2B5EF4-FFF2-40B4-BE49-F238E27FC236}">
-                <a16:creationId xmlns:a16="http://schemas.microsoft.com/office/drawing/2014/main" id="{B545FDBA-1C4D-43C0-9406-71551FC3AE78}"/>
+                <a16:creationId xmlns:a16="http://schemas.microsoft.com/office/drawing/2014/main" id="{19736FD8-C248-41E3-A53F-8385F8EE4514}"/>
               </a:ext>
             </a:extLst>
           </p:cNvPr>
@@ -8233,7 +8283,7 @@
           <p:cNvPr id="10" name="p13-task-0">
             <a:extLst xmlns:a="http://schemas.openxmlformats.org/drawingml/2006/main">
               <a:ext uri="{FF2B5EF4-FFF2-40B4-BE49-F238E27FC236}">
-                <a16:creationId xmlns:a16="http://schemas.microsoft.com/office/drawing/2014/main" id="{DD2C1EE4-D7D5-4D05-A0E6-6148FDB63A75}"/>
+                <a16:creationId xmlns:a16="http://schemas.microsoft.com/office/drawing/2014/main" id="{DBE91DC3-CCB6-4FCD-BCF2-8F065DD80D21}"/>
               </a:ext>
             </a:extLst>
           </p:cNvPr>
@@ -8288,7 +8338,7 @@
           <p:cNvPr id="11" name="p13-line-1">
             <a:extLst xmlns:a="http://schemas.openxmlformats.org/drawingml/2006/main">
               <a:ext uri="{FF2B5EF4-FFF2-40B4-BE49-F238E27FC236}">
-                <a16:creationId xmlns:a16="http://schemas.microsoft.com/office/drawing/2014/main" id="{9AB920D7-1730-439C-9C4C-461B092ACFF6}"/>
+                <a16:creationId xmlns:a16="http://schemas.microsoft.com/office/drawing/2014/main" id="{4BEFE032-61FF-4E2F-A5CB-07610B261B4D}"/>
               </a:ext>
             </a:extLst>
           </p:cNvPr>
@@ -8319,7 +8369,7 @@
           <p:cNvPr id="12" name="p13-n-1">
             <a:extLst xmlns:a="http://schemas.openxmlformats.org/drawingml/2006/main">
               <a:ext uri="{FF2B5EF4-FFF2-40B4-BE49-F238E27FC236}">
-                <a16:creationId xmlns:a16="http://schemas.microsoft.com/office/drawing/2014/main" id="{DD87D80E-BD91-4EE6-8D01-BA9F7C8C7286}"/>
+                <a16:creationId xmlns:a16="http://schemas.microsoft.com/office/drawing/2014/main" id="{BF88E2BD-CE28-4380-8283-5B392C1DC5F2}"/>
               </a:ext>
             </a:extLst>
           </p:cNvPr>
@@ -8376,7 +8426,7 @@
           <p:cNvPr id="13" name="p13-task-1">
             <a:extLst xmlns:a="http://schemas.openxmlformats.org/drawingml/2006/main">
               <a:ext uri="{FF2B5EF4-FFF2-40B4-BE49-F238E27FC236}">
-                <a16:creationId xmlns:a16="http://schemas.microsoft.com/office/drawing/2014/main" id="{2575BB4F-B39F-4157-A3A4-1BADA18D4D80}"/>
+                <a16:creationId xmlns:a16="http://schemas.microsoft.com/office/drawing/2014/main" id="{47CAAB47-362A-4400-AF8A-FA543A017059}"/>
               </a:ext>
             </a:extLst>
           </p:cNvPr>
@@ -8431,7 +8481,7 @@
           <p:cNvPr id="14" name="p13-line-2">
             <a:extLst xmlns:a="http://schemas.openxmlformats.org/drawingml/2006/main">
               <a:ext uri="{FF2B5EF4-FFF2-40B4-BE49-F238E27FC236}">
-                <a16:creationId xmlns:a16="http://schemas.microsoft.com/office/drawing/2014/main" id="{872BC48B-61EB-46E6-A9E9-C7A7C49E6D43}"/>
+                <a16:creationId xmlns:a16="http://schemas.microsoft.com/office/drawing/2014/main" id="{99518F30-258C-4E9E-A2C1-F7BD844678F7}"/>
               </a:ext>
             </a:extLst>
           </p:cNvPr>
@@ -8462,7 +8512,7 @@
           <p:cNvPr id="15" name="p13-n-2">
             <a:extLst xmlns:a="http://schemas.openxmlformats.org/drawingml/2006/main">
               <a:ext uri="{FF2B5EF4-FFF2-40B4-BE49-F238E27FC236}">
-                <a16:creationId xmlns:a16="http://schemas.microsoft.com/office/drawing/2014/main" id="{B7A8A350-2231-4D43-BB99-AA5492A58D5A}"/>
+                <a16:creationId xmlns:a16="http://schemas.microsoft.com/office/drawing/2014/main" id="{A8AADAA3-188D-437E-B3CA-494352E856E4}"/>
               </a:ext>
             </a:extLst>
           </p:cNvPr>
@@ -8519,7 +8569,7 @@
           <p:cNvPr id="16" name="p13-task-2">
             <a:extLst xmlns:a="http://schemas.openxmlformats.org/drawingml/2006/main">
               <a:ext uri="{FF2B5EF4-FFF2-40B4-BE49-F238E27FC236}">
-                <a16:creationId xmlns:a16="http://schemas.microsoft.com/office/drawing/2014/main" id="{F60E6896-1CCC-4B32-BEE2-097DA5C5E4EF}"/>
+                <a16:creationId xmlns:a16="http://schemas.microsoft.com/office/drawing/2014/main" id="{6B2B432D-AD39-4AB3-B284-30F626C711A8}"/>
               </a:ext>
             </a:extLst>
           </p:cNvPr>
@@ -8574,7 +8624,7 @@
           <p:cNvPr id="17" name="p13-n-3">
             <a:extLst xmlns:a="http://schemas.openxmlformats.org/drawingml/2006/main">
               <a:ext uri="{FF2B5EF4-FFF2-40B4-BE49-F238E27FC236}">
-                <a16:creationId xmlns:a16="http://schemas.microsoft.com/office/drawing/2014/main" id="{EBE35CF5-CE82-44B7-AB99-1C60598FC168}"/>
+                <a16:creationId xmlns:a16="http://schemas.microsoft.com/office/drawing/2014/main" id="{D0935479-3BAE-4AD9-AA63-2F2F9EDDBB80}"/>
               </a:ext>
             </a:extLst>
           </p:cNvPr>
@@ -8631,7 +8681,7 @@
           <p:cNvPr id="18" name="p13-task-3">
             <a:extLst xmlns:a="http://schemas.openxmlformats.org/drawingml/2006/main">
               <a:ext uri="{FF2B5EF4-FFF2-40B4-BE49-F238E27FC236}">
-                <a16:creationId xmlns:a16="http://schemas.microsoft.com/office/drawing/2014/main" id="{15C25A38-E2AF-45F3-93E6-A14F5EADD7BF}"/>
+                <a16:creationId xmlns:a16="http://schemas.microsoft.com/office/drawing/2014/main" id="{DA492548-4D4F-4801-9EEF-2FA4DC1F43C7}"/>
               </a:ext>
             </a:extLst>
           </p:cNvPr>
@@ -8686,7 +8736,7 @@
           <p:cNvPr id="19" name="p13-divider">
             <a:extLst xmlns:a="http://schemas.openxmlformats.org/drawingml/2006/main">
               <a:ext uri="{FF2B5EF4-FFF2-40B4-BE49-F238E27FC236}">
-                <a16:creationId xmlns:a16="http://schemas.microsoft.com/office/drawing/2014/main" id="{B49550F9-BFC0-4BD8-BD43-EEAB4A0E55FF}"/>
+                <a16:creationId xmlns:a16="http://schemas.microsoft.com/office/drawing/2014/main" id="{DF1F7143-17CE-452C-A865-31E187B5F95E}"/>
               </a:ext>
             </a:extLst>
           </p:cNvPr>
@@ -8717,7 +8767,7 @@
           <p:cNvPr id="20" name="p13-right-title">
             <a:extLst xmlns:a="http://schemas.openxmlformats.org/drawingml/2006/main">
               <a:ext uri="{FF2B5EF4-FFF2-40B4-BE49-F238E27FC236}">
-                <a16:creationId xmlns:a16="http://schemas.microsoft.com/office/drawing/2014/main" id="{A34AE997-4B34-4704-8968-B3AF578E8E34}"/>
+                <a16:creationId xmlns:a16="http://schemas.microsoft.com/office/drawing/2014/main" id="{E2B6B068-4AA5-4362-A32F-D4B87DEE47ED}"/>
               </a:ext>
             </a:extLst>
           </p:cNvPr>
@@ -8770,7 +8820,7 @@
           <p:cNvPr id="21" name="p13-time-0">
             <a:extLst xmlns:a="http://schemas.openxmlformats.org/drawingml/2006/main">
               <a:ext uri="{FF2B5EF4-FFF2-40B4-BE49-F238E27FC236}">
-                <a16:creationId xmlns:a16="http://schemas.microsoft.com/office/drawing/2014/main" id="{47841AD5-5F3F-4AD8-84F9-CE6D5E620179}"/>
+                <a16:creationId xmlns:a16="http://schemas.microsoft.com/office/drawing/2014/main" id="{494C3BE7-2FB0-4966-B193-52C7A9F5BA65}"/>
               </a:ext>
             </a:extLst>
           </p:cNvPr>
@@ -8802,14 +8852,14 @@
           <a:lstStyle xmlns:a="http://schemas.openxmlformats.org/drawingml/2006/main"/>
           <a:p xmlns:a="http://schemas.openxmlformats.org/drawingml/2006/main">
             <a:pPr algn="ctr">
-              <a:defRPr sz="1200" b="1">
+              <a:defRPr sz="1350" b="1">
                 <a:solidFill>
                   <a:srgbClr val="FFFFFF"/>
                 </a:solidFill>
               </a:defRPr>
             </a:pPr>
             <a:r>
-              <a:rPr sz="1200" b="1">
+              <a:rPr sz="1350" b="1">
                 <a:solidFill>
                   <a:srgbClr val="FFFFFF"/>
                 </a:solidFill>
@@ -8827,7 +8877,7 @@
           <p:cNvPr id="22" name="p13-phase-0">
             <a:extLst xmlns:a="http://schemas.openxmlformats.org/drawingml/2006/main">
               <a:ext uri="{FF2B5EF4-FFF2-40B4-BE49-F238E27FC236}">
-                <a16:creationId xmlns:a16="http://schemas.microsoft.com/office/drawing/2014/main" id="{2F4C7E73-A61C-4E30-A436-64985DB12DF3}"/>
+                <a16:creationId xmlns:a16="http://schemas.microsoft.com/office/drawing/2014/main" id="{BB19B884-4501-4413-812B-6F0343F1DF59}"/>
               </a:ext>
             </a:extLst>
           </p:cNvPr>
@@ -8882,7 +8932,7 @@
           <p:cNvPr id="23" name="p13-time-1">
             <a:extLst xmlns:a="http://schemas.openxmlformats.org/drawingml/2006/main">
               <a:ext uri="{FF2B5EF4-FFF2-40B4-BE49-F238E27FC236}">
-                <a16:creationId xmlns:a16="http://schemas.microsoft.com/office/drawing/2014/main" id="{85CFDD4B-8D47-4027-9BA8-7E5B6E4B7525}"/>
+                <a16:creationId xmlns:a16="http://schemas.microsoft.com/office/drawing/2014/main" id="{B9576ED3-1A90-49A3-B3AB-2A026AA24F54}"/>
               </a:ext>
             </a:extLst>
           </p:cNvPr>
@@ -8914,14 +8964,14 @@
           <a:lstStyle xmlns:a="http://schemas.openxmlformats.org/drawingml/2006/main"/>
           <a:p xmlns:a="http://schemas.openxmlformats.org/drawingml/2006/main">
             <a:pPr algn="ctr">
-              <a:defRPr sz="1200" b="1">
+              <a:defRPr sz="1350" b="1">
                 <a:solidFill>
                   <a:srgbClr val="FFFFFF"/>
                 </a:solidFill>
               </a:defRPr>
             </a:pPr>
             <a:r>
-              <a:rPr sz="1200" b="1">
+              <a:rPr sz="1350" b="1">
                 <a:solidFill>
                   <a:srgbClr val="FFFFFF"/>
                 </a:solidFill>
@@ -8939,7 +8989,7 @@
           <p:cNvPr id="24" name="p13-phase-1">
             <a:extLst xmlns:a="http://schemas.openxmlformats.org/drawingml/2006/main">
               <a:ext uri="{FF2B5EF4-FFF2-40B4-BE49-F238E27FC236}">
-                <a16:creationId xmlns:a16="http://schemas.microsoft.com/office/drawing/2014/main" id="{E7D227BF-CC32-4DCB-8FBB-396940C5AB16}"/>
+                <a16:creationId xmlns:a16="http://schemas.microsoft.com/office/drawing/2014/main" id="{5123BA46-7ED5-4C13-8853-B97CDA70018F}"/>
               </a:ext>
             </a:extLst>
           </p:cNvPr>
@@ -8994,7 +9044,7 @@
           <p:cNvPr id="25" name="p13-time-2">
             <a:extLst xmlns:a="http://schemas.openxmlformats.org/drawingml/2006/main">
               <a:ext uri="{FF2B5EF4-FFF2-40B4-BE49-F238E27FC236}">
-                <a16:creationId xmlns:a16="http://schemas.microsoft.com/office/drawing/2014/main" id="{E429A585-23D1-4DE3-8AA0-A84550196040}"/>
+                <a16:creationId xmlns:a16="http://schemas.microsoft.com/office/drawing/2014/main" id="{D9D2D863-C903-472C-AC7D-99497F1A1C0E}"/>
               </a:ext>
             </a:extLst>
           </p:cNvPr>
@@ -9026,14 +9076,14 @@
           <a:lstStyle xmlns:a="http://schemas.openxmlformats.org/drawingml/2006/main"/>
           <a:p xmlns:a="http://schemas.openxmlformats.org/drawingml/2006/main">
             <a:pPr algn="ctr">
-              <a:defRPr sz="1200" b="1">
+              <a:defRPr sz="1350" b="1">
                 <a:solidFill>
                   <a:srgbClr val="FFFFFF"/>
                 </a:solidFill>
               </a:defRPr>
             </a:pPr>
             <a:r>
-              <a:rPr sz="1200" b="1">
+              <a:rPr sz="1350" b="1">
                 <a:solidFill>
                   <a:srgbClr val="FFFFFF"/>
                 </a:solidFill>
@@ -9051,7 +9101,7 @@
           <p:cNvPr id="26" name="p13-phase-2">
             <a:extLst xmlns:a="http://schemas.openxmlformats.org/drawingml/2006/main">
               <a:ext uri="{FF2B5EF4-FFF2-40B4-BE49-F238E27FC236}">
-                <a16:creationId xmlns:a16="http://schemas.microsoft.com/office/drawing/2014/main" id="{571B609D-4FC8-4D8E-8A63-80AECB7CAA04}"/>
+                <a16:creationId xmlns:a16="http://schemas.microsoft.com/office/drawing/2014/main" id="{166F0AAA-7D6B-4589-8A3B-76B00AE84EFD}"/>
               </a:ext>
             </a:extLst>
           </p:cNvPr>
@@ -9106,7 +9156,7 @@
           <p:cNvPr id="27" name="p13-fallback">
             <a:extLst xmlns:a="http://schemas.openxmlformats.org/drawingml/2006/main">
               <a:ext uri="{FF2B5EF4-FFF2-40B4-BE49-F238E27FC236}">
-                <a16:creationId xmlns:a16="http://schemas.microsoft.com/office/drawing/2014/main" id="{254F1080-94B9-4090-B2D7-8F183E817162}"/>
+                <a16:creationId xmlns:a16="http://schemas.microsoft.com/office/drawing/2014/main" id="{BB9E9AB4-FEAC-42E2-8E20-E934A9CFAE32}"/>
               </a:ext>
             </a:extLst>
           </p:cNvPr>
@@ -9259,7 +9309,7 @@
           <p:cNvPr id="6" name="p14-left-title">
             <a:extLst xmlns:a="http://schemas.openxmlformats.org/drawingml/2006/main">
               <a:ext uri="{FF2B5EF4-FFF2-40B4-BE49-F238E27FC236}">
-                <a16:creationId xmlns:a16="http://schemas.microsoft.com/office/drawing/2014/main" id="{BBB8BF0C-9BA3-4BA2-B50C-9C5C0F8F2A4B}"/>
+                <a16:creationId xmlns:a16="http://schemas.microsoft.com/office/drawing/2014/main" id="{E6A76E1E-C936-4A13-9906-83B1996819FA}"/>
               </a:ext>
             </a:extLst>
           </p:cNvPr>
@@ -9312,7 +9362,7 @@
           <p:cNvPr id="7" name="p14-n-0">
             <a:extLst xmlns:a="http://schemas.openxmlformats.org/drawingml/2006/main">
               <a:ext uri="{FF2B5EF4-FFF2-40B4-BE49-F238E27FC236}">
-                <a16:creationId xmlns:a16="http://schemas.microsoft.com/office/drawing/2014/main" id="{36072E5B-59AE-4D20-85B3-5912442AE7B3}"/>
+                <a16:creationId xmlns:a16="http://schemas.microsoft.com/office/drawing/2014/main" id="{D3C7D301-2F60-4476-8FB9-5509014D20F4}"/>
               </a:ext>
             </a:extLst>
           </p:cNvPr>
@@ -9344,14 +9394,14 @@
           <a:lstStyle xmlns:a="http://schemas.openxmlformats.org/drawingml/2006/main"/>
           <a:p xmlns:a="http://schemas.openxmlformats.org/drawingml/2006/main">
             <a:pPr algn="ctr">
-              <a:defRPr sz="1275" b="1">
+              <a:defRPr sz="1350" b="1">
                 <a:solidFill>
                   <a:srgbClr val="FFFFFF"/>
                 </a:solidFill>
               </a:defRPr>
             </a:pPr>
             <a:r>
-              <a:rPr sz="1275" b="1">
+              <a:rPr sz="1350" b="1">
                 <a:solidFill>
                   <a:srgbClr val="FFFFFF"/>
                 </a:solidFill>
@@ -9369,7 +9419,7 @@
           <p:cNvPr id="8" name="p14-q-0">
             <a:extLst xmlns:a="http://schemas.openxmlformats.org/drawingml/2006/main">
               <a:ext uri="{FF2B5EF4-FFF2-40B4-BE49-F238E27FC236}">
-                <a16:creationId xmlns:a16="http://schemas.microsoft.com/office/drawing/2014/main" id="{59A69AF3-9CE9-4E93-A95B-B0BDF9892EDF}"/>
+                <a16:creationId xmlns:a16="http://schemas.microsoft.com/office/drawing/2014/main" id="{12FFBD33-05A7-48E0-B755-8453A0310C32}"/>
               </a:ext>
             </a:extLst>
           </p:cNvPr>
@@ -9424,7 +9474,7 @@
           <p:cNvPr id="9" name="p14-n-1">
             <a:extLst xmlns:a="http://schemas.openxmlformats.org/drawingml/2006/main">
               <a:ext uri="{FF2B5EF4-FFF2-40B4-BE49-F238E27FC236}">
-                <a16:creationId xmlns:a16="http://schemas.microsoft.com/office/drawing/2014/main" id="{5E8C0A6C-C65F-4B13-9D88-7DE1190344A3}"/>
+                <a16:creationId xmlns:a16="http://schemas.microsoft.com/office/drawing/2014/main" id="{BC0C8410-5232-42BB-8423-BF4BDFD035FB}"/>
               </a:ext>
             </a:extLst>
           </p:cNvPr>
@@ -9456,14 +9506,14 @@
           <a:lstStyle xmlns:a="http://schemas.openxmlformats.org/drawingml/2006/main"/>
           <a:p xmlns:a="http://schemas.openxmlformats.org/drawingml/2006/main">
             <a:pPr algn="ctr">
-              <a:defRPr sz="1275" b="1">
+              <a:defRPr sz="1350" b="1">
                 <a:solidFill>
                   <a:srgbClr val="FFFFFF"/>
                 </a:solidFill>
               </a:defRPr>
             </a:pPr>
             <a:r>
-              <a:rPr sz="1275" b="1">
+              <a:rPr sz="1350" b="1">
                 <a:solidFill>
                   <a:srgbClr val="FFFFFF"/>
                 </a:solidFill>
@@ -9481,7 +9531,7 @@
           <p:cNvPr id="10" name="p14-q-1">
             <a:extLst xmlns:a="http://schemas.openxmlformats.org/drawingml/2006/main">
               <a:ext uri="{FF2B5EF4-FFF2-40B4-BE49-F238E27FC236}">
-                <a16:creationId xmlns:a16="http://schemas.microsoft.com/office/drawing/2014/main" id="{2D9E24BC-2837-49FA-AFC3-6156B5D24A4F}"/>
+                <a16:creationId xmlns:a16="http://schemas.microsoft.com/office/drawing/2014/main" id="{432C1F65-77A4-4D85-8E05-6E74CCB957D8}"/>
               </a:ext>
             </a:extLst>
           </p:cNvPr>
@@ -9536,7 +9586,7 @@
           <p:cNvPr id="11" name="p14-n-2">
             <a:extLst xmlns:a="http://schemas.openxmlformats.org/drawingml/2006/main">
               <a:ext uri="{FF2B5EF4-FFF2-40B4-BE49-F238E27FC236}">
-                <a16:creationId xmlns:a16="http://schemas.microsoft.com/office/drawing/2014/main" id="{5B461BCE-7AD0-4F34-9B01-D7E2252B759A}"/>
+                <a16:creationId xmlns:a16="http://schemas.microsoft.com/office/drawing/2014/main" id="{9CD6B26C-5819-462E-990D-7CDCAAC08A00}"/>
               </a:ext>
             </a:extLst>
           </p:cNvPr>
@@ -9568,14 +9618,14 @@
           <a:lstStyle xmlns:a="http://schemas.openxmlformats.org/drawingml/2006/main"/>
           <a:p xmlns:a="http://schemas.openxmlformats.org/drawingml/2006/main">
             <a:pPr algn="ctr">
-              <a:defRPr sz="1275" b="1">
+              <a:defRPr sz="1350" b="1">
                 <a:solidFill>
                   <a:srgbClr val="FFFFFF"/>
                 </a:solidFill>
               </a:defRPr>
             </a:pPr>
             <a:r>
-              <a:rPr sz="1275" b="1">
+              <a:rPr sz="1350" b="1">
                 <a:solidFill>
                   <a:srgbClr val="FFFFFF"/>
                 </a:solidFill>
@@ -9593,7 +9643,7 @@
           <p:cNvPr id="12" name="p14-q-2">
             <a:extLst xmlns:a="http://schemas.openxmlformats.org/drawingml/2006/main">
               <a:ext uri="{FF2B5EF4-FFF2-40B4-BE49-F238E27FC236}">
-                <a16:creationId xmlns:a16="http://schemas.microsoft.com/office/drawing/2014/main" id="{18907D16-BF3B-4F1C-95E3-F35177D29F0D}"/>
+                <a16:creationId xmlns:a16="http://schemas.microsoft.com/office/drawing/2014/main" id="{1C2E3B14-9993-425A-9901-691F83AD8A22}"/>
               </a:ext>
             </a:extLst>
           </p:cNvPr>
@@ -9648,7 +9698,7 @@
           <p:cNvPr id="13" name="p14-n-3">
             <a:extLst xmlns:a="http://schemas.openxmlformats.org/drawingml/2006/main">
               <a:ext uri="{FF2B5EF4-FFF2-40B4-BE49-F238E27FC236}">
-                <a16:creationId xmlns:a16="http://schemas.microsoft.com/office/drawing/2014/main" id="{65DE90D9-E234-460A-8521-8DE04E025C21}"/>
+                <a16:creationId xmlns:a16="http://schemas.microsoft.com/office/drawing/2014/main" id="{F28FF736-BC67-47C7-87B7-2B280A89D615}"/>
               </a:ext>
             </a:extLst>
           </p:cNvPr>
@@ -9680,14 +9730,14 @@
           <a:lstStyle xmlns:a="http://schemas.openxmlformats.org/drawingml/2006/main"/>
           <a:p xmlns:a="http://schemas.openxmlformats.org/drawingml/2006/main">
             <a:pPr algn="ctr">
-              <a:defRPr sz="1275" b="1">
+              <a:defRPr sz="1350" b="1">
                 <a:solidFill>
                   <a:srgbClr val="FFFFFF"/>
                 </a:solidFill>
               </a:defRPr>
             </a:pPr>
             <a:r>
-              <a:rPr sz="1275" b="1">
+              <a:rPr sz="1350" b="1">
                 <a:solidFill>
                   <a:srgbClr val="FFFFFF"/>
                 </a:solidFill>
@@ -9705,7 +9755,7 @@
           <p:cNvPr id="14" name="p14-q-3">
             <a:extLst xmlns:a="http://schemas.openxmlformats.org/drawingml/2006/main">
               <a:ext uri="{FF2B5EF4-FFF2-40B4-BE49-F238E27FC236}">
-                <a16:creationId xmlns:a16="http://schemas.microsoft.com/office/drawing/2014/main" id="{CA1EB2FC-9321-495F-8664-1D285B88268B}"/>
+                <a16:creationId xmlns:a16="http://schemas.microsoft.com/office/drawing/2014/main" id="{B26953A7-7998-43E4-A2F6-557266B1E106}"/>
               </a:ext>
             </a:extLst>
           </p:cNvPr>
@@ -9760,7 +9810,7 @@
           <p:cNvPr id="15" name="p14-divider">
             <a:extLst xmlns:a="http://schemas.openxmlformats.org/drawingml/2006/main">
               <a:ext uri="{FF2B5EF4-FFF2-40B4-BE49-F238E27FC236}">
-                <a16:creationId xmlns:a16="http://schemas.microsoft.com/office/drawing/2014/main" id="{259E21D7-03BC-4D23-89E2-21D1F622E50A}"/>
+                <a16:creationId xmlns:a16="http://schemas.microsoft.com/office/drawing/2014/main" id="{A210C7B1-7A50-4EC5-8E59-95BAEC47D9A9}"/>
               </a:ext>
             </a:extLst>
           </p:cNvPr>
@@ -9791,7 +9841,7 @@
           <p:cNvPr id="16" name="p14-right-title">
             <a:extLst xmlns:a="http://schemas.openxmlformats.org/drawingml/2006/main">
               <a:ext uri="{FF2B5EF4-FFF2-40B4-BE49-F238E27FC236}">
-                <a16:creationId xmlns:a16="http://schemas.microsoft.com/office/drawing/2014/main" id="{7EC5D460-1827-4844-B93A-A49E87B93254}"/>
+                <a16:creationId xmlns:a16="http://schemas.microsoft.com/office/drawing/2014/main" id="{3CEF255F-B85E-42CB-ACF6-25F1A2603B9D}"/>
               </a:ext>
             </a:extLst>
           </p:cNvPr>
@@ -9844,7 +9894,7 @@
           <p:cNvPr id="17" name="p14-next-label-0">
             <a:extLst xmlns:a="http://schemas.openxmlformats.org/drawingml/2006/main">
               <a:ext uri="{FF2B5EF4-FFF2-40B4-BE49-F238E27FC236}">
-                <a16:creationId xmlns:a16="http://schemas.microsoft.com/office/drawing/2014/main" id="{0250C493-2D5B-4E67-9740-3CA65006501C}"/>
+                <a16:creationId xmlns:a16="http://schemas.microsoft.com/office/drawing/2014/main" id="{13560647-539F-440C-AC6F-6E8250CCCCCC}"/>
               </a:ext>
             </a:extLst>
           </p:cNvPr>
@@ -9876,14 +9926,14 @@
           <a:lstStyle xmlns:a="http://schemas.openxmlformats.org/drawingml/2006/main"/>
           <a:p xmlns:a="http://schemas.openxmlformats.org/drawingml/2006/main">
             <a:pPr algn="ctr">
-              <a:defRPr sz="1275" b="1">
+              <a:defRPr sz="1350" b="1">
                 <a:solidFill>
                   <a:srgbClr val="FFFFFF"/>
                 </a:solidFill>
               </a:defRPr>
             </a:pPr>
             <a:r>
-              <a:rPr sz="1275" b="1">
+              <a:rPr sz="1350" b="1">
                 <a:solidFill>
                   <a:srgbClr val="FFFFFF"/>
                 </a:solidFill>
@@ -9901,7 +9951,7 @@
           <p:cNvPr id="18" name="p14-next-detail-0">
             <a:extLst xmlns:a="http://schemas.openxmlformats.org/drawingml/2006/main">
               <a:ext uri="{FF2B5EF4-FFF2-40B4-BE49-F238E27FC236}">
-                <a16:creationId xmlns:a16="http://schemas.microsoft.com/office/drawing/2014/main" id="{A377AA2A-1709-46AF-87BE-97C4A88233A4}"/>
+                <a16:creationId xmlns:a16="http://schemas.microsoft.com/office/drawing/2014/main" id="{26D36770-F18E-4F43-BFE3-7DDE761F17A0}"/>
               </a:ext>
             </a:extLst>
           </p:cNvPr>
@@ -9931,14 +9981,14 @@
           <a:lstStyle xmlns:a="http://schemas.openxmlformats.org/drawingml/2006/main"/>
           <a:p xmlns:a="http://schemas.openxmlformats.org/drawingml/2006/main">
             <a:pPr algn="ctr">
-              <a:defRPr sz="1275" b="1">
+              <a:defRPr sz="1350" b="1">
                 <a:solidFill>
                   <a:srgbClr val="263746"/>
                 </a:solidFill>
               </a:defRPr>
             </a:pPr>
             <a:r>
-              <a:rPr sz="1275" b="1">
+              <a:rPr sz="1350" b="1">
                 <a:solidFill>
                   <a:srgbClr val="263746"/>
                 </a:solidFill>
@@ -9956,7 +10006,7 @@
           <p:cNvPr id="19" name="p14-next-label-1">
             <a:extLst xmlns:a="http://schemas.openxmlformats.org/drawingml/2006/main">
               <a:ext uri="{FF2B5EF4-FFF2-40B4-BE49-F238E27FC236}">
-                <a16:creationId xmlns:a16="http://schemas.microsoft.com/office/drawing/2014/main" id="{D0BF5EC3-3F29-408F-9E50-CA5028949039}"/>
+                <a16:creationId xmlns:a16="http://schemas.microsoft.com/office/drawing/2014/main" id="{5E9074A9-1892-4970-B401-E484DE6FC8F8}"/>
               </a:ext>
             </a:extLst>
           </p:cNvPr>
@@ -9988,14 +10038,14 @@
           <a:lstStyle xmlns:a="http://schemas.openxmlformats.org/drawingml/2006/main"/>
           <a:p xmlns:a="http://schemas.openxmlformats.org/drawingml/2006/main">
             <a:pPr algn="ctr">
-              <a:defRPr sz="1275" b="1">
+              <a:defRPr sz="1350" b="1">
                 <a:solidFill>
                   <a:srgbClr val="FFFFFF"/>
                 </a:solidFill>
               </a:defRPr>
             </a:pPr>
             <a:r>
-              <a:rPr sz="1275" b="1">
+              <a:rPr sz="1350" b="1">
                 <a:solidFill>
                   <a:srgbClr val="FFFFFF"/>
                 </a:solidFill>
@@ -10013,7 +10063,7 @@
           <p:cNvPr id="20" name="p14-next-detail-1">
             <a:extLst xmlns:a="http://schemas.openxmlformats.org/drawingml/2006/main">
               <a:ext uri="{FF2B5EF4-FFF2-40B4-BE49-F238E27FC236}">
-                <a16:creationId xmlns:a16="http://schemas.microsoft.com/office/drawing/2014/main" id="{E397EB2F-26CB-4115-BBC5-5BF3D931590C}"/>
+                <a16:creationId xmlns:a16="http://schemas.microsoft.com/office/drawing/2014/main" id="{E4F076B3-0F1B-4DC6-9227-D411F385ED43}"/>
               </a:ext>
             </a:extLst>
           </p:cNvPr>
@@ -10043,14 +10093,14 @@
           <a:lstStyle xmlns:a="http://schemas.openxmlformats.org/drawingml/2006/main"/>
           <a:p xmlns:a="http://schemas.openxmlformats.org/drawingml/2006/main">
             <a:pPr algn="ctr">
-              <a:defRPr sz="1275" b="1">
+              <a:defRPr sz="1350" b="1">
                 <a:solidFill>
                   <a:srgbClr val="263746"/>
                 </a:solidFill>
               </a:defRPr>
             </a:pPr>
             <a:r>
-              <a:rPr sz="1275" b="1">
+              <a:rPr sz="1350" b="1">
                 <a:solidFill>
                   <a:srgbClr val="263746"/>
                 </a:solidFill>
@@ -10068,7 +10118,7 @@
           <p:cNvPr id="21" name="p14-next-label-2">
             <a:extLst xmlns:a="http://schemas.openxmlformats.org/drawingml/2006/main">
               <a:ext uri="{FF2B5EF4-FFF2-40B4-BE49-F238E27FC236}">
-                <a16:creationId xmlns:a16="http://schemas.microsoft.com/office/drawing/2014/main" id="{BD6BBBC3-F895-4021-A67A-4D4CEBE73F8B}"/>
+                <a16:creationId xmlns:a16="http://schemas.microsoft.com/office/drawing/2014/main" id="{8F93CD68-0716-4C7D-ABF9-ECC73A8B1C64}"/>
               </a:ext>
             </a:extLst>
           </p:cNvPr>
@@ -10100,14 +10150,14 @@
           <a:lstStyle xmlns:a="http://schemas.openxmlformats.org/drawingml/2006/main"/>
           <a:p xmlns:a="http://schemas.openxmlformats.org/drawingml/2006/main">
             <a:pPr algn="ctr">
-              <a:defRPr sz="1275" b="1">
+              <a:defRPr sz="1350" b="1">
                 <a:solidFill>
                   <a:srgbClr val="FFFFFF"/>
                 </a:solidFill>
               </a:defRPr>
             </a:pPr>
             <a:r>
-              <a:rPr sz="1275" b="1">
+              <a:rPr sz="1350" b="1">
                 <a:solidFill>
                   <a:srgbClr val="FFFFFF"/>
                 </a:solidFill>
@@ -10125,7 +10175,7 @@
           <p:cNvPr id="22" name="p14-next-detail-2">
             <a:extLst xmlns:a="http://schemas.openxmlformats.org/drawingml/2006/main">
               <a:ext uri="{FF2B5EF4-FFF2-40B4-BE49-F238E27FC236}">
-                <a16:creationId xmlns:a16="http://schemas.microsoft.com/office/drawing/2014/main" id="{331E247E-C74F-43BA-9AFD-26763262A0F1}"/>
+                <a16:creationId xmlns:a16="http://schemas.microsoft.com/office/drawing/2014/main" id="{D8960E9B-BFC4-4103-80E9-AA213E5844FC}"/>
               </a:ext>
             </a:extLst>
           </p:cNvPr>
@@ -10155,14 +10205,14 @@
           <a:lstStyle xmlns:a="http://schemas.openxmlformats.org/drawingml/2006/main"/>
           <a:p xmlns:a="http://schemas.openxmlformats.org/drawingml/2006/main">
             <a:pPr algn="ctr">
-              <a:defRPr sz="1275" b="1">
+              <a:defRPr sz="1350" b="1">
                 <a:solidFill>
                   <a:srgbClr val="263746"/>
                 </a:solidFill>
               </a:defRPr>
             </a:pPr>
             <a:r>
-              <a:rPr sz="1275" b="1">
+              <a:rPr sz="1350" b="1">
                 <a:solidFill>
                   <a:srgbClr val="263746"/>
                 </a:solidFill>
@@ -10180,7 +10230,7 @@
           <p:cNvPr id="23" name="p14-next-label-3">
             <a:extLst xmlns:a="http://schemas.openxmlformats.org/drawingml/2006/main">
               <a:ext uri="{FF2B5EF4-FFF2-40B4-BE49-F238E27FC236}">
-                <a16:creationId xmlns:a16="http://schemas.microsoft.com/office/drawing/2014/main" id="{A8E67205-74DC-4B4F-A545-BCEF4B6A506A}"/>
+                <a16:creationId xmlns:a16="http://schemas.microsoft.com/office/drawing/2014/main" id="{1BA4D93C-54D2-431A-B22A-C18EEC12A13F}"/>
               </a:ext>
             </a:extLst>
           </p:cNvPr>
@@ -10212,14 +10262,14 @@
           <a:lstStyle xmlns:a="http://schemas.openxmlformats.org/drawingml/2006/main"/>
           <a:p xmlns:a="http://schemas.openxmlformats.org/drawingml/2006/main">
             <a:pPr algn="ctr">
-              <a:defRPr sz="1275" b="1">
+              <a:defRPr sz="1350" b="1">
                 <a:solidFill>
                   <a:srgbClr val="FFFFFF"/>
                 </a:solidFill>
               </a:defRPr>
             </a:pPr>
             <a:r>
-              <a:rPr sz="1275" b="1">
+              <a:rPr sz="1350" b="1">
                 <a:solidFill>
                   <a:srgbClr val="FFFFFF"/>
                 </a:solidFill>
@@ -10237,7 +10287,7 @@
           <p:cNvPr id="24" name="p14-next-detail-3">
             <a:extLst xmlns:a="http://schemas.openxmlformats.org/drawingml/2006/main">
               <a:ext uri="{FF2B5EF4-FFF2-40B4-BE49-F238E27FC236}">
-                <a16:creationId xmlns:a16="http://schemas.microsoft.com/office/drawing/2014/main" id="{24C28E73-3055-4566-8DBF-02D3A44AC80F}"/>
+                <a16:creationId xmlns:a16="http://schemas.microsoft.com/office/drawing/2014/main" id="{2D631101-549B-467F-AD86-CFDD774C442F}"/>
               </a:ext>
             </a:extLst>
           </p:cNvPr>
@@ -10267,14 +10317,14 @@
           <a:lstStyle xmlns:a="http://schemas.openxmlformats.org/drawingml/2006/main"/>
           <a:p xmlns:a="http://schemas.openxmlformats.org/drawingml/2006/main">
             <a:pPr algn="ctr">
-              <a:defRPr sz="1275" b="1">
+              <a:defRPr sz="1350" b="1">
                 <a:solidFill>
                   <a:srgbClr val="263746"/>
                 </a:solidFill>
               </a:defRPr>
             </a:pPr>
             <a:r>
-              <a:rPr sz="1275" b="1">
+              <a:rPr sz="1350" b="1">
                 <a:solidFill>
                   <a:srgbClr val="263746"/>
                 </a:solidFill>
@@ -10292,7 +10342,7 @@
           <p:cNvPr id="25" name="p14-bottom">
             <a:extLst xmlns:a="http://schemas.openxmlformats.org/drawingml/2006/main">
               <a:ext uri="{FF2B5EF4-FFF2-40B4-BE49-F238E27FC236}">
-                <a16:creationId xmlns:a16="http://schemas.microsoft.com/office/drawing/2014/main" id="{88F40B5C-5D0E-4F1B-BAD0-8F43973520A4}"/>
+                <a16:creationId xmlns:a16="http://schemas.microsoft.com/office/drawing/2014/main" id="{F6971FE7-E1A6-4C37-B95E-3F7CD8D2F39D}"/>
               </a:ext>
             </a:extLst>
           </p:cNvPr>
@@ -10439,7 +10489,7 @@
           <p:cNvPr id="6" name="p02-left-title">
             <a:extLst xmlns:a="http://schemas.openxmlformats.org/drawingml/2006/main">
               <a:ext uri="{FF2B5EF4-FFF2-40B4-BE49-F238E27FC236}">
-                <a16:creationId xmlns:a16="http://schemas.microsoft.com/office/drawing/2014/main" id="{35ADB708-22A0-453B-B1C3-50E6EBF2949B}"/>
+                <a16:creationId xmlns:a16="http://schemas.microsoft.com/office/drawing/2014/main" id="{FB070E25-D17E-41D5-A977-2FCE50037D6C}"/>
               </a:ext>
             </a:extLst>
           </p:cNvPr>
@@ -10492,7 +10542,7 @@
           <p:cNvPr id="7" name="p02-left-0">
             <a:extLst xmlns:a="http://schemas.openxmlformats.org/drawingml/2006/main">
               <a:ext uri="{FF2B5EF4-FFF2-40B4-BE49-F238E27FC236}">
-                <a16:creationId xmlns:a16="http://schemas.microsoft.com/office/drawing/2014/main" id="{617BF821-29AB-4FA9-91F1-49178B8039B2}"/>
+                <a16:creationId xmlns:a16="http://schemas.microsoft.com/office/drawing/2014/main" id="{CEBB491D-0DDD-40D8-8266-1096D10CF651}"/>
               </a:ext>
             </a:extLst>
           </p:cNvPr>
@@ -10577,7 +10627,7 @@
           <p:cNvPr id="8" name="p02-left-1">
             <a:extLst xmlns:a="http://schemas.openxmlformats.org/drawingml/2006/main">
               <a:ext uri="{FF2B5EF4-FFF2-40B4-BE49-F238E27FC236}">
-                <a16:creationId xmlns:a16="http://schemas.microsoft.com/office/drawing/2014/main" id="{DA361815-55B6-4AE3-9F30-265E86312AC8}"/>
+                <a16:creationId xmlns:a16="http://schemas.microsoft.com/office/drawing/2014/main" id="{1C4C1EED-0A87-4E41-8800-EA8DC3A8FBB2}"/>
               </a:ext>
             </a:extLst>
           </p:cNvPr>
@@ -10662,7 +10712,7 @@
           <p:cNvPr id="9" name="p02-left-2">
             <a:extLst xmlns:a="http://schemas.openxmlformats.org/drawingml/2006/main">
               <a:ext uri="{FF2B5EF4-FFF2-40B4-BE49-F238E27FC236}">
-                <a16:creationId xmlns:a16="http://schemas.microsoft.com/office/drawing/2014/main" id="{17B2C71E-B5BA-418C-B5BD-3336D13AABF6}"/>
+                <a16:creationId xmlns:a16="http://schemas.microsoft.com/office/drawing/2014/main" id="{24EA5068-1C10-46A7-9917-F2E777665565}"/>
               </a:ext>
             </a:extLst>
           </p:cNvPr>
@@ -10747,7 +10797,7 @@
           <p:cNvPr id="10" name="p02-separator">
             <a:extLst xmlns:a="http://schemas.openxmlformats.org/drawingml/2006/main">
               <a:ext uri="{FF2B5EF4-FFF2-40B4-BE49-F238E27FC236}">
-                <a16:creationId xmlns:a16="http://schemas.microsoft.com/office/drawing/2014/main" id="{8ED4E436-5BAA-4E08-87DB-27E8FC1B4316}"/>
+                <a16:creationId xmlns:a16="http://schemas.microsoft.com/office/drawing/2014/main" id="{F7E9E459-E912-4340-9051-6B1D2874BC9F}"/>
               </a:ext>
             </a:extLst>
           </p:cNvPr>
@@ -10778,7 +10828,7 @@
           <p:cNvPr id="11" name="p02-ne">
             <a:extLst xmlns:a="http://schemas.openxmlformats.org/drawingml/2006/main">
               <a:ext uri="{FF2B5EF4-FFF2-40B4-BE49-F238E27FC236}">
-                <a16:creationId xmlns:a16="http://schemas.microsoft.com/office/drawing/2014/main" id="{9B1414F8-24C2-4ACD-AFFC-ECF21BE455EE}"/>
+                <a16:creationId xmlns:a16="http://schemas.microsoft.com/office/drawing/2014/main" id="{E3154551-0300-4A1F-95C9-F4DEE077E876}"/>
               </a:ext>
             </a:extLst>
           </p:cNvPr>
@@ -10831,7 +10881,7 @@
           <p:cNvPr id="12" name="p02-right-title">
             <a:extLst xmlns:a="http://schemas.openxmlformats.org/drawingml/2006/main">
               <a:ext uri="{FF2B5EF4-FFF2-40B4-BE49-F238E27FC236}">
-                <a16:creationId xmlns:a16="http://schemas.microsoft.com/office/drawing/2014/main" id="{13083CA5-E228-4413-BECD-EC4F31F459A1}"/>
+                <a16:creationId xmlns:a16="http://schemas.microsoft.com/office/drawing/2014/main" id="{4E486997-DDCC-4730-AA3A-14917207DE06}"/>
               </a:ext>
             </a:extLst>
           </p:cNvPr>
@@ -10884,7 +10934,7 @@
           <p:cNvPr id="13" name="p02-right-0">
             <a:extLst xmlns:a="http://schemas.openxmlformats.org/drawingml/2006/main">
               <a:ext uri="{FF2B5EF4-FFF2-40B4-BE49-F238E27FC236}">
-                <a16:creationId xmlns:a16="http://schemas.microsoft.com/office/drawing/2014/main" id="{E3E6FAD6-E212-42C6-9A83-EC4608422571}"/>
+                <a16:creationId xmlns:a16="http://schemas.microsoft.com/office/drawing/2014/main" id="{45C027F7-51E6-4B91-B91F-C39D4DE0F960}"/>
               </a:ext>
             </a:extLst>
           </p:cNvPr>
@@ -10969,7 +11019,7 @@
           <p:cNvPr id="14" name="p02-right-1">
             <a:extLst xmlns:a="http://schemas.openxmlformats.org/drawingml/2006/main">
               <a:ext uri="{FF2B5EF4-FFF2-40B4-BE49-F238E27FC236}">
-                <a16:creationId xmlns:a16="http://schemas.microsoft.com/office/drawing/2014/main" id="{4E212E88-56AB-4015-888F-D01FB1CF1D04}"/>
+                <a16:creationId xmlns:a16="http://schemas.microsoft.com/office/drawing/2014/main" id="{FA0654CD-7626-4F3C-AD63-083299F975D6}"/>
               </a:ext>
             </a:extLst>
           </p:cNvPr>
@@ -11054,7 +11104,7 @@
           <p:cNvPr id="15" name="p02-right-2">
             <a:extLst xmlns:a="http://schemas.openxmlformats.org/drawingml/2006/main">
               <a:ext uri="{FF2B5EF4-FFF2-40B4-BE49-F238E27FC236}">
-                <a16:creationId xmlns:a16="http://schemas.microsoft.com/office/drawing/2014/main" id="{2AE4BBC0-C0AC-4363-AF1D-1AFB35834023}"/>
+                <a16:creationId xmlns:a16="http://schemas.microsoft.com/office/drawing/2014/main" id="{B5118396-53F0-4D6A-9717-EBC37ACDE73F}"/>
               </a:ext>
             </a:extLst>
           </p:cNvPr>
@@ -11139,7 +11189,7 @@
           <p:cNvPr id="16" name="p02-bottom">
             <a:extLst xmlns:a="http://schemas.openxmlformats.org/drawingml/2006/main">
               <a:ext uri="{FF2B5EF4-FFF2-40B4-BE49-F238E27FC236}">
-                <a16:creationId xmlns:a16="http://schemas.microsoft.com/office/drawing/2014/main" id="{D5EA236D-9C72-476E-97B9-F1B0D67CEECE}"/>
+                <a16:creationId xmlns:a16="http://schemas.microsoft.com/office/drawing/2014/main" id="{0446E276-CF31-473B-97A8-8CEA96445FE5}"/>
               </a:ext>
             </a:extLst>
           </p:cNvPr>
@@ -11286,7 +11336,7 @@
           <p:cNvPr id="6" name="p03-link-0">
             <a:extLst xmlns:a="http://schemas.openxmlformats.org/drawingml/2006/main">
               <a:ext uri="{FF2B5EF4-FFF2-40B4-BE49-F238E27FC236}">
-                <a16:creationId xmlns:a16="http://schemas.microsoft.com/office/drawing/2014/main" id="{D857C583-81FF-4194-A78A-2AD94104251F}"/>
+                <a16:creationId xmlns:a16="http://schemas.microsoft.com/office/drawing/2014/main" id="{651EF755-7DE7-4116-8511-4422211ABAD0}"/>
               </a:ext>
             </a:extLst>
           </p:cNvPr>
@@ -11317,7 +11367,7 @@
           <p:cNvPr id="7" name="p03-link-1">
             <a:extLst xmlns:a="http://schemas.openxmlformats.org/drawingml/2006/main">
               <a:ext uri="{FF2B5EF4-FFF2-40B4-BE49-F238E27FC236}">
-                <a16:creationId xmlns:a16="http://schemas.microsoft.com/office/drawing/2014/main" id="{459E989D-D456-4BD8-B697-4BED9BE122A1}"/>
+                <a16:creationId xmlns:a16="http://schemas.microsoft.com/office/drawing/2014/main" id="{0807AF16-B910-42F1-9E32-95F4FDA8A0DE}"/>
               </a:ext>
             </a:extLst>
           </p:cNvPr>
@@ -11348,7 +11398,7 @@
           <p:cNvPr id="8" name="p03-link-2">
             <a:extLst xmlns:a="http://schemas.openxmlformats.org/drawingml/2006/main">
               <a:ext uri="{FF2B5EF4-FFF2-40B4-BE49-F238E27FC236}">
-                <a16:creationId xmlns:a16="http://schemas.microsoft.com/office/drawing/2014/main" id="{884EC9FF-8D08-4ED0-81CD-39053DE31684}"/>
+                <a16:creationId xmlns:a16="http://schemas.microsoft.com/office/drawing/2014/main" id="{55775009-A0C9-4308-8832-5799AC26A8A6}"/>
               </a:ext>
             </a:extLst>
           </p:cNvPr>
@@ -11379,7 +11429,7 @@
           <p:cNvPr id="9" name="p03-n-0">
             <a:extLst xmlns:a="http://schemas.openxmlformats.org/drawingml/2006/main">
               <a:ext uri="{FF2B5EF4-FFF2-40B4-BE49-F238E27FC236}">
-                <a16:creationId xmlns:a16="http://schemas.microsoft.com/office/drawing/2014/main" id="{0047299E-225B-4979-9BB2-72E13E058D70}"/>
+                <a16:creationId xmlns:a16="http://schemas.microsoft.com/office/drawing/2014/main" id="{74295398-71F4-4DA7-AE7B-B48CE800D08C}"/>
               </a:ext>
             </a:extLst>
           </p:cNvPr>
@@ -11436,7 +11486,7 @@
           <p:cNvPr id="10" name="p03-chain-0">
             <a:extLst xmlns:a="http://schemas.openxmlformats.org/drawingml/2006/main">
               <a:ext uri="{FF2B5EF4-FFF2-40B4-BE49-F238E27FC236}">
-                <a16:creationId xmlns:a16="http://schemas.microsoft.com/office/drawing/2014/main" id="{19DF00D7-6CF8-424B-BD79-3ABEA9566717}"/>
+                <a16:creationId xmlns:a16="http://schemas.microsoft.com/office/drawing/2014/main" id="{96BA0947-0E49-4808-AF9F-C89E230B4BF4}"/>
               </a:ext>
             </a:extLst>
           </p:cNvPr>
@@ -11497,7 +11547,7 @@
           <p:cNvPr id="11" name="p03-n-1">
             <a:extLst xmlns:a="http://schemas.openxmlformats.org/drawingml/2006/main">
               <a:ext uri="{FF2B5EF4-FFF2-40B4-BE49-F238E27FC236}">
-                <a16:creationId xmlns:a16="http://schemas.microsoft.com/office/drawing/2014/main" id="{193AD5ED-71BC-46EB-A9C8-9F10A25797DB}"/>
+                <a16:creationId xmlns:a16="http://schemas.microsoft.com/office/drawing/2014/main" id="{E2009BE8-989A-4D6B-9A9B-F2EBD3E9192C}"/>
               </a:ext>
             </a:extLst>
           </p:cNvPr>
@@ -11554,7 +11604,7 @@
           <p:cNvPr id="12" name="p03-chain-1">
             <a:extLst xmlns:a="http://schemas.openxmlformats.org/drawingml/2006/main">
               <a:ext uri="{FF2B5EF4-FFF2-40B4-BE49-F238E27FC236}">
-                <a16:creationId xmlns:a16="http://schemas.microsoft.com/office/drawing/2014/main" id="{91B0A1A6-FF4A-4D66-88C8-32F6C8E8C1A5}"/>
+                <a16:creationId xmlns:a16="http://schemas.microsoft.com/office/drawing/2014/main" id="{641442AB-E137-419A-BA50-5D1D40893F71}"/>
               </a:ext>
             </a:extLst>
           </p:cNvPr>
@@ -11615,7 +11665,7 @@
           <p:cNvPr id="13" name="p03-n-2">
             <a:extLst xmlns:a="http://schemas.openxmlformats.org/drawingml/2006/main">
               <a:ext uri="{FF2B5EF4-FFF2-40B4-BE49-F238E27FC236}">
-                <a16:creationId xmlns:a16="http://schemas.microsoft.com/office/drawing/2014/main" id="{56A58191-18C9-4351-A8B0-AF21E31A6453}"/>
+                <a16:creationId xmlns:a16="http://schemas.microsoft.com/office/drawing/2014/main" id="{96E1F713-9527-40AC-AFB5-96145610F516}"/>
               </a:ext>
             </a:extLst>
           </p:cNvPr>
@@ -11672,7 +11722,7 @@
           <p:cNvPr id="14" name="p03-chain-2">
             <a:extLst xmlns:a="http://schemas.openxmlformats.org/drawingml/2006/main">
               <a:ext uri="{FF2B5EF4-FFF2-40B4-BE49-F238E27FC236}">
-                <a16:creationId xmlns:a16="http://schemas.microsoft.com/office/drawing/2014/main" id="{88F0EB7A-8EEF-4FA1-A2D9-A4A94DB33883}"/>
+                <a16:creationId xmlns:a16="http://schemas.microsoft.com/office/drawing/2014/main" id="{163728A0-E340-42AF-8741-298C4595251A}"/>
               </a:ext>
             </a:extLst>
           </p:cNvPr>
@@ -11733,7 +11783,7 @@
           <p:cNvPr id="15" name="p03-n-3">
             <a:extLst xmlns:a="http://schemas.openxmlformats.org/drawingml/2006/main">
               <a:ext uri="{FF2B5EF4-FFF2-40B4-BE49-F238E27FC236}">
-                <a16:creationId xmlns:a16="http://schemas.microsoft.com/office/drawing/2014/main" id="{BDD1EB9D-0ADF-48FA-BC1D-02A3B5A5228D}"/>
+                <a16:creationId xmlns:a16="http://schemas.microsoft.com/office/drawing/2014/main" id="{C5B5E15E-710B-4E67-A789-CC8803BD685B}"/>
               </a:ext>
             </a:extLst>
           </p:cNvPr>
@@ -11790,7 +11840,7 @@
           <p:cNvPr id="16" name="p03-chain-3">
             <a:extLst xmlns:a="http://schemas.openxmlformats.org/drawingml/2006/main">
               <a:ext uri="{FF2B5EF4-FFF2-40B4-BE49-F238E27FC236}">
-                <a16:creationId xmlns:a16="http://schemas.microsoft.com/office/drawing/2014/main" id="{44B0FD53-18AC-4692-90E4-5B7C8002B660}"/>
+                <a16:creationId xmlns:a16="http://schemas.microsoft.com/office/drawing/2014/main" id="{FD8FFCB0-4FB7-449E-94E9-1E0FD2E5AC22}"/>
               </a:ext>
             </a:extLst>
           </p:cNvPr>
@@ -11851,7 +11901,7 @@
           <p:cNvPr id="17" name="p03-output-title">
             <a:extLst xmlns:a="http://schemas.openxmlformats.org/drawingml/2006/main">
               <a:ext uri="{FF2B5EF4-FFF2-40B4-BE49-F238E27FC236}">
-                <a16:creationId xmlns:a16="http://schemas.microsoft.com/office/drawing/2014/main" id="{DCE97737-7B0A-41C9-A116-1299389B35B4}"/>
+                <a16:creationId xmlns:a16="http://schemas.microsoft.com/office/drawing/2014/main" id="{C5B1024D-F6C0-4D4D-B644-90581E350D8D}"/>
               </a:ext>
             </a:extLst>
           </p:cNvPr>
@@ -11904,7 +11954,7 @@
           <p:cNvPr id="18" name="p03-out-label-0">
             <a:extLst xmlns:a="http://schemas.openxmlformats.org/drawingml/2006/main">
               <a:ext uri="{FF2B5EF4-FFF2-40B4-BE49-F238E27FC236}">
-                <a16:creationId xmlns:a16="http://schemas.microsoft.com/office/drawing/2014/main" id="{5A467506-80DA-4CC3-AA6F-F1AB90B4322B}"/>
+                <a16:creationId xmlns:a16="http://schemas.microsoft.com/office/drawing/2014/main" id="{C3247617-A5AA-4496-A94A-CDE9325C57F1}"/>
               </a:ext>
             </a:extLst>
           </p:cNvPr>
@@ -11959,7 +12009,7 @@
           <p:cNvPr id="19" name="p03-out-detail-0">
             <a:extLst xmlns:a="http://schemas.openxmlformats.org/drawingml/2006/main">
               <a:ext uri="{FF2B5EF4-FFF2-40B4-BE49-F238E27FC236}">
-                <a16:creationId xmlns:a16="http://schemas.microsoft.com/office/drawing/2014/main" id="{547FE88F-7BD3-4DDE-9351-F80484C56B7D}"/>
+                <a16:creationId xmlns:a16="http://schemas.microsoft.com/office/drawing/2014/main" id="{BB37BE63-F7B9-4EF1-A353-A3D65BCF8837}"/>
               </a:ext>
             </a:extLst>
           </p:cNvPr>
@@ -12018,7 +12068,7 @@
           <p:cNvPr id="20" name="p03-out-label-1">
             <a:extLst xmlns:a="http://schemas.openxmlformats.org/drawingml/2006/main">
               <a:ext uri="{FF2B5EF4-FFF2-40B4-BE49-F238E27FC236}">
-                <a16:creationId xmlns:a16="http://schemas.microsoft.com/office/drawing/2014/main" id="{4DDFA4BD-5EDA-4839-ACB6-159C153249D4}"/>
+                <a16:creationId xmlns:a16="http://schemas.microsoft.com/office/drawing/2014/main" id="{C32F9EB4-B0A8-4B4D-9D11-BC9A2DFC9243}"/>
               </a:ext>
             </a:extLst>
           </p:cNvPr>
@@ -12073,7 +12123,7 @@
           <p:cNvPr id="21" name="p03-out-detail-1">
             <a:extLst xmlns:a="http://schemas.openxmlformats.org/drawingml/2006/main">
               <a:ext uri="{FF2B5EF4-FFF2-40B4-BE49-F238E27FC236}">
-                <a16:creationId xmlns:a16="http://schemas.microsoft.com/office/drawing/2014/main" id="{178F2275-F3A2-4C57-B6A4-B1170B8D2E0F}"/>
+                <a16:creationId xmlns:a16="http://schemas.microsoft.com/office/drawing/2014/main" id="{AAE87C8B-121C-4D04-995A-B71B2E85D6CE}"/>
               </a:ext>
             </a:extLst>
           </p:cNvPr>
@@ -12132,7 +12182,7 @@
           <p:cNvPr id="22" name="p03-out-label-2">
             <a:extLst xmlns:a="http://schemas.openxmlformats.org/drawingml/2006/main">
               <a:ext uri="{FF2B5EF4-FFF2-40B4-BE49-F238E27FC236}">
-                <a16:creationId xmlns:a16="http://schemas.microsoft.com/office/drawing/2014/main" id="{8C159EFB-12E3-450C-B055-1CBE4704C09E}"/>
+                <a16:creationId xmlns:a16="http://schemas.microsoft.com/office/drawing/2014/main" id="{444B94A7-7DFF-421D-B09E-5F9FA3C681A5}"/>
               </a:ext>
             </a:extLst>
           </p:cNvPr>
@@ -12187,7 +12237,7 @@
           <p:cNvPr id="23" name="p03-out-detail-2">
             <a:extLst xmlns:a="http://schemas.openxmlformats.org/drawingml/2006/main">
               <a:ext uri="{FF2B5EF4-FFF2-40B4-BE49-F238E27FC236}">
-                <a16:creationId xmlns:a16="http://schemas.microsoft.com/office/drawing/2014/main" id="{F0FBD6F7-4841-4825-BC18-F54E07758AE6}"/>
+                <a16:creationId xmlns:a16="http://schemas.microsoft.com/office/drawing/2014/main" id="{D28BEC7E-5070-45BC-ABE6-445F891AA67D}"/>
               </a:ext>
             </a:extLst>
           </p:cNvPr>
@@ -12246,7 +12296,7 @@
           <p:cNvPr id="24" name="p03-out-label-3">
             <a:extLst xmlns:a="http://schemas.openxmlformats.org/drawingml/2006/main">
               <a:ext uri="{FF2B5EF4-FFF2-40B4-BE49-F238E27FC236}">
-                <a16:creationId xmlns:a16="http://schemas.microsoft.com/office/drawing/2014/main" id="{86A851A5-06A4-41F7-92DD-33B71D1B3AA1}"/>
+                <a16:creationId xmlns:a16="http://schemas.microsoft.com/office/drawing/2014/main" id="{8543D8E8-2BE7-4C13-9826-501C34FAEFD8}"/>
               </a:ext>
             </a:extLst>
           </p:cNvPr>
@@ -12301,7 +12351,7 @@
           <p:cNvPr id="25" name="p03-out-detail-3">
             <a:extLst xmlns:a="http://schemas.openxmlformats.org/drawingml/2006/main">
               <a:ext uri="{FF2B5EF4-FFF2-40B4-BE49-F238E27FC236}">
-                <a16:creationId xmlns:a16="http://schemas.microsoft.com/office/drawing/2014/main" id="{332636EA-A886-4DF7-9848-F1F6C27E3D88}"/>
+                <a16:creationId xmlns:a16="http://schemas.microsoft.com/office/drawing/2014/main" id="{97AFAEC4-DA7F-4D66-A663-2D3BE9A97C9D}"/>
               </a:ext>
             </a:extLst>
           </p:cNvPr>
@@ -12360,7 +12410,7 @@
           <p:cNvPr id="26" name="p03-bottom">
             <a:extLst xmlns:a="http://schemas.openxmlformats.org/drawingml/2006/main">
               <a:ext uri="{FF2B5EF4-FFF2-40B4-BE49-F238E27FC236}">
-                <a16:creationId xmlns:a16="http://schemas.microsoft.com/office/drawing/2014/main" id="{DA007C45-D3AA-4AF6-877F-D87EF1502307}"/>
+                <a16:creationId xmlns:a16="http://schemas.microsoft.com/office/drawing/2014/main" id="{25AC0FAC-5F79-4A1E-B3DF-8492B68877E2}"/>
               </a:ext>
             </a:extLst>
           </p:cNvPr>
@@ -12507,7 +12557,7 @@
           <p:cNvPr id="6" name="p04-part-0">
             <a:extLst xmlns:a="http://schemas.openxmlformats.org/drawingml/2006/main">
               <a:ext uri="{FF2B5EF4-FFF2-40B4-BE49-F238E27FC236}">
-                <a16:creationId xmlns:a16="http://schemas.microsoft.com/office/drawing/2014/main" id="{A6FDA0C3-D3DD-4D37-BA97-02D23F54B0A0}"/>
+                <a16:creationId xmlns:a16="http://schemas.microsoft.com/office/drawing/2014/main" id="{A296C42E-62F2-4028-84B7-5421B27CAB6F}"/>
               </a:ext>
             </a:extLst>
           </p:cNvPr>
@@ -12594,7 +12644,7 @@
           <p:cNvPr id="7" name="p04-time-0">
             <a:extLst xmlns:a="http://schemas.openxmlformats.org/drawingml/2006/main">
               <a:ext uri="{FF2B5EF4-FFF2-40B4-BE49-F238E27FC236}">
-                <a16:creationId xmlns:a16="http://schemas.microsoft.com/office/drawing/2014/main" id="{0A205811-7102-467F-A193-04908A558038}"/>
+                <a16:creationId xmlns:a16="http://schemas.microsoft.com/office/drawing/2014/main" id="{43019E4A-3E38-4887-892C-9A85FC45E02F}"/>
               </a:ext>
             </a:extLst>
           </p:cNvPr>
@@ -12647,7 +12697,7 @@
           <p:cNvPr id="8" name="p04-part-1">
             <a:extLst xmlns:a="http://schemas.openxmlformats.org/drawingml/2006/main">
               <a:ext uri="{FF2B5EF4-FFF2-40B4-BE49-F238E27FC236}">
-                <a16:creationId xmlns:a16="http://schemas.microsoft.com/office/drawing/2014/main" id="{3841B482-12A4-4FE3-948B-97180502952A}"/>
+                <a16:creationId xmlns:a16="http://schemas.microsoft.com/office/drawing/2014/main" id="{BB4C9A24-E58D-4E0F-8865-8336BDF4F89F}"/>
               </a:ext>
             </a:extLst>
           </p:cNvPr>
@@ -12734,7 +12784,7 @@
           <p:cNvPr id="9" name="p04-time-1">
             <a:extLst xmlns:a="http://schemas.openxmlformats.org/drawingml/2006/main">
               <a:ext uri="{FF2B5EF4-FFF2-40B4-BE49-F238E27FC236}">
-                <a16:creationId xmlns:a16="http://schemas.microsoft.com/office/drawing/2014/main" id="{6A179E7E-3130-4FA5-9B64-C6282E99A992}"/>
+                <a16:creationId xmlns:a16="http://schemas.microsoft.com/office/drawing/2014/main" id="{EEA02290-2A03-4141-BA1C-471433E5BA45}"/>
               </a:ext>
             </a:extLst>
           </p:cNvPr>
@@ -12787,7 +12837,7 @@
           <p:cNvPr id="10" name="p04-part-2">
             <a:extLst xmlns:a="http://schemas.openxmlformats.org/drawingml/2006/main">
               <a:ext uri="{FF2B5EF4-FFF2-40B4-BE49-F238E27FC236}">
-                <a16:creationId xmlns:a16="http://schemas.microsoft.com/office/drawing/2014/main" id="{188D3BC8-BCB9-4765-9FB7-91F46DE2E3F5}"/>
+                <a16:creationId xmlns:a16="http://schemas.microsoft.com/office/drawing/2014/main" id="{59B9681C-A0E9-4EBF-91A7-7A6AFB3C5B0E}"/>
               </a:ext>
             </a:extLst>
           </p:cNvPr>
@@ -12874,7 +12924,7 @@
           <p:cNvPr id="11" name="p04-time-2">
             <a:extLst xmlns:a="http://schemas.openxmlformats.org/drawingml/2006/main">
               <a:ext uri="{FF2B5EF4-FFF2-40B4-BE49-F238E27FC236}">
-                <a16:creationId xmlns:a16="http://schemas.microsoft.com/office/drawing/2014/main" id="{B0A71B54-4051-4A60-A177-698DE6702AF8}"/>
+                <a16:creationId xmlns:a16="http://schemas.microsoft.com/office/drawing/2014/main" id="{B429DB71-0DE0-4B5C-A417-739575EA7669}"/>
               </a:ext>
             </a:extLst>
           </p:cNvPr>
@@ -12927,7 +12977,7 @@
           <p:cNvPr id="12" name="p04-part-3">
             <a:extLst xmlns:a="http://schemas.openxmlformats.org/drawingml/2006/main">
               <a:ext uri="{FF2B5EF4-FFF2-40B4-BE49-F238E27FC236}">
-                <a16:creationId xmlns:a16="http://schemas.microsoft.com/office/drawing/2014/main" id="{46C88F4E-CC84-4A9D-B9A0-88C382373BD5}"/>
+                <a16:creationId xmlns:a16="http://schemas.microsoft.com/office/drawing/2014/main" id="{D8D828FA-1E35-4BEB-AFF8-E9503C4BF495}"/>
               </a:ext>
             </a:extLst>
           </p:cNvPr>
@@ -13014,7 +13064,7 @@
           <p:cNvPr id="13" name="p04-time-3">
             <a:extLst xmlns:a="http://schemas.openxmlformats.org/drawingml/2006/main">
               <a:ext uri="{FF2B5EF4-FFF2-40B4-BE49-F238E27FC236}">
-                <a16:creationId xmlns:a16="http://schemas.microsoft.com/office/drawing/2014/main" id="{39A7455A-B019-4EAE-B7D5-853821D66F7A}"/>
+                <a16:creationId xmlns:a16="http://schemas.microsoft.com/office/drawing/2014/main" id="{316826FF-1B88-4F70-BC59-4EA7EED662BE}"/>
               </a:ext>
             </a:extLst>
           </p:cNvPr>
@@ -13067,7 +13117,7 @@
           <p:cNvPr id="14" name="p04-part-4">
             <a:extLst xmlns:a="http://schemas.openxmlformats.org/drawingml/2006/main">
               <a:ext uri="{FF2B5EF4-FFF2-40B4-BE49-F238E27FC236}">
-                <a16:creationId xmlns:a16="http://schemas.microsoft.com/office/drawing/2014/main" id="{A7E05687-18FF-4FBC-BF30-59C68F06D8DC}"/>
+                <a16:creationId xmlns:a16="http://schemas.microsoft.com/office/drawing/2014/main" id="{1C3CEACD-BBC4-4E11-B969-739B7B5DCE63}"/>
               </a:ext>
             </a:extLst>
           </p:cNvPr>
@@ -13154,7 +13204,7 @@
           <p:cNvPr id="15" name="p04-time-4">
             <a:extLst xmlns:a="http://schemas.openxmlformats.org/drawingml/2006/main">
               <a:ext uri="{FF2B5EF4-FFF2-40B4-BE49-F238E27FC236}">
-                <a16:creationId xmlns:a16="http://schemas.microsoft.com/office/drawing/2014/main" id="{DAC54D27-141C-4B30-A7B7-8851F5D75200}"/>
+                <a16:creationId xmlns:a16="http://schemas.microsoft.com/office/drawing/2014/main" id="{6FFAA392-A319-45B5-A0F6-D0CE73085F1D}"/>
               </a:ext>
             </a:extLst>
           </p:cNvPr>
@@ -13207,7 +13257,7 @@
           <p:cNvPr id="16" name="p04-example-label">
             <a:extLst xmlns:a="http://schemas.openxmlformats.org/drawingml/2006/main">
               <a:ext uri="{FF2B5EF4-FFF2-40B4-BE49-F238E27FC236}">
-                <a16:creationId xmlns:a16="http://schemas.microsoft.com/office/drawing/2014/main" id="{0DC77F64-8EF6-4F79-9435-EAF69D8754DC}"/>
+                <a16:creationId xmlns:a16="http://schemas.microsoft.com/office/drawing/2014/main" id="{3D581988-D2E2-4AF2-A259-0B29B3C99559}"/>
               </a:ext>
             </a:extLst>
           </p:cNvPr>
@@ -13262,7 +13312,7 @@
           <p:cNvPr id="17" name="p04-example">
             <a:extLst xmlns:a="http://schemas.openxmlformats.org/drawingml/2006/main">
               <a:ext uri="{FF2B5EF4-FFF2-40B4-BE49-F238E27FC236}">
-                <a16:creationId xmlns:a16="http://schemas.microsoft.com/office/drawing/2014/main" id="{D6377058-2F3B-4E41-9290-B2871EA21CDB}"/>
+                <a16:creationId xmlns:a16="http://schemas.microsoft.com/office/drawing/2014/main" id="{734FA1FE-BEB3-44D2-BD17-EA03758A84CC}"/>
               </a:ext>
             </a:extLst>
           </p:cNvPr>
@@ -13317,7 +13367,7 @@
           <p:cNvPr id="18" name="p04-bottom">
             <a:extLst xmlns:a="http://schemas.openxmlformats.org/drawingml/2006/main">
               <a:ext uri="{FF2B5EF4-FFF2-40B4-BE49-F238E27FC236}">
-                <a16:creationId xmlns:a16="http://schemas.microsoft.com/office/drawing/2014/main" id="{12BBFB8E-A984-4EC3-8BF5-B57B758C7D0B}"/>
+                <a16:creationId xmlns:a16="http://schemas.microsoft.com/office/drawing/2014/main" id="{81604BEC-8BFA-4416-B3AF-DA42BE6B749B}"/>
               </a:ext>
             </a:extLst>
           </p:cNvPr>
@@ -13464,7 +13514,7 @@
           <p:cNvPr id="6" name="p05-label-0">
             <a:extLst xmlns:a="http://schemas.openxmlformats.org/drawingml/2006/main">
               <a:ext uri="{FF2B5EF4-FFF2-40B4-BE49-F238E27FC236}">
-                <a16:creationId xmlns:a16="http://schemas.microsoft.com/office/drawing/2014/main" id="{228AEA61-F26B-4C0E-96F2-8E0E39B0968B}"/>
+                <a16:creationId xmlns:a16="http://schemas.microsoft.com/office/drawing/2014/main" id="{BE18CFB8-D68C-4B54-BBFD-420C6C31AB79}"/>
               </a:ext>
             </a:extLst>
           </p:cNvPr>
@@ -13521,7 +13571,7 @@
           <p:cNvPr id="7" name="p05-q-0">
             <a:extLst xmlns:a="http://schemas.openxmlformats.org/drawingml/2006/main">
               <a:ext uri="{FF2B5EF4-FFF2-40B4-BE49-F238E27FC236}">
-                <a16:creationId xmlns:a16="http://schemas.microsoft.com/office/drawing/2014/main" id="{50CC6005-BCD9-4352-BE3C-2C955016C069}"/>
+                <a16:creationId xmlns:a16="http://schemas.microsoft.com/office/drawing/2014/main" id="{623D1A34-0DBB-4F6B-8D83-28A41E6848A4}"/>
               </a:ext>
             </a:extLst>
           </p:cNvPr>
@@ -13576,7 +13626,7 @@
           <p:cNvPr id="8" name="p05-label-1">
             <a:extLst xmlns:a="http://schemas.openxmlformats.org/drawingml/2006/main">
               <a:ext uri="{FF2B5EF4-FFF2-40B4-BE49-F238E27FC236}">
-                <a16:creationId xmlns:a16="http://schemas.microsoft.com/office/drawing/2014/main" id="{6CC604BA-E22D-44FC-B5A7-0E2026D82E3C}"/>
+                <a16:creationId xmlns:a16="http://schemas.microsoft.com/office/drawing/2014/main" id="{5327CEDD-3559-422B-B8B6-BE32B036B4A8}"/>
               </a:ext>
             </a:extLst>
           </p:cNvPr>
@@ -13633,7 +13683,7 @@
           <p:cNvPr id="9" name="p05-q-1">
             <a:extLst xmlns:a="http://schemas.openxmlformats.org/drawingml/2006/main">
               <a:ext uri="{FF2B5EF4-FFF2-40B4-BE49-F238E27FC236}">
-                <a16:creationId xmlns:a16="http://schemas.microsoft.com/office/drawing/2014/main" id="{744C1552-C0D7-4239-8C82-7D25B9356AD0}"/>
+                <a16:creationId xmlns:a16="http://schemas.microsoft.com/office/drawing/2014/main" id="{BC7FDC89-0AE2-45F5-81E5-C7F2BF3A138B}"/>
               </a:ext>
             </a:extLst>
           </p:cNvPr>
@@ -13688,7 +13738,7 @@
           <p:cNvPr id="10" name="p05-label-2">
             <a:extLst xmlns:a="http://schemas.openxmlformats.org/drawingml/2006/main">
               <a:ext uri="{FF2B5EF4-FFF2-40B4-BE49-F238E27FC236}">
-                <a16:creationId xmlns:a16="http://schemas.microsoft.com/office/drawing/2014/main" id="{73F8D1DC-257E-416F-ACDF-CD3BFD324E19}"/>
+                <a16:creationId xmlns:a16="http://schemas.microsoft.com/office/drawing/2014/main" id="{B0F162BF-FDAA-43A0-9586-1D8CA52DFF58}"/>
               </a:ext>
             </a:extLst>
           </p:cNvPr>
@@ -13745,7 +13795,7 @@
           <p:cNvPr id="11" name="p05-q-2">
             <a:extLst xmlns:a="http://schemas.openxmlformats.org/drawingml/2006/main">
               <a:ext uri="{FF2B5EF4-FFF2-40B4-BE49-F238E27FC236}">
-                <a16:creationId xmlns:a16="http://schemas.microsoft.com/office/drawing/2014/main" id="{40AD9AF4-68E8-414B-954E-50D2501CADA1}"/>
+                <a16:creationId xmlns:a16="http://schemas.microsoft.com/office/drawing/2014/main" id="{5D8421D6-85D5-4994-8BE1-B9C6125BBCFC}"/>
               </a:ext>
             </a:extLst>
           </p:cNvPr>
@@ -13800,7 +13850,7 @@
           <p:cNvPr id="12" name="p05-label-3">
             <a:extLst xmlns:a="http://schemas.openxmlformats.org/drawingml/2006/main">
               <a:ext uri="{FF2B5EF4-FFF2-40B4-BE49-F238E27FC236}">
-                <a16:creationId xmlns:a16="http://schemas.microsoft.com/office/drawing/2014/main" id="{FB1658EA-19C8-45CA-BBDF-3285E7B5FCCA}"/>
+                <a16:creationId xmlns:a16="http://schemas.microsoft.com/office/drawing/2014/main" id="{DF89AE2F-1F6A-4E2F-9DE4-639E40AB7319}"/>
               </a:ext>
             </a:extLst>
           </p:cNvPr>
@@ -13857,7 +13907,7 @@
           <p:cNvPr id="13" name="p05-q-3">
             <a:extLst xmlns:a="http://schemas.openxmlformats.org/drawingml/2006/main">
               <a:ext uri="{FF2B5EF4-FFF2-40B4-BE49-F238E27FC236}">
-                <a16:creationId xmlns:a16="http://schemas.microsoft.com/office/drawing/2014/main" id="{EC245C05-CD05-4C5A-8B5A-918645B630F5}"/>
+                <a16:creationId xmlns:a16="http://schemas.microsoft.com/office/drawing/2014/main" id="{C30F2D89-31B9-44DC-87F2-379348209823}"/>
               </a:ext>
             </a:extLst>
           </p:cNvPr>
@@ -13912,7 +13962,7 @@
           <p:cNvPr id="14" name="p05-action">
             <a:extLst xmlns:a="http://schemas.openxmlformats.org/drawingml/2006/main">
               <a:ext uri="{FF2B5EF4-FFF2-40B4-BE49-F238E27FC236}">
-                <a16:creationId xmlns:a16="http://schemas.microsoft.com/office/drawing/2014/main" id="{5450E21D-9EE9-4AF0-BD5B-67148CB8325F}"/>
+                <a16:creationId xmlns:a16="http://schemas.microsoft.com/office/drawing/2014/main" id="{4B32538E-71E0-4301-BFBF-4AFA0E7D1F8E}"/>
               </a:ext>
             </a:extLst>
           </p:cNvPr>
@@ -13969,7 +14019,7 @@
           <p:cNvPr id="15" name="p05-boundary">
             <a:extLst xmlns:a="http://schemas.openxmlformats.org/drawingml/2006/main">
               <a:ext uri="{FF2B5EF4-FFF2-40B4-BE49-F238E27FC236}">
-                <a16:creationId xmlns:a16="http://schemas.microsoft.com/office/drawing/2014/main" id="{27BA922A-7731-45A7-A760-7A1A1D58FB21}"/>
+                <a16:creationId xmlns:a16="http://schemas.microsoft.com/office/drawing/2014/main" id="{C9238A1F-E686-4D6B-8865-B3141F2BC552}"/>
               </a:ext>
             </a:extLst>
           </p:cNvPr>
@@ -14116,7 +14166,7 @@
           <p:cNvPr id="6" name="p06-n-0">
             <a:extLst xmlns:a="http://schemas.openxmlformats.org/drawingml/2006/main">
               <a:ext uri="{FF2B5EF4-FFF2-40B4-BE49-F238E27FC236}">
-                <a16:creationId xmlns:a16="http://schemas.microsoft.com/office/drawing/2014/main" id="{2078782B-0E15-4322-8900-47973146361B}"/>
+                <a16:creationId xmlns:a16="http://schemas.microsoft.com/office/drawing/2014/main" id="{607AEB36-6F77-4E72-A0AD-2131223A3F82}"/>
               </a:ext>
             </a:extLst>
           </p:cNvPr>
@@ -14173,7 +14223,7 @@
           <p:cNvPr id="7" name="p06-label-0">
             <a:extLst xmlns:a="http://schemas.openxmlformats.org/drawingml/2006/main">
               <a:ext uri="{FF2B5EF4-FFF2-40B4-BE49-F238E27FC236}">
-                <a16:creationId xmlns:a16="http://schemas.microsoft.com/office/drawing/2014/main" id="{E860C223-272A-4F09-981A-E389F2B687F7}"/>
+                <a16:creationId xmlns:a16="http://schemas.microsoft.com/office/drawing/2014/main" id="{8804BE2F-D0EC-4AE0-B7C3-EB1407EE3BBD}"/>
               </a:ext>
             </a:extLst>
           </p:cNvPr>
@@ -14228,7 +14278,7 @@
           <p:cNvPr id="8" name="p06-q-0">
             <a:extLst xmlns:a="http://schemas.openxmlformats.org/drawingml/2006/main">
               <a:ext uri="{FF2B5EF4-FFF2-40B4-BE49-F238E27FC236}">
-                <a16:creationId xmlns:a16="http://schemas.microsoft.com/office/drawing/2014/main" id="{E2B28A8E-BA62-4B22-AF7F-E234759E608E}"/>
+                <a16:creationId xmlns:a16="http://schemas.microsoft.com/office/drawing/2014/main" id="{8B45ECFA-AAD8-490F-B83E-D33F527D3D97}"/>
               </a:ext>
             </a:extLst>
           </p:cNvPr>
@@ -14283,7 +14333,7 @@
           <p:cNvPr id="9" name="p06-n-1">
             <a:extLst xmlns:a="http://schemas.openxmlformats.org/drawingml/2006/main">
               <a:ext uri="{FF2B5EF4-FFF2-40B4-BE49-F238E27FC236}">
-                <a16:creationId xmlns:a16="http://schemas.microsoft.com/office/drawing/2014/main" id="{4CE1C2C2-224F-4FCD-9536-51339CB8C45F}"/>
+                <a16:creationId xmlns:a16="http://schemas.microsoft.com/office/drawing/2014/main" id="{E4FED3CF-301A-4409-B362-A4CBBBC4D608}"/>
               </a:ext>
             </a:extLst>
           </p:cNvPr>
@@ -14340,7 +14390,7 @@
           <p:cNvPr id="10" name="p06-label-1">
             <a:extLst xmlns:a="http://schemas.openxmlformats.org/drawingml/2006/main">
               <a:ext uri="{FF2B5EF4-FFF2-40B4-BE49-F238E27FC236}">
-                <a16:creationId xmlns:a16="http://schemas.microsoft.com/office/drawing/2014/main" id="{EECB0BC2-BABD-40E1-B209-D194DA6D548B}"/>
+                <a16:creationId xmlns:a16="http://schemas.microsoft.com/office/drawing/2014/main" id="{08C4B869-754D-4283-9C1E-45FF7907E1E2}"/>
               </a:ext>
             </a:extLst>
           </p:cNvPr>
@@ -14395,7 +14445,7 @@
           <p:cNvPr id="11" name="p06-q-1">
             <a:extLst xmlns:a="http://schemas.openxmlformats.org/drawingml/2006/main">
               <a:ext uri="{FF2B5EF4-FFF2-40B4-BE49-F238E27FC236}">
-                <a16:creationId xmlns:a16="http://schemas.microsoft.com/office/drawing/2014/main" id="{3CE1972C-5F57-4AB8-BD2B-38DFDBEF8CA7}"/>
+                <a16:creationId xmlns:a16="http://schemas.microsoft.com/office/drawing/2014/main" id="{F1E2B3A6-020F-465E-B46F-4D6FFA15B272}"/>
               </a:ext>
             </a:extLst>
           </p:cNvPr>
@@ -14450,7 +14500,7 @@
           <p:cNvPr id="12" name="p06-n-2">
             <a:extLst xmlns:a="http://schemas.openxmlformats.org/drawingml/2006/main">
               <a:ext uri="{FF2B5EF4-FFF2-40B4-BE49-F238E27FC236}">
-                <a16:creationId xmlns:a16="http://schemas.microsoft.com/office/drawing/2014/main" id="{DEF024D0-45EC-44C1-BC66-8D112A341496}"/>
+                <a16:creationId xmlns:a16="http://schemas.microsoft.com/office/drawing/2014/main" id="{2B6BB146-81B5-4C7F-A353-450B4C664A3C}"/>
               </a:ext>
             </a:extLst>
           </p:cNvPr>
@@ -14507,7 +14557,7 @@
           <p:cNvPr id="13" name="p06-label-2">
             <a:extLst xmlns:a="http://schemas.openxmlformats.org/drawingml/2006/main">
               <a:ext uri="{FF2B5EF4-FFF2-40B4-BE49-F238E27FC236}">
-                <a16:creationId xmlns:a16="http://schemas.microsoft.com/office/drawing/2014/main" id="{4857A638-8F48-468F-BE5D-2445FC71EBAC}"/>
+                <a16:creationId xmlns:a16="http://schemas.microsoft.com/office/drawing/2014/main" id="{A10A4336-B958-4C97-9229-A699203D477B}"/>
               </a:ext>
             </a:extLst>
           </p:cNvPr>
@@ -14562,7 +14612,7 @@
           <p:cNvPr id="14" name="p06-q-2">
             <a:extLst xmlns:a="http://schemas.openxmlformats.org/drawingml/2006/main">
               <a:ext uri="{FF2B5EF4-FFF2-40B4-BE49-F238E27FC236}">
-                <a16:creationId xmlns:a16="http://schemas.microsoft.com/office/drawing/2014/main" id="{C30C534C-7F22-4F92-B68C-DA380BA623C0}"/>
+                <a16:creationId xmlns:a16="http://schemas.microsoft.com/office/drawing/2014/main" id="{422EB807-22DB-418C-A53A-463D2101DD42}"/>
               </a:ext>
             </a:extLst>
           </p:cNvPr>
@@ -14617,7 +14667,7 @@
           <p:cNvPr id="15" name="p06-bottom">
             <a:extLst xmlns:a="http://schemas.openxmlformats.org/drawingml/2006/main">
               <a:ext uri="{FF2B5EF4-FFF2-40B4-BE49-F238E27FC236}">
-                <a16:creationId xmlns:a16="http://schemas.microsoft.com/office/drawing/2014/main" id="{905D1413-FFED-4832-8943-E54431053542}"/>
+                <a16:creationId xmlns:a16="http://schemas.microsoft.com/office/drawing/2014/main" id="{DB4B7F3B-17AB-471C-8F81-A1B470D7A8FA}"/>
               </a:ext>
             </a:extLst>
           </p:cNvPr>
@@ -14764,7 +14814,7 @@
           <p:cNvPr id="6" name="p07-left-title">
             <a:extLst xmlns:a="http://schemas.openxmlformats.org/drawingml/2006/main">
               <a:ext uri="{FF2B5EF4-FFF2-40B4-BE49-F238E27FC236}">
-                <a16:creationId xmlns:a16="http://schemas.microsoft.com/office/drawing/2014/main" id="{BBA3519D-31BB-4AB8-9316-99DA4B1B145A}"/>
+                <a16:creationId xmlns:a16="http://schemas.microsoft.com/office/drawing/2014/main" id="{22391924-CE14-4286-AA4D-2B4B5A01D8A6}"/>
               </a:ext>
             </a:extLst>
           </p:cNvPr>
@@ -14817,7 +14867,7 @@
           <p:cNvPr id="7" name="p07-ln-0">
             <a:extLst xmlns:a="http://schemas.openxmlformats.org/drawingml/2006/main">
               <a:ext uri="{FF2B5EF4-FFF2-40B4-BE49-F238E27FC236}">
-                <a16:creationId xmlns:a16="http://schemas.microsoft.com/office/drawing/2014/main" id="{87A663AA-6CEC-4C62-B726-52F0661E4B78}"/>
+                <a16:creationId xmlns:a16="http://schemas.microsoft.com/office/drawing/2014/main" id="{87028D9F-D351-4977-8CCD-6996ABA2A241}"/>
               </a:ext>
             </a:extLst>
           </p:cNvPr>
@@ -14849,14 +14899,14 @@
           <a:lstStyle xmlns:a="http://schemas.openxmlformats.org/drawingml/2006/main"/>
           <a:p xmlns:a="http://schemas.openxmlformats.org/drawingml/2006/main">
             <a:pPr algn="ctr">
-              <a:defRPr sz="1275" b="1">
+              <a:defRPr sz="1350" b="1">
                 <a:solidFill>
                   <a:srgbClr val="FFFFFF"/>
                 </a:solidFill>
               </a:defRPr>
             </a:pPr>
             <a:r>
-              <a:rPr sz="1275" b="1">
+              <a:rPr sz="1350" b="1">
                 <a:solidFill>
                   <a:srgbClr val="FFFFFF"/>
                 </a:solidFill>
@@ -14874,7 +14924,7 @@
           <p:cNvPr id="8" name="p07-l-0">
             <a:extLst xmlns:a="http://schemas.openxmlformats.org/drawingml/2006/main">
               <a:ext uri="{FF2B5EF4-FFF2-40B4-BE49-F238E27FC236}">
-                <a16:creationId xmlns:a16="http://schemas.microsoft.com/office/drawing/2014/main" id="{3AC4CDF4-0BFE-44C0-A943-A14C6B8DA61A}"/>
+                <a16:creationId xmlns:a16="http://schemas.microsoft.com/office/drawing/2014/main" id="{B9DCC3D1-3F57-4990-BD79-29F34E8419E3}"/>
               </a:ext>
             </a:extLst>
           </p:cNvPr>
@@ -14929,7 +14979,7 @@
           <p:cNvPr id="9" name="p07-ln-1">
             <a:extLst xmlns:a="http://schemas.openxmlformats.org/drawingml/2006/main">
               <a:ext uri="{FF2B5EF4-FFF2-40B4-BE49-F238E27FC236}">
-                <a16:creationId xmlns:a16="http://schemas.microsoft.com/office/drawing/2014/main" id="{1D0D2A07-2D03-408D-A2C3-4EC55C27732F}"/>
+                <a16:creationId xmlns:a16="http://schemas.microsoft.com/office/drawing/2014/main" id="{1C7CD8E0-BB2F-4CB7-8277-75A137B1F1D3}"/>
               </a:ext>
             </a:extLst>
           </p:cNvPr>
@@ -14961,14 +15011,14 @@
           <a:lstStyle xmlns:a="http://schemas.openxmlformats.org/drawingml/2006/main"/>
           <a:p xmlns:a="http://schemas.openxmlformats.org/drawingml/2006/main">
             <a:pPr algn="ctr">
-              <a:defRPr sz="1275" b="1">
+              <a:defRPr sz="1350" b="1">
                 <a:solidFill>
                   <a:srgbClr val="FFFFFF"/>
                 </a:solidFill>
               </a:defRPr>
             </a:pPr>
             <a:r>
-              <a:rPr sz="1275" b="1">
+              <a:rPr sz="1350" b="1">
                 <a:solidFill>
                   <a:srgbClr val="FFFFFF"/>
                 </a:solidFill>
@@ -14986,7 +15036,7 @@
           <p:cNvPr id="10" name="p07-l-1">
             <a:extLst xmlns:a="http://schemas.openxmlformats.org/drawingml/2006/main">
               <a:ext uri="{FF2B5EF4-FFF2-40B4-BE49-F238E27FC236}">
-                <a16:creationId xmlns:a16="http://schemas.microsoft.com/office/drawing/2014/main" id="{1A0C2F03-B35E-4B9B-8E94-2CFCF884ADC4}"/>
+                <a16:creationId xmlns:a16="http://schemas.microsoft.com/office/drawing/2014/main" id="{8F087986-8B9A-4B40-BEF4-926A5F6C039A}"/>
               </a:ext>
             </a:extLst>
           </p:cNvPr>
@@ -15041,7 +15091,7 @@
           <p:cNvPr id="11" name="p07-ln-2">
             <a:extLst xmlns:a="http://schemas.openxmlformats.org/drawingml/2006/main">
               <a:ext uri="{FF2B5EF4-FFF2-40B4-BE49-F238E27FC236}">
-                <a16:creationId xmlns:a16="http://schemas.microsoft.com/office/drawing/2014/main" id="{203F8B47-E091-4EBC-8C1A-C52F95FA9090}"/>
+                <a16:creationId xmlns:a16="http://schemas.microsoft.com/office/drawing/2014/main" id="{B9C20113-3FE4-4ACB-84A1-79C58DB51E77}"/>
               </a:ext>
             </a:extLst>
           </p:cNvPr>
@@ -15073,14 +15123,14 @@
           <a:lstStyle xmlns:a="http://schemas.openxmlformats.org/drawingml/2006/main"/>
           <a:p xmlns:a="http://schemas.openxmlformats.org/drawingml/2006/main">
             <a:pPr algn="ctr">
-              <a:defRPr sz="1275" b="1">
+              <a:defRPr sz="1350" b="1">
                 <a:solidFill>
                   <a:srgbClr val="FFFFFF"/>
                 </a:solidFill>
               </a:defRPr>
             </a:pPr>
             <a:r>
-              <a:rPr sz="1275" b="1">
+              <a:rPr sz="1350" b="1">
                 <a:solidFill>
                   <a:srgbClr val="FFFFFF"/>
                 </a:solidFill>
@@ -15098,7 +15148,7 @@
           <p:cNvPr id="12" name="p07-l-2">
             <a:extLst xmlns:a="http://schemas.openxmlformats.org/drawingml/2006/main">
               <a:ext uri="{FF2B5EF4-FFF2-40B4-BE49-F238E27FC236}">
-                <a16:creationId xmlns:a16="http://schemas.microsoft.com/office/drawing/2014/main" id="{F3299B47-015B-4029-9127-C9B12AA533A5}"/>
+                <a16:creationId xmlns:a16="http://schemas.microsoft.com/office/drawing/2014/main" id="{7FD839FC-B33A-4416-ACBD-EC7B2B6A98A9}"/>
               </a:ext>
             </a:extLst>
           </p:cNvPr>
@@ -15153,7 +15203,7 @@
           <p:cNvPr id="13" name="p07-ln-3">
             <a:extLst xmlns:a="http://schemas.openxmlformats.org/drawingml/2006/main">
               <a:ext uri="{FF2B5EF4-FFF2-40B4-BE49-F238E27FC236}">
-                <a16:creationId xmlns:a16="http://schemas.microsoft.com/office/drawing/2014/main" id="{ECCC167D-C782-4E7E-AE5F-93CFCF2377EE}"/>
+                <a16:creationId xmlns:a16="http://schemas.microsoft.com/office/drawing/2014/main" id="{C11112F8-F575-41B3-8558-BB788CEABD6E}"/>
               </a:ext>
             </a:extLst>
           </p:cNvPr>
@@ -15185,14 +15235,14 @@
           <a:lstStyle xmlns:a="http://schemas.openxmlformats.org/drawingml/2006/main"/>
           <a:p xmlns:a="http://schemas.openxmlformats.org/drawingml/2006/main">
             <a:pPr algn="ctr">
-              <a:defRPr sz="1275" b="1">
+              <a:defRPr sz="1350" b="1">
                 <a:solidFill>
                   <a:srgbClr val="FFFFFF"/>
                 </a:solidFill>
               </a:defRPr>
             </a:pPr>
             <a:r>
-              <a:rPr sz="1275" b="1">
+              <a:rPr sz="1350" b="1">
                 <a:solidFill>
                   <a:srgbClr val="FFFFFF"/>
                 </a:solidFill>
@@ -15210,7 +15260,7 @@
           <p:cNvPr id="14" name="p07-l-3">
             <a:extLst xmlns:a="http://schemas.openxmlformats.org/drawingml/2006/main">
               <a:ext uri="{FF2B5EF4-FFF2-40B4-BE49-F238E27FC236}">
-                <a16:creationId xmlns:a16="http://schemas.microsoft.com/office/drawing/2014/main" id="{5E2CE380-A284-4B90-8471-2F994C94E180}"/>
+                <a16:creationId xmlns:a16="http://schemas.microsoft.com/office/drawing/2014/main" id="{46ACB6D5-108C-4D7A-9830-286A7679C575}"/>
               </a:ext>
             </a:extLst>
           </p:cNvPr>
@@ -15265,7 +15315,7 @@
           <p:cNvPr id="15" name="p07-divider">
             <a:extLst xmlns:a="http://schemas.openxmlformats.org/drawingml/2006/main">
               <a:ext uri="{FF2B5EF4-FFF2-40B4-BE49-F238E27FC236}">
-                <a16:creationId xmlns:a16="http://schemas.microsoft.com/office/drawing/2014/main" id="{B37AB772-D3F3-494D-9CFA-3B5124CA9F6F}"/>
+                <a16:creationId xmlns:a16="http://schemas.microsoft.com/office/drawing/2014/main" id="{B5D0E4D6-5A13-43BE-971B-9CC18E97864D}"/>
               </a:ext>
             </a:extLst>
           </p:cNvPr>
@@ -15296,7 +15346,7 @@
           <p:cNvPr id="16" name="p07-right-title">
             <a:extLst xmlns:a="http://schemas.openxmlformats.org/drawingml/2006/main">
               <a:ext uri="{FF2B5EF4-FFF2-40B4-BE49-F238E27FC236}">
-                <a16:creationId xmlns:a16="http://schemas.microsoft.com/office/drawing/2014/main" id="{B071B7E6-D4A0-4C24-8928-A06D432A0979}"/>
+                <a16:creationId xmlns:a16="http://schemas.microsoft.com/office/drawing/2014/main" id="{3309B318-6054-455C-B1D6-19805D6C86F3}"/>
               </a:ext>
             </a:extLst>
           </p:cNvPr>
@@ -15349,7 +15399,7 @@
           <p:cNvPr id="17" name="p07-rn-0">
             <a:extLst xmlns:a="http://schemas.openxmlformats.org/drawingml/2006/main">
               <a:ext uri="{FF2B5EF4-FFF2-40B4-BE49-F238E27FC236}">
-                <a16:creationId xmlns:a16="http://schemas.microsoft.com/office/drawing/2014/main" id="{FAFDB5EA-600B-45B6-8968-5974003405BE}"/>
+                <a16:creationId xmlns:a16="http://schemas.microsoft.com/office/drawing/2014/main" id="{8AA78B86-F559-400D-BFE9-4A35F70ADC70}"/>
               </a:ext>
             </a:extLst>
           </p:cNvPr>
@@ -15406,7 +15456,7 @@
           <p:cNvPr id="18" name="p07-r-0">
             <a:extLst xmlns:a="http://schemas.openxmlformats.org/drawingml/2006/main">
               <a:ext uri="{FF2B5EF4-FFF2-40B4-BE49-F238E27FC236}">
-                <a16:creationId xmlns:a16="http://schemas.microsoft.com/office/drawing/2014/main" id="{3DD7ADE8-2B6A-4D52-9024-64020B0A9943}"/>
+                <a16:creationId xmlns:a16="http://schemas.microsoft.com/office/drawing/2014/main" id="{32CFFF54-E9EF-4944-9F54-732C206AB1B5}"/>
               </a:ext>
             </a:extLst>
           </p:cNvPr>
@@ -15461,7 +15511,7 @@
           <p:cNvPr id="19" name="p07-rn-1">
             <a:extLst xmlns:a="http://schemas.openxmlformats.org/drawingml/2006/main">
               <a:ext uri="{FF2B5EF4-FFF2-40B4-BE49-F238E27FC236}">
-                <a16:creationId xmlns:a16="http://schemas.microsoft.com/office/drawing/2014/main" id="{2F997D90-EC14-46D6-9DBA-ED93F94621CF}"/>
+                <a16:creationId xmlns:a16="http://schemas.microsoft.com/office/drawing/2014/main" id="{97502602-CD04-4E46-BB2C-4CD0C892021B}"/>
               </a:ext>
             </a:extLst>
           </p:cNvPr>
@@ -15518,7 +15568,7 @@
           <p:cNvPr id="20" name="p07-r-1">
             <a:extLst xmlns:a="http://schemas.openxmlformats.org/drawingml/2006/main">
               <a:ext uri="{FF2B5EF4-FFF2-40B4-BE49-F238E27FC236}">
-                <a16:creationId xmlns:a16="http://schemas.microsoft.com/office/drawing/2014/main" id="{A774AB81-451B-4915-A357-029583E30A20}"/>
+                <a16:creationId xmlns:a16="http://schemas.microsoft.com/office/drawing/2014/main" id="{04CD1A90-5E8E-42B0-B272-FB8F2DF7E85F}"/>
               </a:ext>
             </a:extLst>
           </p:cNvPr>
@@ -15573,7 +15623,7 @@
           <p:cNvPr id="21" name="p07-rn-2">
             <a:extLst xmlns:a="http://schemas.openxmlformats.org/drawingml/2006/main">
               <a:ext uri="{FF2B5EF4-FFF2-40B4-BE49-F238E27FC236}">
-                <a16:creationId xmlns:a16="http://schemas.microsoft.com/office/drawing/2014/main" id="{F1095100-5C4B-445E-985E-A960B1506A77}"/>
+                <a16:creationId xmlns:a16="http://schemas.microsoft.com/office/drawing/2014/main" id="{13076C74-866A-4669-8240-59848E17D1C6}"/>
               </a:ext>
             </a:extLst>
           </p:cNvPr>
@@ -15630,7 +15680,7 @@
           <p:cNvPr id="22" name="p07-r-2">
             <a:extLst xmlns:a="http://schemas.openxmlformats.org/drawingml/2006/main">
               <a:ext uri="{FF2B5EF4-FFF2-40B4-BE49-F238E27FC236}">
-                <a16:creationId xmlns:a16="http://schemas.microsoft.com/office/drawing/2014/main" id="{A16A47B0-A86C-43DD-A83C-7D6F4DB5BDA6}"/>
+                <a16:creationId xmlns:a16="http://schemas.microsoft.com/office/drawing/2014/main" id="{C5DF614C-E890-4339-8C49-A5B50D6AA63D}"/>
               </a:ext>
             </a:extLst>
           </p:cNvPr>
@@ -15685,7 +15735,7 @@
           <p:cNvPr id="23" name="p07-round">
             <a:extLst xmlns:a="http://schemas.openxmlformats.org/drawingml/2006/main">
               <a:ext uri="{FF2B5EF4-FFF2-40B4-BE49-F238E27FC236}">
-                <a16:creationId xmlns:a16="http://schemas.microsoft.com/office/drawing/2014/main" id="{1DBA1D56-E6DA-4E3B-81C4-7F930E015BCC}"/>
+                <a16:creationId xmlns:a16="http://schemas.microsoft.com/office/drawing/2014/main" id="{5028815D-A386-4422-B2F9-E6551980148F}"/>
               </a:ext>
             </a:extLst>
           </p:cNvPr>
@@ -15742,7 +15792,7 @@
           <p:cNvPr id="24" name="p07-bottom">
             <a:extLst xmlns:a="http://schemas.openxmlformats.org/drawingml/2006/main">
               <a:ext uri="{FF2B5EF4-FFF2-40B4-BE49-F238E27FC236}">
-                <a16:creationId xmlns:a16="http://schemas.microsoft.com/office/drawing/2014/main" id="{BFE0A9FA-F1BE-49FE-B55C-E13CC8DC1A39}"/>
+                <a16:creationId xmlns:a16="http://schemas.microsoft.com/office/drawing/2014/main" id="{2D917DE8-7AFD-450F-BCAE-F1AC95DE6946}"/>
               </a:ext>
             </a:extLst>
           </p:cNvPr>
@@ -15889,7 +15939,7 @@
           <p:cNvPr id="6" name="p08-left-title">
             <a:extLst xmlns:a="http://schemas.openxmlformats.org/drawingml/2006/main">
               <a:ext uri="{FF2B5EF4-FFF2-40B4-BE49-F238E27FC236}">
-                <a16:creationId xmlns:a16="http://schemas.microsoft.com/office/drawing/2014/main" id="{9E7D4521-5DBE-471E-A577-A65AD104EAA9}"/>
+                <a16:creationId xmlns:a16="http://schemas.microsoft.com/office/drawing/2014/main" id="{2786C235-E609-4403-A08D-86329DF2F6E9}"/>
               </a:ext>
             </a:extLst>
           </p:cNvPr>
@@ -15942,7 +15992,7 @@
           <p:cNvPr id="7" name="p08-d-0">
             <a:extLst xmlns:a="http://schemas.openxmlformats.org/drawingml/2006/main">
               <a:ext uri="{FF2B5EF4-FFF2-40B4-BE49-F238E27FC236}">
-                <a16:creationId xmlns:a16="http://schemas.microsoft.com/office/drawing/2014/main" id="{A38572B1-B75D-4B93-8CF5-1E3D4BE1B4E4}"/>
+                <a16:creationId xmlns:a16="http://schemas.microsoft.com/office/drawing/2014/main" id="{78D4690C-3BB6-4270-AAB0-ED697A0387E3}"/>
               </a:ext>
             </a:extLst>
           </p:cNvPr>
@@ -15999,7 +16049,7 @@
           <p:cNvPr id="8" name="p08-detail-0">
             <a:extLst xmlns:a="http://schemas.openxmlformats.org/drawingml/2006/main">
               <a:ext uri="{FF2B5EF4-FFF2-40B4-BE49-F238E27FC236}">
-                <a16:creationId xmlns:a16="http://schemas.microsoft.com/office/drawing/2014/main" id="{6B804EE8-8AB3-442A-920C-72EC9F0A72B0}"/>
+                <a16:creationId xmlns:a16="http://schemas.microsoft.com/office/drawing/2014/main" id="{05DBF44F-B376-43E7-9373-F7B5FC1BEE0F}"/>
               </a:ext>
             </a:extLst>
           </p:cNvPr>
@@ -16082,7 +16132,7 @@
           <p:cNvPr id="9" name="p08-d-1">
             <a:extLst xmlns:a="http://schemas.openxmlformats.org/drawingml/2006/main">
               <a:ext uri="{FF2B5EF4-FFF2-40B4-BE49-F238E27FC236}">
-                <a16:creationId xmlns:a16="http://schemas.microsoft.com/office/drawing/2014/main" id="{BECBA77B-4042-4D96-BAA1-EE9D7A1AEDAF}"/>
+                <a16:creationId xmlns:a16="http://schemas.microsoft.com/office/drawing/2014/main" id="{FD3C09F9-5263-4027-B18E-3F12AFB09EA3}"/>
               </a:ext>
             </a:extLst>
           </p:cNvPr>
@@ -16139,7 +16189,7 @@
           <p:cNvPr id="10" name="p08-detail-1">
             <a:extLst xmlns:a="http://schemas.openxmlformats.org/drawingml/2006/main">
               <a:ext uri="{FF2B5EF4-FFF2-40B4-BE49-F238E27FC236}">
-                <a16:creationId xmlns:a16="http://schemas.microsoft.com/office/drawing/2014/main" id="{2BB8C1B5-702C-40FA-BB6D-D795C689D43C}"/>
+                <a16:creationId xmlns:a16="http://schemas.microsoft.com/office/drawing/2014/main" id="{F5DDE5A7-9033-4DFF-AD9F-5E0E5E1D09FD}"/>
               </a:ext>
             </a:extLst>
           </p:cNvPr>
@@ -16222,7 +16272,7 @@
           <p:cNvPr id="11" name="p08-d-2">
             <a:extLst xmlns:a="http://schemas.openxmlformats.org/drawingml/2006/main">
               <a:ext uri="{FF2B5EF4-FFF2-40B4-BE49-F238E27FC236}">
-                <a16:creationId xmlns:a16="http://schemas.microsoft.com/office/drawing/2014/main" id="{DA9E50E5-D653-4EFF-B11E-7763979A0FA1}"/>
+                <a16:creationId xmlns:a16="http://schemas.microsoft.com/office/drawing/2014/main" id="{72751181-C888-4839-9E9D-D10AC6D3A08B}"/>
               </a:ext>
             </a:extLst>
           </p:cNvPr>
@@ -16279,7 +16329,7 @@
           <p:cNvPr id="12" name="p08-detail-2">
             <a:extLst xmlns:a="http://schemas.openxmlformats.org/drawingml/2006/main">
               <a:ext uri="{FF2B5EF4-FFF2-40B4-BE49-F238E27FC236}">
-                <a16:creationId xmlns:a16="http://schemas.microsoft.com/office/drawing/2014/main" id="{0F45F0C0-C7EC-40C4-9BFC-ADE21D2891E4}"/>
+                <a16:creationId xmlns:a16="http://schemas.microsoft.com/office/drawing/2014/main" id="{059146EE-91DB-42A9-97D8-8369746DD1AC}"/>
               </a:ext>
             </a:extLst>
           </p:cNvPr>
@@ -16362,7 +16412,7 @@
           <p:cNvPr id="13" name="p08-divider">
             <a:extLst xmlns:a="http://schemas.openxmlformats.org/drawingml/2006/main">
               <a:ext uri="{FF2B5EF4-FFF2-40B4-BE49-F238E27FC236}">
-                <a16:creationId xmlns:a16="http://schemas.microsoft.com/office/drawing/2014/main" id="{04B890AD-DA30-4229-8E96-5B99F2ECE740}"/>
+                <a16:creationId xmlns:a16="http://schemas.microsoft.com/office/drawing/2014/main" id="{42C4D3D9-0F0A-4E9C-9897-47D87C1B08DF}"/>
               </a:ext>
             </a:extLst>
           </p:cNvPr>
@@ -16393,7 +16443,7 @@
           <p:cNvPr id="14" name="p08-right-title">
             <a:extLst xmlns:a="http://schemas.openxmlformats.org/drawingml/2006/main">
               <a:ext uri="{FF2B5EF4-FFF2-40B4-BE49-F238E27FC236}">
-                <a16:creationId xmlns:a16="http://schemas.microsoft.com/office/drawing/2014/main" id="{1CDCE253-4265-42C6-AFF6-FE357E47B68F}"/>
+                <a16:creationId xmlns:a16="http://schemas.microsoft.com/office/drawing/2014/main" id="{C02118CE-678E-48E5-ACA4-5BFC9964C0C7}"/>
               </a:ext>
             </a:extLst>
           </p:cNvPr>
@@ -16446,7 +16496,7 @@
           <p:cNvPr id="15" name="p08-fl-0">
             <a:extLst xmlns:a="http://schemas.openxmlformats.org/drawingml/2006/main">
               <a:ext uri="{FF2B5EF4-FFF2-40B4-BE49-F238E27FC236}">
-                <a16:creationId xmlns:a16="http://schemas.microsoft.com/office/drawing/2014/main" id="{DE16B7A1-9DFC-491F-A000-895D98870F42}"/>
+                <a16:creationId xmlns:a16="http://schemas.microsoft.com/office/drawing/2014/main" id="{ADB926A0-D4FD-458F-9869-D67886C2185B}"/>
               </a:ext>
             </a:extLst>
           </p:cNvPr>
@@ -16501,7 +16551,7 @@
           <p:cNvPr id="16" name="p08-fd-0">
             <a:extLst xmlns:a="http://schemas.openxmlformats.org/drawingml/2006/main">
               <a:ext uri="{FF2B5EF4-FFF2-40B4-BE49-F238E27FC236}">
-                <a16:creationId xmlns:a16="http://schemas.microsoft.com/office/drawing/2014/main" id="{0AA74CAA-3EED-476D-AC2D-27A841305FAC}"/>
+                <a16:creationId xmlns:a16="http://schemas.microsoft.com/office/drawing/2014/main" id="{E8D31DD1-E10D-4B7B-BE37-A22EFEB97F7D}"/>
               </a:ext>
             </a:extLst>
           </p:cNvPr>
@@ -16556,7 +16606,7 @@
           <p:cNvPr id="17" name="p08-fl-1">
             <a:extLst xmlns:a="http://schemas.openxmlformats.org/drawingml/2006/main">
               <a:ext uri="{FF2B5EF4-FFF2-40B4-BE49-F238E27FC236}">
-                <a16:creationId xmlns:a16="http://schemas.microsoft.com/office/drawing/2014/main" id="{FA293940-8B5F-4ACF-9B92-0435E1902BFE}"/>
+                <a16:creationId xmlns:a16="http://schemas.microsoft.com/office/drawing/2014/main" id="{FAA8B50D-B95F-491C-8FDC-FD71D8FFA1B0}"/>
               </a:ext>
             </a:extLst>
           </p:cNvPr>
@@ -16611,7 +16661,7 @@
           <p:cNvPr id="18" name="p08-fd-1">
             <a:extLst xmlns:a="http://schemas.openxmlformats.org/drawingml/2006/main">
               <a:ext uri="{FF2B5EF4-FFF2-40B4-BE49-F238E27FC236}">
-                <a16:creationId xmlns:a16="http://schemas.microsoft.com/office/drawing/2014/main" id="{1D62BE9A-37E5-4FB7-A084-6ACC0DC9558D}"/>
+                <a16:creationId xmlns:a16="http://schemas.microsoft.com/office/drawing/2014/main" id="{87012FEC-B49A-46B1-B925-586E5C94ECCF}"/>
               </a:ext>
             </a:extLst>
           </p:cNvPr>
@@ -16666,7 +16716,7 @@
           <p:cNvPr id="19" name="p08-fl-2">
             <a:extLst xmlns:a="http://schemas.openxmlformats.org/drawingml/2006/main">
               <a:ext uri="{FF2B5EF4-FFF2-40B4-BE49-F238E27FC236}">
-                <a16:creationId xmlns:a16="http://schemas.microsoft.com/office/drawing/2014/main" id="{52F3AB34-A863-4D7D-A4B8-05B56BD250F2}"/>
+                <a16:creationId xmlns:a16="http://schemas.microsoft.com/office/drawing/2014/main" id="{5E3A3064-33D9-4916-9E6F-0D4D6D64BB48}"/>
               </a:ext>
             </a:extLst>
           </p:cNvPr>
@@ -16721,7 +16771,7 @@
           <p:cNvPr id="20" name="p08-fd-2">
             <a:extLst xmlns:a="http://schemas.openxmlformats.org/drawingml/2006/main">
               <a:ext uri="{FF2B5EF4-FFF2-40B4-BE49-F238E27FC236}">
-                <a16:creationId xmlns:a16="http://schemas.microsoft.com/office/drawing/2014/main" id="{23F209B5-4F7F-4583-AFAE-93B917D73939}"/>
+                <a16:creationId xmlns:a16="http://schemas.microsoft.com/office/drawing/2014/main" id="{C8D289A2-1752-4CFF-A53A-C605B7C7A076}"/>
               </a:ext>
             </a:extLst>
           </p:cNvPr>
@@ -16776,7 +16826,7 @@
           <p:cNvPr id="21" name="p08-fl-3">
             <a:extLst xmlns:a="http://schemas.openxmlformats.org/drawingml/2006/main">
               <a:ext uri="{FF2B5EF4-FFF2-40B4-BE49-F238E27FC236}">
-                <a16:creationId xmlns:a16="http://schemas.microsoft.com/office/drawing/2014/main" id="{FD4F896A-2AFE-43E1-AB48-A03E8D653D17}"/>
+                <a16:creationId xmlns:a16="http://schemas.microsoft.com/office/drawing/2014/main" id="{3DDC441A-1812-4585-A048-69C12395A568}"/>
               </a:ext>
             </a:extLst>
           </p:cNvPr>
@@ -16831,7 +16881,7 @@
           <p:cNvPr id="22" name="p08-fd-3">
             <a:extLst xmlns:a="http://schemas.openxmlformats.org/drawingml/2006/main">
               <a:ext uri="{FF2B5EF4-FFF2-40B4-BE49-F238E27FC236}">
-                <a16:creationId xmlns:a16="http://schemas.microsoft.com/office/drawing/2014/main" id="{2E18443F-D470-444E-8BAF-DD2DFB342FCC}"/>
+                <a16:creationId xmlns:a16="http://schemas.microsoft.com/office/drawing/2014/main" id="{D00E8DDE-8650-4FD9-88F2-5203A9AB6D43}"/>
               </a:ext>
             </a:extLst>
           </p:cNvPr>
@@ -16886,7 +16936,7 @@
           <p:cNvPr id="23" name="p08-fl-4">
             <a:extLst xmlns:a="http://schemas.openxmlformats.org/drawingml/2006/main">
               <a:ext uri="{FF2B5EF4-FFF2-40B4-BE49-F238E27FC236}">
-                <a16:creationId xmlns:a16="http://schemas.microsoft.com/office/drawing/2014/main" id="{E1EBDAF5-08F3-46BD-8914-A8920B494E80}"/>
+                <a16:creationId xmlns:a16="http://schemas.microsoft.com/office/drawing/2014/main" id="{69555EAC-9D79-492A-8E21-B6C85255BC3C}"/>
               </a:ext>
             </a:extLst>
           </p:cNvPr>
@@ -16941,7 +16991,7 @@
           <p:cNvPr id="24" name="p08-fd-4">
             <a:extLst xmlns:a="http://schemas.openxmlformats.org/drawingml/2006/main">
               <a:ext uri="{FF2B5EF4-FFF2-40B4-BE49-F238E27FC236}">
-                <a16:creationId xmlns:a16="http://schemas.microsoft.com/office/drawing/2014/main" id="{0E53A6AE-D065-4505-BFB2-077F001EFB4A}"/>
+                <a16:creationId xmlns:a16="http://schemas.microsoft.com/office/drawing/2014/main" id="{466CFFB2-C0B0-482B-9BE9-82C99F66C26C}"/>
               </a:ext>
             </a:extLst>
           </p:cNvPr>
@@ -16996,7 +17046,7 @@
           <p:cNvPr id="25" name="p08-fl-5">
             <a:extLst xmlns:a="http://schemas.openxmlformats.org/drawingml/2006/main">
               <a:ext uri="{FF2B5EF4-FFF2-40B4-BE49-F238E27FC236}">
-                <a16:creationId xmlns:a16="http://schemas.microsoft.com/office/drawing/2014/main" id="{1C9986AA-64AB-4BE1-86E1-568443EEF975}"/>
+                <a16:creationId xmlns:a16="http://schemas.microsoft.com/office/drawing/2014/main" id="{8204D11E-06E0-4D76-8411-7E41FD2B46A8}"/>
               </a:ext>
             </a:extLst>
           </p:cNvPr>
@@ -17051,7 +17101,7 @@
           <p:cNvPr id="26" name="p08-fd-5">
             <a:extLst xmlns:a="http://schemas.openxmlformats.org/drawingml/2006/main">
               <a:ext uri="{FF2B5EF4-FFF2-40B4-BE49-F238E27FC236}">
-                <a16:creationId xmlns:a16="http://schemas.microsoft.com/office/drawing/2014/main" id="{4DCB032D-48B8-4343-B9D1-99DBD7D3295F}"/>
+                <a16:creationId xmlns:a16="http://schemas.microsoft.com/office/drawing/2014/main" id="{984CF2EF-EA10-4F06-B8C4-33B1D414C9A1}"/>
               </a:ext>
             </a:extLst>
           </p:cNvPr>
@@ -17106,7 +17156,7 @@
           <p:cNvPr id="27" name="p08-bottom">
             <a:extLst xmlns:a="http://schemas.openxmlformats.org/drawingml/2006/main">
               <a:ext uri="{FF2B5EF4-FFF2-40B4-BE49-F238E27FC236}">
-                <a16:creationId xmlns:a16="http://schemas.microsoft.com/office/drawing/2014/main" id="{EA1BD43D-9FEB-46B5-8C32-6AE26418532D}"/>
+                <a16:creationId xmlns:a16="http://schemas.microsoft.com/office/drawing/2014/main" id="{02AA1ED8-6104-482E-8DF2-48B728825F4D}"/>
               </a:ext>
             </a:extLst>
           </p:cNvPr>
@@ -17253,7 +17303,7 @@
           <p:cNvPr id="6" name="p09-can-title">
             <a:extLst xmlns:a="http://schemas.openxmlformats.org/drawingml/2006/main">
               <a:ext uri="{FF2B5EF4-FFF2-40B4-BE49-F238E27FC236}">
-                <a16:creationId xmlns:a16="http://schemas.microsoft.com/office/drawing/2014/main" id="{0C66A0A4-6BEC-4239-A5FF-F49C5925452D}"/>
+                <a16:creationId xmlns:a16="http://schemas.microsoft.com/office/drawing/2014/main" id="{98121482-2C22-4072-9E9C-D12A3B465002}"/>
               </a:ext>
             </a:extLst>
           </p:cNvPr>
@@ -17308,7 +17358,7 @@
           <p:cNvPr id="7" name="p09-can-0">
             <a:extLst xmlns:a="http://schemas.openxmlformats.org/drawingml/2006/main">
               <a:ext uri="{FF2B5EF4-FFF2-40B4-BE49-F238E27FC236}">
-                <a16:creationId xmlns:a16="http://schemas.microsoft.com/office/drawing/2014/main" id="{0C328B32-72CE-49E9-805D-3360B79AD71C}"/>
+                <a16:creationId xmlns:a16="http://schemas.microsoft.com/office/drawing/2014/main" id="{CCB2C7FF-D415-4327-8755-C94DB9B82A35}"/>
               </a:ext>
             </a:extLst>
           </p:cNvPr>
@@ -17363,7 +17413,7 @@
           <p:cNvPr id="8" name="p09-can-1">
             <a:extLst xmlns:a="http://schemas.openxmlformats.org/drawingml/2006/main">
               <a:ext uri="{FF2B5EF4-FFF2-40B4-BE49-F238E27FC236}">
-                <a16:creationId xmlns:a16="http://schemas.microsoft.com/office/drawing/2014/main" id="{8B9BF61C-1DA0-4F2B-921A-162DB0706C96}"/>
+                <a16:creationId xmlns:a16="http://schemas.microsoft.com/office/drawing/2014/main" id="{346E7A85-F4E8-407E-BC09-971C69EDCD2A}"/>
               </a:ext>
             </a:extLst>
           </p:cNvPr>
@@ -17418,7 +17468,7 @@
           <p:cNvPr id="9" name="p09-can-2">
             <a:extLst xmlns:a="http://schemas.openxmlformats.org/drawingml/2006/main">
               <a:ext uri="{FF2B5EF4-FFF2-40B4-BE49-F238E27FC236}">
-                <a16:creationId xmlns:a16="http://schemas.microsoft.com/office/drawing/2014/main" id="{95AA2C15-D374-4D91-8B8A-7F96CBC5094A}"/>
+                <a16:creationId xmlns:a16="http://schemas.microsoft.com/office/drawing/2014/main" id="{C7CC4EB7-CA2A-45D1-9B8C-FD9DBDC24306}"/>
               </a:ext>
             </a:extLst>
           </p:cNvPr>
@@ -17473,7 +17523,7 @@
           <p:cNvPr id="10" name="p09-no-title">
             <a:extLst xmlns:a="http://schemas.openxmlformats.org/drawingml/2006/main">
               <a:ext uri="{FF2B5EF4-FFF2-40B4-BE49-F238E27FC236}">
-                <a16:creationId xmlns:a16="http://schemas.microsoft.com/office/drawing/2014/main" id="{062C02B8-5519-4124-96BD-C67D142AA646}"/>
+                <a16:creationId xmlns:a16="http://schemas.microsoft.com/office/drawing/2014/main" id="{366DA452-9665-416A-B95B-0043E971C80E}"/>
               </a:ext>
             </a:extLst>
           </p:cNvPr>
@@ -17528,7 +17578,7 @@
           <p:cNvPr id="11" name="p09-no-0">
             <a:extLst xmlns:a="http://schemas.openxmlformats.org/drawingml/2006/main">
               <a:ext uri="{FF2B5EF4-FFF2-40B4-BE49-F238E27FC236}">
-                <a16:creationId xmlns:a16="http://schemas.microsoft.com/office/drawing/2014/main" id="{E59ED220-775A-4CD6-BEA1-C9E41B268E02}"/>
+                <a16:creationId xmlns:a16="http://schemas.microsoft.com/office/drawing/2014/main" id="{58B36F88-66D7-4B97-9B4E-FA196C591D65}"/>
               </a:ext>
             </a:extLst>
           </p:cNvPr>
@@ -17583,7 +17633,7 @@
           <p:cNvPr id="12" name="p09-no-1">
             <a:extLst xmlns:a="http://schemas.openxmlformats.org/drawingml/2006/main">
               <a:ext uri="{FF2B5EF4-FFF2-40B4-BE49-F238E27FC236}">
-                <a16:creationId xmlns:a16="http://schemas.microsoft.com/office/drawing/2014/main" id="{BF1B0B92-0511-4951-9D99-30D350548B22}"/>
+                <a16:creationId xmlns:a16="http://schemas.microsoft.com/office/drawing/2014/main" id="{86A33582-28F5-4F6F-ADB6-5AE9B81E7024}"/>
               </a:ext>
             </a:extLst>
           </p:cNvPr>
@@ -17638,7 +17688,7 @@
           <p:cNvPr id="13" name="p09-no-2">
             <a:extLst xmlns:a="http://schemas.openxmlformats.org/drawingml/2006/main">
               <a:ext uri="{FF2B5EF4-FFF2-40B4-BE49-F238E27FC236}">
-                <a16:creationId xmlns:a16="http://schemas.microsoft.com/office/drawing/2014/main" id="{DC12E3C8-9D6F-4BD7-B74D-B39A555B3D67}"/>
+                <a16:creationId xmlns:a16="http://schemas.microsoft.com/office/drawing/2014/main" id="{47BE242F-D24D-4E6D-86DF-DB1522A0D697}"/>
               </a:ext>
             </a:extLst>
           </p:cNvPr>
@@ -17693,7 +17743,7 @@
           <p:cNvPr id="14" name="p09-bottom">
             <a:extLst xmlns:a="http://schemas.openxmlformats.org/drawingml/2006/main">
               <a:ext uri="{FF2B5EF4-FFF2-40B4-BE49-F238E27FC236}">
-                <a16:creationId xmlns:a16="http://schemas.microsoft.com/office/drawing/2014/main" id="{0C88AA03-CCF9-4E9F-82F5-5AD53B7F73A4}"/>
+                <a16:creationId xmlns:a16="http://schemas.microsoft.com/office/drawing/2014/main" id="{7D3928C0-FE59-4EA9-AB90-3546A73D5192}"/>
               </a:ext>
             </a:extLst>
           </p:cNvPr>
